--- a/marketing/regions/hmao/sitall-deck-urz.pptx
+++ b/marketing/regions/hmao/sitall-deck-urz.pptx
@@ -1677,13 +1677,13 @@
         </p:nvSpPr>
         <p:spPr>
           <a:xfrm>
-            <a:off x="8595360" y="-1463040"/>
-            <a:ext cx="4937760" cy="4937760"/>
+            <a:off x="8412480" y="-1645920"/>
+            <a:ext cx="5303520" cy="5303520"/>
           </a:xfrm>
           <a:prstGeom prst="ellipse">
             <a:avLst/>
           </a:prstGeom>
-          <a:ln w="12700">
+          <a:ln w="15875">
             <a:solidFill>
               <a:srgbClr val="C9D3EA"/>
             </a:solidFill>
@@ -1699,13 +1699,13 @@
         </p:nvSpPr>
         <p:spPr>
           <a:xfrm>
-            <a:off x="10058400" y="1005840"/>
-            <a:ext cx="3017520" cy="3017520"/>
+            <a:off x="10058400" y="822960"/>
+            <a:ext cx="3291840" cy="3291840"/>
           </a:xfrm>
           <a:prstGeom prst="ellipse">
             <a:avLst/>
           </a:prstGeom>
-          <a:ln w="15875">
+          <a:ln w="19050">
             <a:solidFill>
               <a:srgbClr val="C9A24B"/>
             </a:solidFill>
@@ -1721,13 +1721,13 @@
         </p:nvSpPr>
         <p:spPr>
           <a:xfrm>
-            <a:off x="9235440" y="4023360"/>
-            <a:ext cx="4023360" cy="4023360"/>
+            <a:off x="9052560" y="3840480"/>
+            <a:ext cx="4389120" cy="4389120"/>
           </a:xfrm>
           <a:prstGeom prst="ellipse">
             <a:avLst/>
           </a:prstGeom>
-          <a:ln w="12700">
+          <a:ln w="15875">
             <a:solidFill>
               <a:srgbClr val="C9D3EA"/>
             </a:solidFill>
@@ -1743,8 +1743,8 @@
         </p:nvSpPr>
         <p:spPr>
           <a:xfrm>
-            <a:off x="384048" y="310896"/>
-            <a:ext cx="6400800" cy="237744"/>
+            <a:off x="502920" y="365760"/>
+            <a:ext cx="6400800" cy="274320"/>
           </a:xfrm>
           <a:prstGeom prst="rect">
             <a:avLst/>
@@ -1760,7 +1760,7 @@
               <a:buNone/>
             </a:pPr>
             <a:r>
-              <a:rPr lang="en-US" sz="950" spc="300" kern="0" dirty="0">
+              <a:rPr lang="en-US" sz="1300" spc="300" kern="0" dirty="0">
                 <a:solidFill>
                   <a:srgbClr val="C9A24B"/>
                 </a:solidFill>
@@ -1770,7 +1770,7 @@
               </a:rPr>
               <a:t>АВГУСТ 2026 · КОНФИДЕНЦИАЛЬНО</a:t>
             </a:r>
-            <a:endParaRPr lang="en-US" sz="950" dirty="0"/>
+            <a:endParaRPr lang="en-US" sz="1300" dirty="0"/>
           </a:p>
         </p:txBody>
       </p:sp>
@@ -1782,8 +1782,8 @@
         </p:nvSpPr>
         <p:spPr>
           <a:xfrm>
-            <a:off x="347472" y="1005840"/>
-            <a:ext cx="7315200" cy="1188720"/>
+            <a:off x="448056" y="960120"/>
+            <a:ext cx="8229600" cy="1554480"/>
           </a:xfrm>
           <a:prstGeom prst="rect">
             <a:avLst/>
@@ -1799,7 +1799,7 @@
               <a:buNone/>
             </a:pPr>
             <a:r>
-              <a:rPr lang="en-US" sz="5400" dirty="0">
+              <a:rPr lang="en-US" sz="8000" dirty="0">
                 <a:solidFill>
                   <a:srgbClr val="1E2761"/>
                 </a:solidFill>
@@ -1809,7 +1809,7 @@
               </a:rPr>
               <a:t>Ситалл</a:t>
             </a:r>
-            <a:endParaRPr lang="en-US" sz="5400" dirty="0"/>
+            <a:endParaRPr lang="en-US" sz="8000" dirty="0"/>
           </a:p>
         </p:txBody>
       </p:sp>
@@ -1821,8 +1821,8 @@
         </p:nvSpPr>
         <p:spPr>
           <a:xfrm>
-            <a:off x="384048" y="2395728"/>
-            <a:ext cx="960120" cy="54864"/>
+            <a:off x="502920" y="2743200"/>
+            <a:ext cx="1371600" cy="82296"/>
           </a:xfrm>
           <a:prstGeom prst="rect">
             <a:avLst/>
@@ -1841,8 +1841,8 @@
         </p:nvSpPr>
         <p:spPr>
           <a:xfrm>
-            <a:off x="365760" y="2651760"/>
-            <a:ext cx="7315200" cy="914400"/>
+            <a:off x="484632" y="3063240"/>
+            <a:ext cx="8686800" cy="502920"/>
           </a:xfrm>
           <a:prstGeom prst="rect">
             <a:avLst/>
@@ -1855,82 +1855,59 @@
           <a:lstStyle/>
           <a:p>
             <a:pPr indent="0" marL="0">
-              <a:lnSpc>
-                <a:spcPct val="110000"/>
-              </a:lnSpc>
-              <a:buNone/>
-            </a:pPr>
-            <a:r>
-              <a:rPr lang="en-US" sz="2100" dirty="0">
+              <a:buNone/>
+            </a:pPr>
+            <a:r>
+              <a:rPr lang="en-US" sz="2400" dirty="0">
                 <a:solidFill>
                   <a:srgbClr val="1E2761"/>
+                </a:solidFill>
+                <a:latin typeface="Segoe UI Semibold" pitchFamily="34" charset="0"/>
+                <a:ea typeface="Segoe UI Semibold" pitchFamily="34" charset="-122"/>
+                <a:cs typeface="Segoe UI Semibold" pitchFamily="34" charset="-120"/>
+              </a:rPr>
+              <a:t>Технологический брокер для промышленности</a:t>
+            </a:r>
+            <a:endParaRPr lang="en-US" sz="2400" dirty="0"/>
+          </a:p>
+        </p:txBody>
+      </p:sp>
+      <p:sp>
+        <p:nvSpPr>
+          <p:cNvPr id="9" name="Text 7"/>
+          <p:cNvSpPr txBox="1"/>
+          <p:nvPr/>
+        </p:nvSpPr>
+        <p:spPr>
+          <a:xfrm>
+            <a:off x="502920" y="3639312"/>
+            <a:ext cx="8686800" cy="384048"/>
+          </a:xfrm>
+          <a:prstGeom prst="rect">
+            <a:avLst/>
+          </a:prstGeom>
+          <a:noFill/>
+          <a:ln/>
+        </p:spPr>
+        <p:txBody>
+          <a:bodyPr wrap="square" lIns="0" tIns="0" rIns="0" bIns="0" rtlCol="0" anchor="ctr"/>
+          <a:lstStyle/>
+          <a:p>
+            <a:pPr indent="0" marL="0">
+              <a:buNone/>
+            </a:pPr>
+            <a:r>
+              <a:rPr lang="en-US" sz="1800" dirty="0">
+                <a:solidFill>
+                  <a:srgbClr val="1B2140"/>
                 </a:solidFill>
                 <a:latin typeface="Segoe UI" pitchFamily="34" charset="0"/>
                 <a:ea typeface="Segoe UI" pitchFamily="34" charset="-122"/>
                 <a:cs typeface="Segoe UI" pitchFamily="34" charset="-120"/>
               </a:rPr>
-              <a:t>Технологический брокер</a:t>
-            </a:r>
-            <a:endParaRPr lang="en-US" sz="2100" dirty="0"/>
-          </a:p>
-          <a:p>
-            <a:pPr indent="0" marL="0">
-              <a:lnSpc>
-                <a:spcPct val="110000"/>
-              </a:lnSpc>
-              <a:buNone/>
-            </a:pPr>
-            <a:r>
-              <a:rPr lang="en-US" sz="2100" dirty="0">
-                <a:solidFill>
-                  <a:srgbClr val="1E2761"/>
-                </a:solidFill>
-                <a:latin typeface="Segoe UI" pitchFamily="34" charset="0"/>
-                <a:ea typeface="Segoe UI" pitchFamily="34" charset="-122"/>
-                <a:cs typeface="Segoe UI" pitchFamily="34" charset="-120"/>
-              </a:rPr>
-              <a:t>для промышленности</a:t>
-            </a:r>
-            <a:endParaRPr lang="en-US" sz="2100" dirty="0"/>
-          </a:p>
-        </p:txBody>
-      </p:sp>
-      <p:sp>
-        <p:nvSpPr>
-          <p:cNvPr id="9" name="Text 7"/>
-          <p:cNvSpPr txBox="1"/>
-          <p:nvPr/>
-        </p:nvSpPr>
-        <p:spPr>
-          <a:xfrm>
-            <a:off x="384048" y="3703320"/>
-            <a:ext cx="7315200" cy="320040"/>
-          </a:xfrm>
-          <a:prstGeom prst="rect">
-            <a:avLst/>
-          </a:prstGeom>
-          <a:noFill/>
-          <a:ln/>
-        </p:spPr>
-        <p:txBody>
-          <a:bodyPr wrap="square" lIns="0" tIns="0" rIns="0" bIns="0" rtlCol="0" anchor="ctr"/>
-          <a:lstStyle/>
-          <a:p>
-            <a:pPr indent="0" marL="0">
-              <a:buNone/>
-            </a:pPr>
-            <a:r>
-              <a:rPr lang="en-US" sz="1250" dirty="0">
-                <a:solidFill>
-                  <a:srgbClr val="1B2140"/>
-                </a:solidFill>
-                <a:latin typeface="Segoe UI" pitchFamily="34" charset="0"/>
-                <a:ea typeface="Segoe UI" pitchFamily="34" charset="-122"/>
-                <a:cs typeface="Segoe UI" pitchFamily="34" charset="-120"/>
-              </a:rPr>
-              <a:t>От задачи предприятия до внедрённой технологии</a:t>
-            </a:r>
-            <a:endParaRPr lang="en-US" sz="1250" dirty="0"/>
+              <a:t>Работаем от задачи предприятия до внедрённой технологии</a:t>
+            </a:r>
+            <a:endParaRPr lang="en-US" sz="1800" dirty="0"/>
           </a:p>
         </p:txBody>
       </p:sp>
@@ -1942,12 +1919,12 @@
         </p:nvSpPr>
         <p:spPr>
           <a:xfrm>
-            <a:off x="384048" y="4224528"/>
-            <a:ext cx="5852160" cy="512064"/>
+            <a:off x="502920" y="4343400"/>
+            <a:ext cx="6949440" cy="603504"/>
           </a:xfrm>
           <a:prstGeom prst="roundRect">
             <a:avLst>
-              <a:gd name="adj" fmla="val 12500"/>
+              <a:gd name="adj" fmla="val 13636"/>
             </a:avLst>
           </a:prstGeom>
           <a:solidFill>
@@ -1969,8 +1946,8 @@
         </p:nvSpPr>
         <p:spPr>
           <a:xfrm>
-            <a:off x="603504" y="4224528"/>
-            <a:ext cx="5486400" cy="512064"/>
+            <a:off x="777240" y="4343400"/>
+            <a:ext cx="6492240" cy="603504"/>
           </a:xfrm>
           <a:prstGeom prst="rect">
             <a:avLst/>
@@ -1983,10 +1960,13 @@
           <a:lstStyle/>
           <a:p>
             <a:pPr indent="0" marL="0">
-              <a:buNone/>
-            </a:pPr>
-            <a:r>
-              <a:rPr lang="en-US" sz="1250" dirty="0">
+              <a:lnSpc>
+                <a:spcPct val="105000"/>
+              </a:lnSpc>
+              <a:buNone/>
+            </a:pPr>
+            <a:r>
+              <a:rPr lang="en-US" sz="1800" dirty="0">
                 <a:solidFill>
                   <a:srgbClr val="1E2761"/>
                 </a:solidFill>
@@ -1996,7 +1976,7 @@
               </a:rPr>
               <a:t>Для АО «Югорский рыбоводный завод»</a:t>
             </a:r>
-            <a:endParaRPr lang="en-US" sz="1250" dirty="0"/>
+            <a:endParaRPr lang="en-US" sz="1800" dirty="0"/>
           </a:p>
         </p:txBody>
       </p:sp>
@@ -2008,8 +1988,8 @@
         </p:nvSpPr>
         <p:spPr>
           <a:xfrm>
-            <a:off x="384048" y="5212080"/>
-            <a:ext cx="7772400" cy="274320"/>
+            <a:off x="502920" y="5943600"/>
+            <a:ext cx="6400800" cy="329184"/>
           </a:xfrm>
           <a:prstGeom prst="rect">
             <a:avLst/>
@@ -2025,46 +2005,7 @@
               <a:buNone/>
             </a:pPr>
             <a:r>
-              <a:rPr lang="en-US" sz="800" i="1" dirty="0">
-                <a:solidFill>
-                  <a:srgbClr val="6B7699"/>
-                </a:solidFill>
-                <a:latin typeface="Segoe UI" pitchFamily="34" charset="0"/>
-                <a:ea typeface="Segoe UI" pitchFamily="34" charset="-122"/>
-                <a:cs typeface="Segoe UI" pitchFamily="34" charset="-120"/>
-              </a:rPr>
-              <a:t>Ситалл: стекло, которому наука дала прочность. 1958 год, лаборатория Китайгородского</a:t>
-            </a:r>
-            <a:endParaRPr lang="en-US" sz="800" dirty="0"/>
-          </a:p>
-        </p:txBody>
-      </p:sp>
-      <p:sp>
-        <p:nvSpPr>
-          <p:cNvPr id="13" name="Text 11"/>
-          <p:cNvSpPr txBox="1"/>
-          <p:nvPr/>
-        </p:nvSpPr>
-        <p:spPr>
-          <a:xfrm>
-            <a:off x="384048" y="5989320"/>
-            <a:ext cx="5486400" cy="274320"/>
-          </a:xfrm>
-          <a:prstGeom prst="rect">
-            <a:avLst/>
-          </a:prstGeom>
-          <a:noFill/>
-          <a:ln/>
-        </p:spPr>
-        <p:txBody>
-          <a:bodyPr wrap="square" lIns="0" tIns="0" rIns="0" bIns="0" rtlCol="0" anchor="ctr"/>
-          <a:lstStyle/>
-          <a:p>
-            <a:pPr indent="0" marL="0">
-              <a:buNone/>
-            </a:pPr>
-            <a:r>
-              <a:rPr lang="en-US" sz="1050" dirty="0">
+              <a:rPr lang="en-US" sz="1600" dirty="0">
                 <a:solidFill>
                   <a:srgbClr val="1E2761"/>
                 </a:solidFill>
@@ -2074,29 +2015,9 @@
               </a:rPr>
               <a:t>Кирилл Уклонский · uklonskiy.k@ya.ru</a:t>
             </a:r>
-            <a:endParaRPr lang="en-US" sz="1050" dirty="0"/>
-          </a:p>
-        </p:txBody>
-      </p:sp>
-      <p:sp>
-        <p:nvSpPr>
-          <p:cNvPr id="14" name="Shape 12"/>
-          <p:cNvSpPr/>
-          <p:nvPr/>
-        </p:nvSpPr>
-        <p:spPr>
-          <a:xfrm>
-            <a:off x="0" y="6803136"/>
-            <a:ext cx="12191695" cy="54864"/>
-          </a:xfrm>
-          <a:prstGeom prst="rect">
-            <a:avLst/>
-          </a:prstGeom>
-          <a:solidFill>
-            <a:srgbClr val="1E2761"/>
-          </a:solidFill>
-          <a:ln/>
-        </p:spPr>
+            <a:endParaRPr lang="en-US" sz="1600" dirty="0"/>
+          </a:p>
+        </p:txBody>
       </p:sp>
     </p:spTree>
   </p:cSld>
@@ -2131,8 +2052,8 @@
         </p:nvSpPr>
         <p:spPr>
           <a:xfrm>
-            <a:off x="384048" y="201168"/>
-            <a:ext cx="11423599" cy="237744"/>
+            <a:off x="502920" y="219456"/>
+            <a:ext cx="11185855" cy="274320"/>
           </a:xfrm>
           <a:prstGeom prst="rect">
             <a:avLst/>
@@ -2148,7 +2069,7 @@
               <a:buNone/>
             </a:pPr>
             <a:r>
-              <a:rPr lang="en-US" sz="950" spc="300" kern="0" dirty="0">
+              <a:rPr lang="en-US" sz="1300" spc="300" kern="0" dirty="0">
                 <a:solidFill>
                   <a:srgbClr val="C9A24B"/>
                 </a:solidFill>
@@ -2158,7 +2079,7 @@
               </a:rPr>
               <a:t>ПРЕДЛОЖЕНИЕ</a:t>
             </a:r>
-            <a:endParaRPr lang="en-US" sz="950" dirty="0"/>
+            <a:endParaRPr lang="en-US" sz="1300" dirty="0"/>
           </a:p>
         </p:txBody>
       </p:sp>
@@ -2170,8 +2091,8 @@
         </p:nvSpPr>
         <p:spPr>
           <a:xfrm>
-            <a:off x="365760" y="457200"/>
-            <a:ext cx="11423599" cy="475488"/>
+            <a:off x="484632" y="512064"/>
+            <a:ext cx="11185855" cy="566928"/>
           </a:xfrm>
           <a:prstGeom prst="rect">
             <a:avLst/>
@@ -2187,7 +2108,7 @@
               <a:buNone/>
             </a:pPr>
             <a:r>
-              <a:rPr lang="en-US" sz="2600" dirty="0">
+              <a:rPr lang="en-US" sz="2700" dirty="0">
                 <a:solidFill>
                   <a:srgbClr val="1E2761"/>
                 </a:solidFill>
@@ -2197,7 +2118,7 @@
               </a:rPr>
               <a:t>Пилот для Югорского рыбоводного завода</a:t>
             </a:r>
-            <a:endParaRPr lang="en-US" sz="2600" dirty="0"/>
+            <a:endParaRPr lang="en-US" sz="2700" dirty="0"/>
           </a:p>
         </p:txBody>
       </p:sp>
@@ -2209,8 +2130,8 @@
         </p:nvSpPr>
         <p:spPr>
           <a:xfrm>
-            <a:off x="384048" y="1024128"/>
-            <a:ext cx="960120" cy="41148"/>
+            <a:off x="502920" y="1133856"/>
+            <a:ext cx="1097280" cy="64008"/>
           </a:xfrm>
           <a:prstGeom prst="rect">
             <a:avLst/>
@@ -2229,8 +2150,8 @@
         </p:nvSpPr>
         <p:spPr>
           <a:xfrm>
-            <a:off x="384048" y="1280160"/>
-            <a:ext cx="6035040" cy="237744"/>
+            <a:off x="502920" y="1426464"/>
+            <a:ext cx="6126480" cy="274320"/>
           </a:xfrm>
           <a:prstGeom prst="rect">
             <a:avLst/>
@@ -2246,7 +2167,7 @@
               <a:buNone/>
             </a:pPr>
             <a:r>
-              <a:rPr lang="en-US" sz="950" spc="250" kern="0" dirty="0">
+              <a:rPr lang="en-US" sz="1300" spc="250" kern="0" dirty="0">
                 <a:solidFill>
                   <a:srgbClr val="C9A24B"/>
                 </a:solidFill>
@@ -2256,7 +2177,7 @@
               </a:rPr>
               <a:t>ЭТАПЫ, КАЖДЫЙ СО СВОЕЙ ТОЧКОЙ ВЫХОДА</a:t>
             </a:r>
-            <a:endParaRPr lang="en-US" sz="950" dirty="0"/>
+            <a:endParaRPr lang="en-US" sz="1300" dirty="0"/>
           </a:p>
         </p:txBody>
       </p:sp>
@@ -2268,12 +2189,12 @@
         </p:nvSpPr>
         <p:spPr>
           <a:xfrm>
-            <a:off x="384048" y="1627632"/>
-            <a:ext cx="6035040" cy="603504"/>
+            <a:off x="502920" y="1792224"/>
+            <a:ext cx="6126480" cy="841248"/>
           </a:xfrm>
           <a:prstGeom prst="roundRect">
             <a:avLst>
-              <a:gd name="adj" fmla="val 10606"/>
+              <a:gd name="adj" fmla="val 9783"/>
             </a:avLst>
           </a:prstGeom>
           <a:solidFill>
@@ -2285,6 +2206,13 @@
             </a:solidFill>
             <a:prstDash val="solid"/>
           </a:ln>
+          <a:effectLst>
+            <a:outerShdw sx="100000" sy="100000" kx="0" ky="0" algn="bl" rotWithShape="0" blurRad="177800" dist="50800" dir="5400000">
+              <a:srgbClr val="7E88A8">
+                <a:alpha val="30000"/>
+              </a:srgbClr>
+            </a:outerShdw>
+          </a:effectLst>
         </p:spPr>
       </p:sp>
       <p:sp>
@@ -2295,8 +2223,8 @@
         </p:nvSpPr>
         <p:spPr>
           <a:xfrm>
-            <a:off x="621792" y="1627632"/>
-            <a:ext cx="4206240" cy="603504"/>
+            <a:off x="777240" y="1792224"/>
+            <a:ext cx="4572000" cy="841248"/>
           </a:xfrm>
           <a:prstGeom prst="rect">
             <a:avLst/>
@@ -2309,10 +2237,13 @@
           <a:lstStyle/>
           <a:p>
             <a:pPr indent="0" marL="0">
-              <a:buNone/>
-            </a:pPr>
-            <a:r>
-              <a:rPr lang="en-US" sz="1200" dirty="0">
+              <a:lnSpc>
+                <a:spcPct val="100000"/>
+              </a:lnSpc>
+              <a:buNone/>
+            </a:pPr>
+            <a:r>
+              <a:rPr lang="en-US" sz="1700" dirty="0">
                 <a:solidFill>
                   <a:srgbClr val="1B2140"/>
                 </a:solidFill>
@@ -2322,7 +2253,7 @@
               </a:rPr>
               <a:t>Диагностика задачи</a:t>
             </a:r>
-            <a:endParaRPr lang="en-US" sz="1200" dirty="0"/>
+            <a:endParaRPr lang="en-US" sz="1700" dirty="0"/>
           </a:p>
         </p:txBody>
       </p:sp>
@@ -2334,8 +2265,8 @@
         </p:nvSpPr>
         <p:spPr>
           <a:xfrm>
-            <a:off x="4809744" y="1627632"/>
-            <a:ext cx="1371600" cy="603504"/>
+            <a:off x="5257800" y="1792224"/>
+            <a:ext cx="1097280" cy="841248"/>
           </a:xfrm>
           <a:prstGeom prst="rect">
             <a:avLst/>
@@ -2351,7 +2282,7 @@
               <a:buNone/>
             </a:pPr>
             <a:r>
-              <a:rPr lang="en-US" sz="1600" dirty="0">
+              <a:rPr lang="en-US" sz="2600" dirty="0">
                 <a:solidFill>
                   <a:srgbClr val="C9A24B"/>
                 </a:solidFill>
@@ -2361,7 +2292,7 @@
               </a:rPr>
               <a:t>3–4 нед.</a:t>
             </a:r>
-            <a:endParaRPr lang="en-US" sz="1600" dirty="0"/>
+            <a:endParaRPr lang="en-US" sz="2600" dirty="0"/>
           </a:p>
         </p:txBody>
       </p:sp>
@@ -2373,12 +2304,12 @@
         </p:nvSpPr>
         <p:spPr>
           <a:xfrm>
-            <a:off x="384048" y="2368296"/>
-            <a:ext cx="6035040" cy="603504"/>
+            <a:off x="502920" y="2852928"/>
+            <a:ext cx="6126480" cy="841248"/>
           </a:xfrm>
           <a:prstGeom prst="roundRect">
             <a:avLst>
-              <a:gd name="adj" fmla="val 10606"/>
+              <a:gd name="adj" fmla="val 9783"/>
             </a:avLst>
           </a:prstGeom>
           <a:solidFill>
@@ -2390,6 +2321,13 @@
             </a:solidFill>
             <a:prstDash val="solid"/>
           </a:ln>
+          <a:effectLst>
+            <a:outerShdw sx="100000" sy="100000" kx="0" ky="0" algn="bl" rotWithShape="0" blurRad="177800" dist="50800" dir="5400000">
+              <a:srgbClr val="7E88A8">
+                <a:alpha val="30000"/>
+              </a:srgbClr>
+            </a:outerShdw>
+          </a:effectLst>
         </p:spPr>
       </p:sp>
       <p:sp>
@@ -2400,8 +2338,8 @@
         </p:nvSpPr>
         <p:spPr>
           <a:xfrm>
-            <a:off x="621792" y="2368296"/>
-            <a:ext cx="4206240" cy="603504"/>
+            <a:off x="777240" y="2852928"/>
+            <a:ext cx="4572000" cy="841248"/>
           </a:xfrm>
           <a:prstGeom prst="rect">
             <a:avLst/>
@@ -2414,10 +2352,13 @@
           <a:lstStyle/>
           <a:p>
             <a:pPr indent="0" marL="0">
-              <a:buNone/>
-            </a:pPr>
-            <a:r>
-              <a:rPr lang="en-US" sz="1200" dirty="0">
+              <a:lnSpc>
+                <a:spcPct val="100000"/>
+              </a:lnSpc>
+              <a:buNone/>
+            </a:pPr>
+            <a:r>
+              <a:rPr lang="en-US" sz="1700" dirty="0">
                 <a:solidFill>
                   <a:srgbClr val="1B2140"/>
                 </a:solidFill>
@@ -2425,9 +2366,9 @@
                 <a:ea typeface="Segoe UI" pitchFamily="34" charset="-122"/>
                 <a:cs typeface="Segoe UI" pitchFamily="34" charset="-120"/>
               </a:rPr>
-              <a:t>Подбор и научная проверка: 5–7 решений</a:t>
-            </a:r>
-            <a:endParaRPr lang="en-US" sz="1200" dirty="0"/>
+              <a:t>Подбор и проверка: 5–7 решений</a:t>
+            </a:r>
+            <a:endParaRPr lang="en-US" sz="1700" dirty="0"/>
           </a:p>
         </p:txBody>
       </p:sp>
@@ -2439,8 +2380,8 @@
         </p:nvSpPr>
         <p:spPr>
           <a:xfrm>
-            <a:off x="4809744" y="2368296"/>
-            <a:ext cx="1371600" cy="603504"/>
+            <a:off x="5257800" y="2852928"/>
+            <a:ext cx="1097280" cy="841248"/>
           </a:xfrm>
           <a:prstGeom prst="rect">
             <a:avLst/>
@@ -2456,7 +2397,7 @@
               <a:buNone/>
             </a:pPr>
             <a:r>
-              <a:rPr lang="en-US" sz="1600" dirty="0">
+              <a:rPr lang="en-US" sz="2600" dirty="0">
                 <a:solidFill>
                   <a:srgbClr val="C9A24B"/>
                 </a:solidFill>
@@ -2466,7 +2407,7 @@
               </a:rPr>
               <a:t>6–8 нед.</a:t>
             </a:r>
-            <a:endParaRPr lang="en-US" sz="1600" dirty="0"/>
+            <a:endParaRPr lang="en-US" sz="2600" dirty="0"/>
           </a:p>
         </p:txBody>
       </p:sp>
@@ -2478,12 +2419,12 @@
         </p:nvSpPr>
         <p:spPr>
           <a:xfrm>
-            <a:off x="384048" y="3108960"/>
-            <a:ext cx="6035040" cy="603504"/>
+            <a:off x="502920" y="3913632"/>
+            <a:ext cx="6126480" cy="841248"/>
           </a:xfrm>
           <a:prstGeom prst="roundRect">
             <a:avLst>
-              <a:gd name="adj" fmla="val 10606"/>
+              <a:gd name="adj" fmla="val 9783"/>
             </a:avLst>
           </a:prstGeom>
           <a:solidFill>
@@ -2495,6 +2436,13 @@
             </a:solidFill>
             <a:prstDash val="solid"/>
           </a:ln>
+          <a:effectLst>
+            <a:outerShdw sx="100000" sy="100000" kx="0" ky="0" algn="bl" rotWithShape="0" blurRad="177800" dist="50800" dir="5400000">
+              <a:srgbClr val="7E88A8">
+                <a:alpha val="30000"/>
+              </a:srgbClr>
+            </a:outerShdw>
+          </a:effectLst>
         </p:spPr>
       </p:sp>
       <p:sp>
@@ -2505,8 +2453,8 @@
         </p:nvSpPr>
         <p:spPr>
           <a:xfrm>
-            <a:off x="621792" y="3108960"/>
-            <a:ext cx="4206240" cy="603504"/>
+            <a:off x="777240" y="3913632"/>
+            <a:ext cx="4572000" cy="841248"/>
           </a:xfrm>
           <a:prstGeom prst="rect">
             <a:avLst/>
@@ -2519,10 +2467,13 @@
           <a:lstStyle/>
           <a:p>
             <a:pPr indent="0" marL="0">
-              <a:buNone/>
-            </a:pPr>
-            <a:r>
-              <a:rPr lang="en-US" sz="1200" dirty="0">
+              <a:lnSpc>
+                <a:spcPct val="100000"/>
+              </a:lnSpc>
+              <a:buNone/>
+            </a:pPr>
+            <a:r>
+              <a:rPr lang="en-US" sz="1700" dirty="0">
                 <a:solidFill>
                   <a:srgbClr val="1B2140"/>
                 </a:solidFill>
@@ -2530,9 +2481,29 @@
                 <a:ea typeface="Segoe UI" pitchFamily="34" charset="-122"/>
                 <a:cs typeface="Segoe UI" pitchFamily="34" charset="-120"/>
               </a:rPr>
-              <a:t>Дальше по выбору завода: сделка, господдержка, внедрение</a:t>
-            </a:r>
-            <a:endParaRPr lang="en-US" sz="1200" dirty="0"/>
+              <a:t>Дальше по выбору завода: сделка,</a:t>
+            </a:r>
+            <a:endParaRPr lang="en-US" sz="1700" dirty="0"/>
+          </a:p>
+          <a:p>
+            <a:pPr indent="0" marL="0">
+              <a:lnSpc>
+                <a:spcPct val="100000"/>
+              </a:lnSpc>
+              <a:buNone/>
+            </a:pPr>
+            <a:r>
+              <a:rPr lang="en-US" sz="1700" dirty="0">
+                <a:solidFill>
+                  <a:srgbClr val="1B2140"/>
+                </a:solidFill>
+                <a:latin typeface="Segoe UI" pitchFamily="34" charset="0"/>
+                <a:ea typeface="Segoe UI" pitchFamily="34" charset="-122"/>
+                <a:cs typeface="Segoe UI" pitchFamily="34" charset="-120"/>
+              </a:rPr>
+              <a:t>господдержка, внедрение</a:t>
+            </a:r>
+            <a:endParaRPr lang="en-US" sz="1700" dirty="0"/>
           </a:p>
         </p:txBody>
       </p:sp>
@@ -2544,8 +2515,8 @@
         </p:nvSpPr>
         <p:spPr>
           <a:xfrm>
-            <a:off x="4809744" y="3108960"/>
-            <a:ext cx="1371600" cy="603504"/>
+            <a:off x="5257800" y="3913632"/>
+            <a:ext cx="1097280" cy="841248"/>
           </a:xfrm>
           <a:prstGeom prst="rect">
             <a:avLst/>
@@ -2561,7 +2532,7 @@
               <a:buNone/>
             </a:pPr>
             <a:r>
-              <a:rPr lang="en-US" sz="1600" dirty="0">
+              <a:rPr lang="en-US" sz="2600" dirty="0">
                 <a:solidFill>
                   <a:srgbClr val="C9A24B"/>
                 </a:solidFill>
@@ -2571,7 +2542,7 @@
               </a:rPr>
               <a:t>—</a:t>
             </a:r>
-            <a:endParaRPr lang="en-US" sz="1600" dirty="0"/>
+            <a:endParaRPr lang="en-US" sz="2600" dirty="0"/>
           </a:p>
         </p:txBody>
       </p:sp>
@@ -2583,8 +2554,8 @@
         </p:nvSpPr>
         <p:spPr>
           <a:xfrm>
-            <a:off x="384048" y="3922776"/>
-            <a:ext cx="6035040" cy="274320"/>
+            <a:off x="502920" y="5029200"/>
+            <a:ext cx="6126480" cy="548640"/>
           </a:xfrm>
           <a:prstGeom prst="rect">
             <a:avLst/>
@@ -2597,10 +2568,13 @@
           <a:lstStyle/>
           <a:p>
             <a:pPr indent="0" marL="0">
-              <a:buNone/>
-            </a:pPr>
-            <a:r>
-              <a:rPr lang="en-US" sz="1150" dirty="0">
+              <a:lnSpc>
+                <a:spcPct val="105000"/>
+              </a:lnSpc>
+              <a:buNone/>
+            </a:pPr>
+            <a:r>
+              <a:rPr lang="en-US" sz="1600" dirty="0">
                 <a:solidFill>
                   <a:srgbClr val="1E2761"/>
                 </a:solidFill>
@@ -2610,7 +2584,7 @@
               </a:rPr>
               <a:t>Задачи завода не публикуются: NDA — до начала диагностики</a:t>
             </a:r>
-            <a:endParaRPr lang="en-US" sz="1150" dirty="0"/>
+            <a:endParaRPr lang="en-US" sz="1600" dirty="0"/>
           </a:p>
         </p:txBody>
       </p:sp>
@@ -2622,8 +2596,8 @@
         </p:nvSpPr>
         <p:spPr>
           <a:xfrm>
-            <a:off x="6876288" y="1280160"/>
-            <a:ext cx="4931359" cy="237744"/>
+            <a:off x="7132320" y="1426464"/>
+            <a:ext cx="4556455" cy="274320"/>
           </a:xfrm>
           <a:prstGeom prst="rect">
             <a:avLst/>
@@ -2639,7 +2613,7 @@
               <a:buNone/>
             </a:pPr>
             <a:r>
-              <a:rPr lang="en-US" sz="950" spc="250" kern="0" dirty="0">
+              <a:rPr lang="en-US" sz="1300" spc="250" kern="0" dirty="0">
                 <a:solidFill>
                   <a:srgbClr val="C9A24B"/>
                 </a:solidFill>
@@ -2649,7 +2623,7 @@
               </a:rPr>
               <a:t>ЧТО ПРОСИМ</a:t>
             </a:r>
-            <a:endParaRPr lang="en-US" sz="950" dirty="0"/>
+            <a:endParaRPr lang="en-US" sz="1300" dirty="0"/>
           </a:p>
         </p:txBody>
       </p:sp>
@@ -2661,8 +2635,8 @@
         </p:nvSpPr>
         <p:spPr>
           <a:xfrm>
-            <a:off x="6876288" y="1664208"/>
-            <a:ext cx="292608" cy="292608"/>
+            <a:off x="7132320" y="1865376"/>
+            <a:ext cx="384048" cy="384048"/>
           </a:xfrm>
           <a:prstGeom prst="ellipse">
             <a:avLst/>
@@ -2681,8 +2655,8 @@
         </p:nvSpPr>
         <p:spPr>
           <a:xfrm>
-            <a:off x="6876288" y="1664208"/>
-            <a:ext cx="292608" cy="292608"/>
+            <a:off x="7132320" y="1865376"/>
+            <a:ext cx="384048" cy="384048"/>
           </a:xfrm>
           <a:prstGeom prst="rect">
             <a:avLst/>
@@ -2698,7 +2672,7 @@
               <a:buNone/>
             </a:pPr>
             <a:r>
-              <a:rPr lang="en-US" sz="1200" dirty="0">
+              <a:rPr lang="en-US" sz="1600" dirty="0">
                 <a:solidFill>
                   <a:srgbClr val="FFFFFF"/>
                 </a:solidFill>
@@ -2708,7 +2682,7 @@
               </a:rPr>
               <a:t>1</a:t>
             </a:r>
-            <a:endParaRPr lang="en-US" sz="1200" dirty="0"/>
+            <a:endParaRPr lang="en-US" sz="1600" dirty="0"/>
           </a:p>
         </p:txBody>
       </p:sp>
@@ -2720,8 +2694,8 @@
         </p:nvSpPr>
         <p:spPr>
           <a:xfrm>
-            <a:off x="7315200" y="1581912"/>
-            <a:ext cx="4492447" cy="658368"/>
+            <a:off x="7680960" y="1737360"/>
+            <a:ext cx="4007815" cy="841248"/>
           </a:xfrm>
           <a:prstGeom prst="rect">
             <a:avLst/>
@@ -2740,7 +2714,7 @@
               <a:buNone/>
             </a:pPr>
             <a:r>
-              <a:rPr lang="en-US" sz="1200" dirty="0">
+              <a:rPr lang="en-US" sz="1700" dirty="0">
                 <a:solidFill>
                   <a:srgbClr val="1E2761"/>
                 </a:solidFill>
@@ -2750,7 +2724,7 @@
               </a:rPr>
               <a:t>Одна технологическая задача завода</a:t>
             </a:r>
-            <a:endParaRPr lang="en-US" sz="1200" dirty="0"/>
+            <a:endParaRPr lang="en-US" sz="1700" dirty="0"/>
           </a:p>
         </p:txBody>
       </p:sp>
@@ -2762,8 +2736,8 @@
         </p:nvSpPr>
         <p:spPr>
           <a:xfrm>
-            <a:off x="6876288" y="2377440"/>
-            <a:ext cx="292608" cy="292608"/>
+            <a:off x="7132320" y="2779776"/>
+            <a:ext cx="384048" cy="384048"/>
           </a:xfrm>
           <a:prstGeom prst="ellipse">
             <a:avLst/>
@@ -2782,8 +2756,8 @@
         </p:nvSpPr>
         <p:spPr>
           <a:xfrm>
-            <a:off x="6876288" y="2377440"/>
-            <a:ext cx="292608" cy="292608"/>
+            <a:off x="7132320" y="2779776"/>
+            <a:ext cx="384048" cy="384048"/>
           </a:xfrm>
           <a:prstGeom prst="rect">
             <a:avLst/>
@@ -2799,7 +2773,7 @@
               <a:buNone/>
             </a:pPr>
             <a:r>
-              <a:rPr lang="en-US" sz="1200" dirty="0">
+              <a:rPr lang="en-US" sz="1600" dirty="0">
                 <a:solidFill>
                   <a:srgbClr val="FFFFFF"/>
                 </a:solidFill>
@@ -2809,7 +2783,7 @@
               </a:rPr>
               <a:t>2</a:t>
             </a:r>
-            <a:endParaRPr lang="en-US" sz="1200" dirty="0"/>
+            <a:endParaRPr lang="en-US" sz="1600" dirty="0"/>
           </a:p>
         </p:txBody>
       </p:sp>
@@ -2821,8 +2795,8 @@
         </p:nvSpPr>
         <p:spPr>
           <a:xfrm>
-            <a:off x="7315200" y="2295144"/>
-            <a:ext cx="4492447" cy="658368"/>
+            <a:off x="7680960" y="2651760"/>
+            <a:ext cx="4007815" cy="841248"/>
           </a:xfrm>
           <a:prstGeom prst="rect">
             <a:avLst/>
@@ -2841,7 +2815,7 @@
               <a:buNone/>
             </a:pPr>
             <a:r>
-              <a:rPr lang="en-US" sz="1200" dirty="0">
+              <a:rPr lang="en-US" sz="1700" dirty="0">
                 <a:solidFill>
                   <a:srgbClr val="1E2761"/>
                 </a:solidFill>
@@ -2851,7 +2825,7 @@
               </a:rPr>
               <a:t>Два часа ваших технологов на диагностику</a:t>
             </a:r>
-            <a:endParaRPr lang="en-US" sz="1200" dirty="0"/>
+            <a:endParaRPr lang="en-US" sz="1700" dirty="0"/>
           </a:p>
         </p:txBody>
       </p:sp>
@@ -2863,8 +2837,8 @@
         </p:nvSpPr>
         <p:spPr>
           <a:xfrm>
-            <a:off x="6876288" y="3090672"/>
-            <a:ext cx="292608" cy="292608"/>
+            <a:off x="7132320" y="3694176"/>
+            <a:ext cx="384048" cy="384048"/>
           </a:xfrm>
           <a:prstGeom prst="ellipse">
             <a:avLst/>
@@ -2883,8 +2857,8 @@
         </p:nvSpPr>
         <p:spPr>
           <a:xfrm>
-            <a:off x="6876288" y="3090672"/>
-            <a:ext cx="292608" cy="292608"/>
+            <a:off x="7132320" y="3694176"/>
+            <a:ext cx="384048" cy="384048"/>
           </a:xfrm>
           <a:prstGeom prst="rect">
             <a:avLst/>
@@ -2900,7 +2874,7 @@
               <a:buNone/>
             </a:pPr>
             <a:r>
-              <a:rPr lang="en-US" sz="1200" dirty="0">
+              <a:rPr lang="en-US" sz="1600" dirty="0">
                 <a:solidFill>
                   <a:srgbClr val="FFFFFF"/>
                 </a:solidFill>
@@ -2910,7 +2884,7 @@
               </a:rPr>
               <a:t>3</a:t>
             </a:r>
-            <a:endParaRPr lang="en-US" sz="1200" dirty="0"/>
+            <a:endParaRPr lang="en-US" sz="1600" dirty="0"/>
           </a:p>
         </p:txBody>
       </p:sp>
@@ -2922,8 +2896,8 @@
         </p:nvSpPr>
         <p:spPr>
           <a:xfrm>
-            <a:off x="7315200" y="3008376"/>
-            <a:ext cx="4492447" cy="658368"/>
+            <a:off x="7680960" y="3566160"/>
+            <a:ext cx="4007815" cy="841248"/>
           </a:xfrm>
           <a:prstGeom prst="rect">
             <a:avLst/>
@@ -2942,7 +2916,7 @@
               <a:buNone/>
             </a:pPr>
             <a:r>
-              <a:rPr lang="en-US" sz="1200" dirty="0">
+              <a:rPr lang="en-US" sz="1700" dirty="0">
                 <a:solidFill>
                   <a:srgbClr val="1E2761"/>
                 </a:solidFill>
@@ -2952,7 +2926,7 @@
               </a:rPr>
               <a:t>Рабочая встреча на площадке</a:t>
             </a:r>
-            <a:endParaRPr lang="en-US" sz="1200" dirty="0"/>
+            <a:endParaRPr lang="en-US" sz="1700" dirty="0"/>
           </a:p>
         </p:txBody>
       </p:sp>
@@ -2964,12 +2938,12 @@
         </p:nvSpPr>
         <p:spPr>
           <a:xfrm>
-            <a:off x="6876288" y="3931920"/>
-            <a:ext cx="4931359" cy="1371600"/>
+            <a:off x="7132320" y="4718304"/>
+            <a:ext cx="4556455" cy="1554480"/>
           </a:xfrm>
           <a:prstGeom prst="roundRect">
             <a:avLst>
-              <a:gd name="adj" fmla="val 4667"/>
+              <a:gd name="adj" fmla="val 5294"/>
             </a:avLst>
           </a:prstGeom>
           <a:solidFill>
@@ -2981,6 +2955,13 @@
             </a:solidFill>
             <a:prstDash val="solid"/>
           </a:ln>
+          <a:effectLst>
+            <a:outerShdw sx="100000" sy="100000" kx="0" ky="0" algn="bl" rotWithShape="0" blurRad="177800" dist="50800" dir="5400000">
+              <a:srgbClr val="7E88A8">
+                <a:alpha val="30000"/>
+              </a:srgbClr>
+            </a:outerShdw>
+          </a:effectLst>
         </p:spPr>
       </p:sp>
       <p:sp>
@@ -2991,8 +2972,8 @@
         </p:nvSpPr>
         <p:spPr>
           <a:xfrm>
-            <a:off x="7114032" y="4096512"/>
-            <a:ext cx="4455871" cy="219456"/>
+            <a:off x="7406640" y="4901184"/>
+            <a:ext cx="4007815" cy="256032"/>
           </a:xfrm>
           <a:prstGeom prst="rect">
             <a:avLst/>
@@ -3008,7 +2989,7 @@
               <a:buNone/>
             </a:pPr>
             <a:r>
-              <a:rPr lang="en-US" sz="900" spc="250" kern="0" dirty="0">
+              <a:rPr lang="en-US" sz="1300" spc="250" kern="0" dirty="0">
                 <a:solidFill>
                   <a:srgbClr val="C9A24B"/>
                 </a:solidFill>
@@ -3018,7 +2999,7 @@
               </a:rPr>
               <a:t>СЛЕДУЮЩИЙ ШАГ</a:t>
             </a:r>
-            <a:endParaRPr lang="en-US" sz="900" dirty="0"/>
+            <a:endParaRPr lang="en-US" sz="1300" dirty="0"/>
           </a:p>
         </p:txBody>
       </p:sp>
@@ -3030,8 +3011,8 @@
         </p:nvSpPr>
         <p:spPr>
           <a:xfrm>
-            <a:off x="7114032" y="4352544"/>
-            <a:ext cx="4455871" cy="868680"/>
+            <a:off x="7406640" y="5193792"/>
+            <a:ext cx="4007815" cy="960120"/>
           </a:xfrm>
           <a:prstGeom prst="rect">
             <a:avLst/>
@@ -3045,12 +3026,12 @@
           <a:p>
             <a:pPr indent="0" marL="0">
               <a:lnSpc>
-                <a:spcPct val="112000"/>
+                <a:spcPct val="108000"/>
               </a:lnSpc>
               <a:buNone/>
             </a:pPr>
             <a:r>
-              <a:rPr lang="en-US" sz="1050" dirty="0">
+              <a:rPr lang="en-US" sz="1600" dirty="0">
                 <a:solidFill>
                   <a:srgbClr val="1B2140"/>
                 </a:solidFill>
@@ -3058,9 +3039,9 @@
                 <a:ea typeface="Segoe UI" pitchFamily="34" charset="-122"/>
                 <a:cs typeface="Segoe UI" pitchFamily="34" charset="-120"/>
               </a:rPr>
-              <a:t>Выбираем задачу пилота и согласуем соглашение о неразглашении. Условия пилота — по итогам диагностики.</a:t>
-            </a:r>
-            <a:endParaRPr lang="en-US" sz="1050" dirty="0"/>
+              <a:t>Выбираем задачу пилота и согласуем соглашение о неразглашении. Условия — по итогам диагностики.</a:t>
+            </a:r>
+            <a:endParaRPr lang="en-US" sz="1600" dirty="0"/>
           </a:p>
         </p:txBody>
       </p:sp>
@@ -3072,8 +3053,8 @@
         </p:nvSpPr>
         <p:spPr>
           <a:xfrm>
-            <a:off x="384048" y="6080760"/>
-            <a:ext cx="5486400" cy="274320"/>
+            <a:off x="502920" y="6035040"/>
+            <a:ext cx="5486400" cy="310896"/>
           </a:xfrm>
           <a:prstGeom prst="rect">
             <a:avLst/>
@@ -3089,7 +3070,7 @@
               <a:buNone/>
             </a:pPr>
             <a:r>
-              <a:rPr lang="en-US" sz="1050" dirty="0">
+              <a:rPr lang="en-US" sz="1600" dirty="0">
                 <a:solidFill>
                   <a:srgbClr val="1E2761"/>
                 </a:solidFill>
@@ -3099,40 +3080,20 @@
               </a:rPr>
               <a:t>Кирилл Уклонский · uklonskiy.k@ya.ru</a:t>
             </a:r>
-            <a:endParaRPr lang="en-US" sz="1050" dirty="0"/>
-          </a:p>
-        </p:txBody>
-      </p:sp>
-      <p:sp>
-        <p:nvSpPr>
-          <p:cNvPr id="30" name="Shape 28"/>
-          <p:cNvSpPr/>
-          <p:nvPr/>
-        </p:nvSpPr>
-        <p:spPr>
-          <a:xfrm>
-            <a:off x="0" y="6803136"/>
-            <a:ext cx="12191695" cy="54864"/>
-          </a:xfrm>
-          <a:prstGeom prst="rect">
-            <a:avLst/>
-          </a:prstGeom>
-          <a:solidFill>
-            <a:srgbClr val="1E2761"/>
-          </a:solidFill>
-          <a:ln/>
-        </p:spPr>
-      </p:sp>
-      <p:sp>
-        <p:nvSpPr>
-          <p:cNvPr id="31" name="Text 29"/>
-          <p:cNvSpPr txBox="1"/>
-          <p:nvPr/>
-        </p:nvSpPr>
-        <p:spPr>
-          <a:xfrm>
-            <a:off x="384048" y="6528816"/>
-            <a:ext cx="1828800" cy="219456"/>
+            <a:endParaRPr lang="en-US" sz="1600" dirty="0"/>
+          </a:p>
+        </p:txBody>
+      </p:sp>
+      <p:sp>
+        <p:nvSpPr>
+          <p:cNvPr id="30" name="Text 28"/>
+          <p:cNvSpPr txBox="1"/>
+          <p:nvPr/>
+        </p:nvSpPr>
+        <p:spPr>
+          <a:xfrm>
+            <a:off x="502920" y="6473952"/>
+            <a:ext cx="1828800" cy="274320"/>
           </a:xfrm>
           <a:prstGeom prst="rect">
             <a:avLst/>
@@ -3148,7 +3109,7 @@
               <a:buNone/>
             </a:pPr>
             <a:r>
-              <a:rPr lang="en-US" sz="750" dirty="0">
+              <a:rPr lang="en-US" sz="1200" dirty="0">
                 <a:solidFill>
                   <a:srgbClr val="6B7699"/>
                 </a:solidFill>
@@ -3158,20 +3119,20 @@
               </a:rPr>
               <a:t>Ситалл</a:t>
             </a:r>
-            <a:endParaRPr lang="en-US" sz="750" dirty="0"/>
-          </a:p>
-        </p:txBody>
-      </p:sp>
-      <p:sp>
-        <p:nvSpPr>
-          <p:cNvPr id="32" name="Text 30"/>
-          <p:cNvSpPr txBox="1"/>
-          <p:nvPr/>
-        </p:nvSpPr>
-        <p:spPr>
-          <a:xfrm>
-            <a:off x="10911535" y="6528816"/>
-            <a:ext cx="914400" cy="219456"/>
+            <a:endParaRPr lang="en-US" sz="1200" dirty="0"/>
+          </a:p>
+        </p:txBody>
+      </p:sp>
+      <p:sp>
+        <p:nvSpPr>
+          <p:cNvPr id="31" name="Text 29"/>
+          <p:cNvSpPr txBox="1"/>
+          <p:nvPr/>
+        </p:nvSpPr>
+        <p:spPr>
+          <a:xfrm>
+            <a:off x="10774375" y="6473952"/>
+            <a:ext cx="914400" cy="274320"/>
           </a:xfrm>
           <a:prstGeom prst="rect">
             <a:avLst/>
@@ -3187,7 +3148,7 @@
               <a:buNone/>
             </a:pPr>
             <a:r>
-              <a:rPr lang="en-US" sz="750" dirty="0">
+              <a:rPr lang="en-US" sz="1200" dirty="0">
                 <a:solidFill>
                   <a:srgbClr val="6B7699"/>
                 </a:solidFill>
@@ -3197,7 +3158,7 @@
               </a:rPr>
               <a:t>10 / 10</a:t>
             </a:r>
-            <a:endParaRPr lang="en-US" sz="750" dirty="0"/>
+            <a:endParaRPr lang="en-US" sz="1200" dirty="0"/>
           </a:p>
         </p:txBody>
       </p:sp>
@@ -3234,8 +3195,8 @@
         </p:nvSpPr>
         <p:spPr>
           <a:xfrm>
-            <a:off x="384048" y="201168"/>
-            <a:ext cx="11423599" cy="237744"/>
+            <a:off x="502920" y="219456"/>
+            <a:ext cx="11185855" cy="274320"/>
           </a:xfrm>
           <a:prstGeom prst="rect">
             <a:avLst/>
@@ -3251,7 +3212,7 @@
               <a:buNone/>
             </a:pPr>
             <a:r>
-              <a:rPr lang="en-US" sz="950" spc="300" kern="0" dirty="0">
+              <a:rPr lang="en-US" sz="1300" spc="300" kern="0" dirty="0">
                 <a:solidFill>
                   <a:srgbClr val="C9A24B"/>
                 </a:solidFill>
@@ -3261,7 +3222,7 @@
               </a:rPr>
               <a:t>КОНТЕКСТ</a:t>
             </a:r>
-            <a:endParaRPr lang="en-US" sz="950" dirty="0"/>
+            <a:endParaRPr lang="en-US" sz="1300" dirty="0"/>
           </a:p>
         </p:txBody>
       </p:sp>
@@ -3273,8 +3234,8 @@
         </p:nvSpPr>
         <p:spPr>
           <a:xfrm>
-            <a:off x="365760" y="457200"/>
-            <a:ext cx="11423599" cy="475488"/>
+            <a:off x="484632" y="512064"/>
+            <a:ext cx="11185855" cy="566928"/>
           </a:xfrm>
           <a:prstGeom prst="rect">
             <a:avLst/>
@@ -3290,7 +3251,7 @@
               <a:buNone/>
             </a:pPr>
             <a:r>
-              <a:rPr lang="en-US" sz="2600" dirty="0">
+              <a:rPr lang="en-US" sz="2700" dirty="0">
                 <a:solidFill>
                   <a:srgbClr val="1E2761"/>
                 </a:solidFill>
@@ -3300,7 +3261,7 @@
               </a:rPr>
               <a:t>Спрос на воспроизводство растёт быстрее технологий</a:t>
             </a:r>
-            <a:endParaRPr lang="en-US" sz="2600" dirty="0"/>
+            <a:endParaRPr lang="en-US" sz="2700" dirty="0"/>
           </a:p>
         </p:txBody>
       </p:sp>
@@ -3312,8 +3273,8 @@
         </p:nvSpPr>
         <p:spPr>
           <a:xfrm>
-            <a:off x="384048" y="1024128"/>
-            <a:ext cx="960120" cy="41148"/>
+            <a:off x="502920" y="1133856"/>
+            <a:ext cx="1097280" cy="64008"/>
           </a:xfrm>
           <a:prstGeom prst="rect">
             <a:avLst/>
@@ -3332,12 +3293,12 @@
         </p:nvSpPr>
         <p:spPr>
           <a:xfrm>
-            <a:off x="384048" y="1371600"/>
-            <a:ext cx="5574640" cy="2194560"/>
+            <a:off x="502920" y="1481328"/>
+            <a:ext cx="5437480" cy="2304288"/>
           </a:xfrm>
           <a:prstGeom prst="roundRect">
             <a:avLst>
-              <a:gd name="adj" fmla="val 2917"/>
+              <a:gd name="adj" fmla="val 3571"/>
             </a:avLst>
           </a:prstGeom>
           <a:solidFill>
@@ -3349,6 +3310,13 @@
             </a:solidFill>
             <a:prstDash val="solid"/>
           </a:ln>
+          <a:effectLst>
+            <a:outerShdw sx="100000" sy="100000" kx="0" ky="0" algn="bl" rotWithShape="0" blurRad="177800" dist="50800" dir="5400000">
+              <a:srgbClr val="7E88A8">
+                <a:alpha val="30000"/>
+              </a:srgbClr>
+            </a:outerShdw>
+          </a:effectLst>
         </p:spPr>
       </p:sp>
       <p:sp>
@@ -3359,8 +3327,8 @@
         </p:nvSpPr>
         <p:spPr>
           <a:xfrm>
-            <a:off x="621792" y="1591056"/>
-            <a:ext cx="274320" cy="34747"/>
+            <a:off x="795528" y="1737360"/>
+            <a:ext cx="384048" cy="45720"/>
           </a:xfrm>
           <a:prstGeom prst="rect">
             <a:avLst/>
@@ -3379,8 +3347,8 @@
         </p:nvSpPr>
         <p:spPr>
           <a:xfrm>
-            <a:off x="621792" y="1682496"/>
-            <a:ext cx="5099152" cy="566928"/>
+            <a:off x="795528" y="1810512"/>
+            <a:ext cx="4852264" cy="713232"/>
           </a:xfrm>
           <a:prstGeom prst="rect">
             <a:avLst/>
@@ -3396,7 +3364,7 @@
               <a:buNone/>
             </a:pPr>
             <a:r>
-              <a:rPr lang="en-US" sz="3000" dirty="0">
+              <a:rPr lang="en-US" sz="4400" dirty="0">
                 <a:solidFill>
                   <a:srgbClr val="1E2761"/>
                 </a:solidFill>
@@ -3406,7 +3374,7 @@
               </a:rPr>
               <a:t>60 млн</a:t>
             </a:r>
-            <a:endParaRPr lang="en-US" sz="3000" dirty="0"/>
+            <a:endParaRPr lang="en-US" sz="4400" dirty="0"/>
           </a:p>
         </p:txBody>
       </p:sp>
@@ -3418,8 +3386,8 @@
         </p:nvSpPr>
         <p:spPr>
           <a:xfrm>
-            <a:off x="621792" y="2267712"/>
-            <a:ext cx="5099152" cy="1024128"/>
+            <a:off x="795528" y="2542032"/>
+            <a:ext cx="4852264" cy="841248"/>
           </a:xfrm>
           <a:prstGeom prst="rect">
             <a:avLst/>
@@ -3433,12 +3401,12 @@
           <a:p>
             <a:pPr indent="0" marL="0">
               <a:lnSpc>
-                <a:spcPct val="112000"/>
+                <a:spcPct val="108000"/>
               </a:lnSpc>
               <a:buNone/>
             </a:pPr>
             <a:r>
-              <a:rPr lang="en-US" sz="1050" dirty="0">
+              <a:rPr lang="en-US" sz="1600" dirty="0">
                 <a:solidFill>
                   <a:srgbClr val="1B2140"/>
                 </a:solidFill>
@@ -3448,7 +3416,7 @@
               </a:rPr>
               <a:t>мальков выпустил один «РН-Юганскнефтегаз» с начала 2026 года</a:t>
             </a:r>
-            <a:endParaRPr lang="en-US" sz="1050" dirty="0"/>
+            <a:endParaRPr lang="en-US" sz="1600" dirty="0"/>
           </a:p>
         </p:txBody>
       </p:sp>
@@ -3460,8 +3428,8 @@
         </p:nvSpPr>
         <p:spPr>
           <a:xfrm>
-            <a:off x="621792" y="3273552"/>
-            <a:ext cx="5099152" cy="201168"/>
+            <a:off x="795528" y="3438144"/>
+            <a:ext cx="4852264" cy="237744"/>
           </a:xfrm>
           <a:prstGeom prst="rect">
             <a:avLst/>
@@ -3477,7 +3445,7 @@
               <a:buNone/>
             </a:pPr>
             <a:r>
-              <a:rPr lang="en-US" sz="750" i="1" dirty="0">
+              <a:rPr lang="en-US" sz="1200" i="1" dirty="0">
                 <a:solidFill>
                   <a:srgbClr val="6B7699"/>
                 </a:solidFill>
@@ -3491,7 +3459,7 @@
               <a:buNone/>
             </a:pPr>
             <a:r>
-              <a:rPr lang="en-US" sz="750" i="1" u="sng" dirty="0">
+              <a:rPr lang="en-US" sz="1200" i="1" u="sng" dirty="0">
                 <a:solidFill>
                   <a:srgbClr val="6B7699"/>
                 </a:solidFill>
@@ -3508,7 +3476,7 @@
               </a:rPr>
               <a:t>Ведомости</a:t>
             </a:r>
-            <a:endParaRPr lang="en-US" sz="750" dirty="0"/>
+            <a:endParaRPr lang="en-US" sz="1200" dirty="0"/>
           </a:p>
         </p:txBody>
       </p:sp>
@@ -3520,12 +3488,12 @@
         </p:nvSpPr>
         <p:spPr>
           <a:xfrm>
-            <a:off x="6233008" y="1371600"/>
-            <a:ext cx="5574640" cy="2194560"/>
+            <a:off x="6251296" y="1481328"/>
+            <a:ext cx="5437480" cy="2304288"/>
           </a:xfrm>
           <a:prstGeom prst="roundRect">
             <a:avLst>
-              <a:gd name="adj" fmla="val 2917"/>
+              <a:gd name="adj" fmla="val 3571"/>
             </a:avLst>
           </a:prstGeom>
           <a:solidFill>
@@ -3537,6 +3505,13 @@
             </a:solidFill>
             <a:prstDash val="solid"/>
           </a:ln>
+          <a:effectLst>
+            <a:outerShdw sx="100000" sy="100000" kx="0" ky="0" algn="bl" rotWithShape="0" blurRad="177800" dist="50800" dir="5400000">
+              <a:srgbClr val="7E88A8">
+                <a:alpha val="30000"/>
+              </a:srgbClr>
+            </a:outerShdw>
+          </a:effectLst>
         </p:spPr>
       </p:sp>
       <p:sp>
@@ -3547,8 +3522,8 @@
         </p:nvSpPr>
         <p:spPr>
           <a:xfrm>
-            <a:off x="6470752" y="1591056"/>
-            <a:ext cx="274320" cy="34747"/>
+            <a:off x="6543904" y="1737360"/>
+            <a:ext cx="384048" cy="45720"/>
           </a:xfrm>
           <a:prstGeom prst="rect">
             <a:avLst/>
@@ -3567,8 +3542,8 @@
         </p:nvSpPr>
         <p:spPr>
           <a:xfrm>
-            <a:off x="6470752" y="1682496"/>
-            <a:ext cx="5099152" cy="566928"/>
+            <a:off x="6543904" y="1810512"/>
+            <a:ext cx="4852264" cy="713232"/>
           </a:xfrm>
           <a:prstGeom prst="rect">
             <a:avLst/>
@@ -3584,7 +3559,7 @@
               <a:buNone/>
             </a:pPr>
             <a:r>
-              <a:rPr lang="en-US" sz="3000" dirty="0">
+              <a:rPr lang="en-US" sz="4400" dirty="0">
                 <a:solidFill>
                   <a:srgbClr val="C9A24B"/>
                 </a:solidFill>
@@ -3594,7 +3569,7 @@
               </a:rPr>
               <a:t>×10–30</a:t>
             </a:r>
-            <a:endParaRPr lang="en-US" sz="3000" dirty="0"/>
+            <a:endParaRPr lang="en-US" sz="4400" dirty="0"/>
           </a:p>
         </p:txBody>
       </p:sp>
@@ -3606,8 +3581,8 @@
         </p:nvSpPr>
         <p:spPr>
           <a:xfrm>
-            <a:off x="6470752" y="2267712"/>
-            <a:ext cx="5099152" cy="1024128"/>
+            <a:off x="6543904" y="2542032"/>
+            <a:ext cx="4852264" cy="841248"/>
           </a:xfrm>
           <a:prstGeom prst="rect">
             <a:avLst/>
@@ -3621,12 +3596,12 @@
           <a:p>
             <a:pPr indent="0" marL="0">
               <a:lnSpc>
-                <a:spcPct val="112000"/>
+                <a:spcPct val="108000"/>
               </a:lnSpc>
               <a:buNone/>
             </a:pPr>
             <a:r>
-              <a:rPr lang="en-US" sz="1050" dirty="0">
+              <a:rPr lang="en-US" sz="1600" dirty="0">
                 <a:solidFill>
                   <a:srgbClr val="1B2140"/>
                 </a:solidFill>
@@ -3634,9 +3609,9 @@
                 <a:ea typeface="Segoe UI" pitchFamily="34" charset="-122"/>
                 <a:cs typeface="Segoe UI" pitchFamily="34" charset="-120"/>
               </a:rPr>
-              <a:t>падение биомассы крупных сиговых Оби; вылов муксуна и нельмы запрещён с 2014 года</a:t>
-            </a:r>
-            <a:endParaRPr lang="en-US" sz="1050" dirty="0"/>
+              <a:t>падение биомассы крупных сиговых Оби; вылов муксуна и нельмы запрещён</a:t>
+            </a:r>
+            <a:endParaRPr lang="en-US" sz="1600" dirty="0"/>
           </a:p>
         </p:txBody>
       </p:sp>
@@ -3648,8 +3623,8 @@
         </p:nvSpPr>
         <p:spPr>
           <a:xfrm>
-            <a:off x="6470752" y="3273552"/>
-            <a:ext cx="5099152" cy="201168"/>
+            <a:off x="6543904" y="3438144"/>
+            <a:ext cx="4852264" cy="237744"/>
           </a:xfrm>
           <a:prstGeom prst="rect">
             <a:avLst/>
@@ -3665,7 +3640,7 @@
               <a:buNone/>
             </a:pPr>
             <a:r>
-              <a:rPr lang="en-US" sz="750" i="1" dirty="0">
+              <a:rPr lang="en-US" sz="1200" i="1" dirty="0">
                 <a:solidFill>
                   <a:srgbClr val="6B7699"/>
                 </a:solidFill>
@@ -3679,7 +3654,7 @@
               <a:buNone/>
             </a:pPr>
             <a:r>
-              <a:rPr lang="en-US" sz="750" i="1" u="sng" dirty="0">
+              <a:rPr lang="en-US" sz="1200" i="1" u="sng" dirty="0">
                 <a:solidFill>
                   <a:srgbClr val="6B7699"/>
                 </a:solidFill>
@@ -3696,7 +3671,7 @@
               </a:rPr>
               <a:t>Fishnews</a:t>
             </a:r>
-            <a:endParaRPr lang="en-US" sz="750" dirty="0"/>
+            <a:endParaRPr lang="en-US" sz="1200" dirty="0"/>
           </a:p>
         </p:txBody>
       </p:sp>
@@ -3708,23 +3683,30 @@
         </p:nvSpPr>
         <p:spPr>
           <a:xfrm>
-            <a:off x="384048" y="3822192"/>
-            <a:ext cx="5574640" cy="2194560"/>
+            <a:off x="502920" y="4096512"/>
+            <a:ext cx="5437480" cy="2304288"/>
           </a:xfrm>
           <a:prstGeom prst="roundRect">
             <a:avLst>
-              <a:gd name="adj" fmla="val 2917"/>
+              <a:gd name="adj" fmla="val 3571"/>
             </a:avLst>
           </a:prstGeom>
           <a:solidFill>
             <a:srgbClr val="FFFFFF"/>
           </a:solidFill>
-          <a:ln w="12700">
+          <a:ln w="22225">
             <a:solidFill>
-              <a:srgbClr val="C9D3EA"/>
+              <a:srgbClr val="C9A24B"/>
             </a:solidFill>
             <a:prstDash val="solid"/>
           </a:ln>
+          <a:effectLst>
+            <a:outerShdw sx="100000" sy="100000" kx="0" ky="0" algn="bl" rotWithShape="0" blurRad="177800" dist="50800" dir="5400000">
+              <a:srgbClr val="7E88A8">
+                <a:alpha val="30000"/>
+              </a:srgbClr>
+            </a:outerShdw>
+          </a:effectLst>
         </p:spPr>
       </p:sp>
       <p:sp>
@@ -3735,14 +3717,14 @@
         </p:nvSpPr>
         <p:spPr>
           <a:xfrm>
-            <a:off x="621792" y="4041648"/>
-            <a:ext cx="274320" cy="34747"/>
+            <a:off x="795528" y="4352544"/>
+            <a:ext cx="384048" cy="45720"/>
           </a:xfrm>
           <a:prstGeom prst="rect">
             <a:avLst/>
           </a:prstGeom>
           <a:solidFill>
-            <a:srgbClr val="1E2761"/>
+            <a:srgbClr val="C9A24B"/>
           </a:solidFill>
           <a:ln/>
         </p:spPr>
@@ -3755,8 +3737,8 @@
         </p:nvSpPr>
         <p:spPr>
           <a:xfrm>
-            <a:off x="621792" y="4133088"/>
-            <a:ext cx="5099152" cy="566928"/>
+            <a:off x="795528" y="4425696"/>
+            <a:ext cx="4852264" cy="713232"/>
           </a:xfrm>
           <a:prstGeom prst="rect">
             <a:avLst/>
@@ -3772,9 +3754,9 @@
               <a:buNone/>
             </a:pPr>
             <a:r>
-              <a:rPr lang="en-US" sz="3000" dirty="0">
-                <a:solidFill>
-                  <a:srgbClr val="1E2761"/>
+              <a:rPr lang="en-US" sz="4400" dirty="0">
+                <a:solidFill>
+                  <a:srgbClr val="C9A24B"/>
                 </a:solidFill>
                 <a:latin typeface="Segoe UI Semibold" pitchFamily="34" charset="0"/>
                 <a:ea typeface="Segoe UI Semibold" pitchFamily="34" charset="-122"/>
@@ -3782,7 +3764,7 @@
               </a:rPr>
               <a:t>110 млн</a:t>
             </a:r>
-            <a:endParaRPr lang="en-US" sz="3000" dirty="0"/>
+            <a:endParaRPr lang="en-US" sz="4400" dirty="0"/>
           </a:p>
         </p:txBody>
       </p:sp>
@@ -3794,8 +3776,8 @@
         </p:nvSpPr>
         <p:spPr>
           <a:xfrm>
-            <a:off x="621792" y="4718304"/>
-            <a:ext cx="5099152" cy="1024128"/>
+            <a:off x="795528" y="5157216"/>
+            <a:ext cx="4852264" cy="841248"/>
           </a:xfrm>
           <a:prstGeom prst="rect">
             <a:avLst/>
@@ -3809,12 +3791,12 @@
           <a:p>
             <a:pPr indent="0" marL="0">
               <a:lnSpc>
-                <a:spcPct val="112000"/>
+                <a:spcPct val="108000"/>
               </a:lnSpc>
               <a:buNone/>
             </a:pPr>
             <a:r>
-              <a:rPr lang="en-US" sz="1050" dirty="0">
+              <a:rPr lang="en-US" sz="1600" dirty="0">
                 <a:solidFill>
                   <a:srgbClr val="1B2140"/>
                 </a:solidFill>
@@ -3822,9 +3804,9 @@
                 <a:ea typeface="Segoe UI" pitchFamily="34" charset="-122"/>
                 <a:cs typeface="Segoe UI" pitchFamily="34" charset="-120"/>
               </a:rPr>
-              <a:t>шт. молоди в год — потребность, названная в Совете Федерации, при выпуске по Югре 24,7 млн шт. в 2025</a:t>
-            </a:r>
-            <a:endParaRPr lang="en-US" sz="1050" dirty="0"/>
+              <a:t>шт. молоди в год нужно бассейну — при выпуске 24,7 млн шт. в 2025</a:t>
+            </a:r>
+            <a:endParaRPr lang="en-US" sz="1600" dirty="0"/>
           </a:p>
         </p:txBody>
       </p:sp>
@@ -3836,8 +3818,8 @@
         </p:nvSpPr>
         <p:spPr>
           <a:xfrm>
-            <a:off x="621792" y="5724144"/>
-            <a:ext cx="5099152" cy="201168"/>
+            <a:off x="795528" y="6053328"/>
+            <a:ext cx="4852264" cy="237744"/>
           </a:xfrm>
           <a:prstGeom prst="rect">
             <a:avLst/>
@@ -3853,7 +3835,7 @@
               <a:buNone/>
             </a:pPr>
             <a:r>
-              <a:rPr lang="en-US" sz="750" i="1" dirty="0">
+              <a:rPr lang="en-US" sz="1200" i="1" dirty="0">
                 <a:solidFill>
                   <a:srgbClr val="6B7699"/>
                 </a:solidFill>
@@ -3867,7 +3849,7 @@
               <a:buNone/>
             </a:pPr>
             <a:r>
-              <a:rPr lang="en-US" sz="750" i="1" u="sng" dirty="0">
+              <a:rPr lang="en-US" sz="1200" i="1" u="sng" dirty="0">
                 <a:solidFill>
                   <a:srgbClr val="6B7699"/>
                 </a:solidFill>
@@ -3884,7 +3866,7 @@
               </a:rPr>
               <a:t>ТАСС</a:t>
             </a:r>
-            <a:endParaRPr lang="en-US" sz="750" dirty="0"/>
+            <a:endParaRPr lang="en-US" sz="1200" dirty="0"/>
           </a:p>
         </p:txBody>
       </p:sp>
@@ -3896,12 +3878,12 @@
         </p:nvSpPr>
         <p:spPr>
           <a:xfrm>
-            <a:off x="6233008" y="3822192"/>
-            <a:ext cx="5574640" cy="2194560"/>
+            <a:off x="6251296" y="4096512"/>
+            <a:ext cx="5437480" cy="2304288"/>
           </a:xfrm>
           <a:prstGeom prst="roundRect">
             <a:avLst>
-              <a:gd name="adj" fmla="val 2917"/>
+              <a:gd name="adj" fmla="val 3571"/>
             </a:avLst>
           </a:prstGeom>
           <a:solidFill>
@@ -3913,6 +3895,13 @@
             </a:solidFill>
             <a:prstDash val="solid"/>
           </a:ln>
+          <a:effectLst>
+            <a:outerShdw sx="100000" sy="100000" kx="0" ky="0" algn="bl" rotWithShape="0" blurRad="177800" dist="50800" dir="5400000">
+              <a:srgbClr val="7E88A8">
+                <a:alpha val="30000"/>
+              </a:srgbClr>
+            </a:outerShdw>
+          </a:effectLst>
         </p:spPr>
       </p:sp>
       <p:sp>
@@ -3923,8 +3912,8 @@
         </p:nvSpPr>
         <p:spPr>
           <a:xfrm>
-            <a:off x="6470752" y="4041648"/>
-            <a:ext cx="274320" cy="34747"/>
+            <a:off x="6543904" y="4352544"/>
+            <a:ext cx="384048" cy="45720"/>
           </a:xfrm>
           <a:prstGeom prst="rect">
             <a:avLst/>
@@ -3943,8 +3932,8 @@
         </p:nvSpPr>
         <p:spPr>
           <a:xfrm>
-            <a:off x="6470752" y="4133088"/>
-            <a:ext cx="5099152" cy="566928"/>
+            <a:off x="6543904" y="4425696"/>
+            <a:ext cx="4852264" cy="713232"/>
           </a:xfrm>
           <a:prstGeom prst="rect">
             <a:avLst/>
@@ -3960,7 +3949,7 @@
               <a:buNone/>
             </a:pPr>
             <a:r>
-              <a:rPr lang="en-US" sz="2600" dirty="0">
+              <a:rPr lang="en-US" sz="4000" dirty="0">
                 <a:solidFill>
                   <a:srgbClr val="1E2761"/>
                 </a:solidFill>
@@ -3970,7 +3959,7 @@
               </a:rPr>
               <a:t>Без денег</a:t>
             </a:r>
-            <a:endParaRPr lang="en-US" sz="2600" dirty="0"/>
+            <a:endParaRPr lang="en-US" sz="4000" dirty="0"/>
           </a:p>
         </p:txBody>
       </p:sp>
@@ -3982,8 +3971,8 @@
         </p:nvSpPr>
         <p:spPr>
           <a:xfrm>
-            <a:off x="6470752" y="4718304"/>
-            <a:ext cx="5099152" cy="1024128"/>
+            <a:off x="6543904" y="5157216"/>
+            <a:ext cx="4852264" cy="841248"/>
           </a:xfrm>
           <a:prstGeom prst="rect">
             <a:avLst/>
@@ -3997,12 +3986,12 @@
           <a:p>
             <a:pPr indent="0" marL="0">
               <a:lnSpc>
-                <a:spcPct val="112000"/>
+                <a:spcPct val="108000"/>
               </a:lnSpc>
               <a:buNone/>
             </a:pPr>
             <a:r>
-              <a:rPr lang="en-US" sz="1050" dirty="0">
+              <a:rPr lang="en-US" sz="1600" dirty="0">
                 <a:solidFill>
                   <a:srgbClr val="1B2140"/>
                 </a:solidFill>
@@ -4010,9 +3999,9 @@
                 <a:ea typeface="Segoe UI" pitchFamily="34" charset="-122"/>
                 <a:cs typeface="Segoe UI" pitchFamily="34" charset="-120"/>
               </a:rPr>
-              <a:t>программа восстановления сиговых по поручению Президента одобрена, финансирование не определено</a:t>
-            </a:r>
-            <a:endParaRPr lang="en-US" sz="1050" dirty="0"/>
+              <a:t>программа сиговых по поручению Президента одобрена — денег не определено</a:t>
+            </a:r>
+            <a:endParaRPr lang="en-US" sz="1600" dirty="0"/>
           </a:p>
         </p:txBody>
       </p:sp>
@@ -4024,8 +4013,8 @@
         </p:nvSpPr>
         <p:spPr>
           <a:xfrm>
-            <a:off x="6470752" y="5724144"/>
-            <a:ext cx="5099152" cy="201168"/>
+            <a:off x="6543904" y="6053328"/>
+            <a:ext cx="4852264" cy="237744"/>
           </a:xfrm>
           <a:prstGeom prst="rect">
             <a:avLst/>
@@ -4041,7 +4030,7 @@
               <a:buNone/>
             </a:pPr>
             <a:r>
-              <a:rPr lang="en-US" sz="750" i="1" dirty="0">
+              <a:rPr lang="en-US" sz="1200" i="1" dirty="0">
                 <a:solidFill>
                   <a:srgbClr val="6B7699"/>
                 </a:solidFill>
@@ -4055,7 +4044,7 @@
               <a:buNone/>
             </a:pPr>
             <a:r>
-              <a:rPr lang="en-US" sz="750" i="1" u="sng" dirty="0">
+              <a:rPr lang="en-US" sz="1200" i="1" u="sng" dirty="0">
                 <a:solidFill>
                   <a:srgbClr val="6B7699"/>
                 </a:solidFill>
@@ -4072,40 +4061,20 @@
               </a:rPr>
               <a:t>СенатИнформ</a:t>
             </a:r>
-            <a:endParaRPr lang="en-US" sz="750" dirty="0"/>
-          </a:p>
-        </p:txBody>
-      </p:sp>
-      <p:sp>
-        <p:nvSpPr>
-          <p:cNvPr id="25" name="Shape 23"/>
-          <p:cNvSpPr/>
-          <p:nvPr/>
-        </p:nvSpPr>
-        <p:spPr>
-          <a:xfrm>
-            <a:off x="0" y="6803136"/>
-            <a:ext cx="12191695" cy="54864"/>
-          </a:xfrm>
-          <a:prstGeom prst="rect">
-            <a:avLst/>
-          </a:prstGeom>
-          <a:solidFill>
-            <a:srgbClr val="1E2761"/>
-          </a:solidFill>
-          <a:ln/>
-        </p:spPr>
-      </p:sp>
-      <p:sp>
-        <p:nvSpPr>
-          <p:cNvPr id="26" name="Text 24"/>
-          <p:cNvSpPr txBox="1"/>
-          <p:nvPr/>
-        </p:nvSpPr>
-        <p:spPr>
-          <a:xfrm>
-            <a:off x="384048" y="6528816"/>
-            <a:ext cx="1828800" cy="219456"/>
+            <a:endParaRPr lang="en-US" sz="1200" dirty="0"/>
+          </a:p>
+        </p:txBody>
+      </p:sp>
+      <p:sp>
+        <p:nvSpPr>
+          <p:cNvPr id="25" name="Text 23"/>
+          <p:cNvSpPr txBox="1"/>
+          <p:nvPr/>
+        </p:nvSpPr>
+        <p:spPr>
+          <a:xfrm>
+            <a:off x="502920" y="6473952"/>
+            <a:ext cx="1828800" cy="274320"/>
           </a:xfrm>
           <a:prstGeom prst="rect">
             <a:avLst/>
@@ -4121,7 +4090,7 @@
               <a:buNone/>
             </a:pPr>
             <a:r>
-              <a:rPr lang="en-US" sz="750" dirty="0">
+              <a:rPr lang="en-US" sz="1200" dirty="0">
                 <a:solidFill>
                   <a:srgbClr val="6B7699"/>
                 </a:solidFill>
@@ -4131,20 +4100,20 @@
               </a:rPr>
               <a:t>Ситалл</a:t>
             </a:r>
-            <a:endParaRPr lang="en-US" sz="750" dirty="0"/>
-          </a:p>
-        </p:txBody>
-      </p:sp>
-      <p:sp>
-        <p:nvSpPr>
-          <p:cNvPr id="27" name="Text 25"/>
-          <p:cNvSpPr txBox="1"/>
-          <p:nvPr/>
-        </p:nvSpPr>
-        <p:spPr>
-          <a:xfrm>
-            <a:off x="10911535" y="6528816"/>
-            <a:ext cx="914400" cy="219456"/>
+            <a:endParaRPr lang="en-US" sz="1200" dirty="0"/>
+          </a:p>
+        </p:txBody>
+      </p:sp>
+      <p:sp>
+        <p:nvSpPr>
+          <p:cNvPr id="26" name="Text 24"/>
+          <p:cNvSpPr txBox="1"/>
+          <p:nvPr/>
+        </p:nvSpPr>
+        <p:spPr>
+          <a:xfrm>
+            <a:off x="10774375" y="6473952"/>
+            <a:ext cx="914400" cy="274320"/>
           </a:xfrm>
           <a:prstGeom prst="rect">
             <a:avLst/>
@@ -4160,7 +4129,7 @@
               <a:buNone/>
             </a:pPr>
             <a:r>
-              <a:rPr lang="en-US" sz="750" dirty="0">
+              <a:rPr lang="en-US" sz="1200" dirty="0">
                 <a:solidFill>
                   <a:srgbClr val="6B7699"/>
                 </a:solidFill>
@@ -4170,7 +4139,7 @@
               </a:rPr>
               <a:t>02 / 10</a:t>
             </a:r>
-            <a:endParaRPr lang="en-US" sz="750" dirty="0"/>
+            <a:endParaRPr lang="en-US" sz="1200" dirty="0"/>
           </a:p>
         </p:txBody>
       </p:sp>
@@ -4207,8 +4176,8 @@
         </p:nvSpPr>
         <p:spPr>
           <a:xfrm>
-            <a:off x="384048" y="201168"/>
-            <a:ext cx="11423599" cy="237744"/>
+            <a:off x="502920" y="219456"/>
+            <a:ext cx="11185855" cy="274320"/>
           </a:xfrm>
           <a:prstGeom prst="rect">
             <a:avLst/>
@@ -4224,7 +4193,7 @@
               <a:buNone/>
             </a:pPr>
             <a:r>
-              <a:rPr lang="en-US" sz="950" spc="300" kern="0" dirty="0">
+              <a:rPr lang="en-US" sz="1300" spc="300" kern="0" dirty="0">
                 <a:solidFill>
                   <a:srgbClr val="C9A24B"/>
                 </a:solidFill>
@@ -4234,7 +4203,7 @@
               </a:rPr>
               <a:t>ВЫЗОВЫ ОТРАСЛИ</a:t>
             </a:r>
-            <a:endParaRPr lang="en-US" sz="950" dirty="0"/>
+            <a:endParaRPr lang="en-US" sz="1300" dirty="0"/>
           </a:p>
         </p:txBody>
       </p:sp>
@@ -4246,8 +4215,8 @@
         </p:nvSpPr>
         <p:spPr>
           <a:xfrm>
-            <a:off x="365760" y="457200"/>
-            <a:ext cx="11423599" cy="475488"/>
+            <a:off x="484632" y="512064"/>
+            <a:ext cx="11185855" cy="566928"/>
           </a:xfrm>
           <a:prstGeom prst="rect">
             <a:avLst/>
@@ -4263,7 +4232,7 @@
               <a:buNone/>
             </a:pPr>
             <a:r>
-              <a:rPr lang="en-US" sz="2600" dirty="0">
+              <a:rPr lang="en-US" sz="2700" dirty="0">
                 <a:solidFill>
                   <a:srgbClr val="1E2761"/>
                 </a:solidFill>
@@ -4273,7 +4242,7 @@
               </a:rPr>
               <a:t>Три технологических узких места аквакультуры Севера</a:t>
             </a:r>
-            <a:endParaRPr lang="en-US" sz="2600" dirty="0"/>
+            <a:endParaRPr lang="en-US" sz="2700" dirty="0"/>
           </a:p>
         </p:txBody>
       </p:sp>
@@ -4285,8 +4254,8 @@
         </p:nvSpPr>
         <p:spPr>
           <a:xfrm>
-            <a:off x="384048" y="1024128"/>
-            <a:ext cx="960120" cy="41148"/>
+            <a:off x="502920" y="1133856"/>
+            <a:ext cx="1097280" cy="64008"/>
           </a:xfrm>
           <a:prstGeom prst="rect">
             <a:avLst/>
@@ -4305,12 +4274,12 @@
         </p:nvSpPr>
         <p:spPr>
           <a:xfrm>
-            <a:off x="384048" y="1417320"/>
-            <a:ext cx="3624986" cy="3291840"/>
+            <a:off x="502920" y="1481328"/>
+            <a:ext cx="3521354" cy="3063240"/>
           </a:xfrm>
           <a:prstGeom prst="roundRect">
             <a:avLst>
-              <a:gd name="adj" fmla="val 1944"/>
+              <a:gd name="adj" fmla="val 2687"/>
             </a:avLst>
           </a:prstGeom>
           <a:solidFill>
@@ -4322,6 +4291,13 @@
             </a:solidFill>
             <a:prstDash val="solid"/>
           </a:ln>
+          <a:effectLst>
+            <a:outerShdw sx="100000" sy="100000" kx="0" ky="0" algn="bl" rotWithShape="0" blurRad="177800" dist="50800" dir="5400000">
+              <a:srgbClr val="7E88A8">
+                <a:alpha val="30000"/>
+              </a:srgbClr>
+            </a:outerShdw>
+          </a:effectLst>
         </p:spPr>
       </p:sp>
       <p:sp>
@@ -4332,8 +4308,8 @@
         </p:nvSpPr>
         <p:spPr>
           <a:xfrm>
-            <a:off x="621792" y="1636776"/>
-            <a:ext cx="274320" cy="34747"/>
+            <a:off x="795528" y="1737360"/>
+            <a:ext cx="384048" cy="45720"/>
           </a:xfrm>
           <a:prstGeom prst="rect">
             <a:avLst/>
@@ -4352,8 +4328,8 @@
         </p:nvSpPr>
         <p:spPr>
           <a:xfrm>
-            <a:off x="621792" y="1728216"/>
-            <a:ext cx="3149498" cy="566928"/>
+            <a:off x="795528" y="1810512"/>
+            <a:ext cx="2936138" cy="713232"/>
           </a:xfrm>
           <a:prstGeom prst="rect">
             <a:avLst/>
@@ -4369,7 +4345,7 @@
               <a:buNone/>
             </a:pPr>
             <a:r>
-              <a:rPr lang="en-US" sz="2200" dirty="0">
+              <a:rPr lang="en-US" sz="3400" dirty="0">
                 <a:solidFill>
                   <a:srgbClr val="1E2761"/>
                 </a:solidFill>
@@ -4379,7 +4355,7 @@
               </a:rPr>
               <a:t>до 90%</a:t>
             </a:r>
-            <a:endParaRPr lang="en-US" sz="2200" dirty="0"/>
+            <a:endParaRPr lang="en-US" sz="3400" dirty="0"/>
           </a:p>
         </p:txBody>
       </p:sp>
@@ -4391,8 +4367,8 @@
         </p:nvSpPr>
         <p:spPr>
           <a:xfrm>
-            <a:off x="621792" y="2313432"/>
-            <a:ext cx="3149498" cy="2121408"/>
+            <a:off x="795528" y="2542032"/>
+            <a:ext cx="2936138" cy="1600200"/>
           </a:xfrm>
           <a:prstGeom prst="rect">
             <a:avLst/>
@@ -4406,12 +4382,12 @@
           <a:p>
             <a:pPr indent="0" marL="0">
               <a:lnSpc>
-                <a:spcPct val="112000"/>
+                <a:spcPct val="108000"/>
               </a:lnSpc>
               <a:buNone/>
             </a:pPr>
             <a:r>
-              <a:rPr lang="en-US" sz="1050" dirty="0">
+              <a:rPr lang="en-US" sz="1600" dirty="0">
                 <a:solidFill>
                   <a:srgbClr val="1B2140"/>
                 </a:solidFill>
@@ -4419,9 +4395,9 @@
                 <a:ea typeface="Segoe UI" pitchFamily="34" charset="-122"/>
                 <a:cs typeface="Segoe UI" pitchFamily="34" charset="-120"/>
               </a:rPr>
-              <a:t>Корма. Столько кормов для ценных видов давал импорт; ветеринарные барьеры и срывы поставок остаются</a:t>
-            </a:r>
-            <a:endParaRPr lang="en-US" sz="1050" dirty="0"/>
+              <a:t>Корма. Столько кормов для ценных видов давал импорт; барьеры и срывы поставок остаются</a:t>
+            </a:r>
+            <a:endParaRPr lang="en-US" sz="1600" dirty="0"/>
           </a:p>
         </p:txBody>
       </p:sp>
@@ -4433,8 +4409,8 @@
         </p:nvSpPr>
         <p:spPr>
           <a:xfrm>
-            <a:off x="621792" y="4416552"/>
-            <a:ext cx="3149498" cy="201168"/>
+            <a:off x="795528" y="4197096"/>
+            <a:ext cx="2936138" cy="237744"/>
           </a:xfrm>
           <a:prstGeom prst="rect">
             <a:avLst/>
@@ -4450,7 +4426,7 @@
               <a:buNone/>
             </a:pPr>
             <a:r>
-              <a:rPr lang="en-US" sz="750" i="1" dirty="0">
+              <a:rPr lang="en-US" sz="1200" i="1" dirty="0">
                 <a:solidFill>
                   <a:srgbClr val="6B7699"/>
                 </a:solidFill>
@@ -4464,7 +4440,7 @@
               <a:buNone/>
             </a:pPr>
             <a:r>
-              <a:rPr lang="en-US" sz="750" i="1" u="sng" dirty="0">
+              <a:rPr lang="en-US" sz="1200" i="1" u="sng" dirty="0">
                 <a:solidFill>
                   <a:srgbClr val="6B7699"/>
                 </a:solidFill>
@@ -4481,7 +4457,7 @@
               </a:rPr>
               <a:t>Росрыболовство</a:t>
             </a:r>
-            <a:endParaRPr lang="en-US" sz="750" dirty="0"/>
+            <a:endParaRPr lang="en-US" sz="1200" dirty="0"/>
           </a:p>
         </p:txBody>
       </p:sp>
@@ -4493,12 +4469,12 @@
         </p:nvSpPr>
         <p:spPr>
           <a:xfrm>
-            <a:off x="4283354" y="1417320"/>
-            <a:ext cx="3624986" cy="3291840"/>
+            <a:off x="4335170" y="1481328"/>
+            <a:ext cx="3521354" cy="3063240"/>
           </a:xfrm>
           <a:prstGeom prst="roundRect">
             <a:avLst>
-              <a:gd name="adj" fmla="val 1944"/>
+              <a:gd name="adj" fmla="val 2687"/>
             </a:avLst>
           </a:prstGeom>
           <a:solidFill>
@@ -4510,6 +4486,13 @@
             </a:solidFill>
             <a:prstDash val="solid"/>
           </a:ln>
+          <a:effectLst>
+            <a:outerShdw sx="100000" sy="100000" kx="0" ky="0" algn="bl" rotWithShape="0" blurRad="177800" dist="50800" dir="5400000">
+              <a:srgbClr val="7E88A8">
+                <a:alpha val="30000"/>
+              </a:srgbClr>
+            </a:outerShdw>
+          </a:effectLst>
         </p:spPr>
       </p:sp>
       <p:sp>
@@ -4520,8 +4503,8 @@
         </p:nvSpPr>
         <p:spPr>
           <a:xfrm>
-            <a:off x="4521098" y="1636776"/>
-            <a:ext cx="274320" cy="34747"/>
+            <a:off x="4627778" y="1737360"/>
+            <a:ext cx="384048" cy="45720"/>
           </a:xfrm>
           <a:prstGeom prst="rect">
             <a:avLst/>
@@ -4540,8 +4523,8 @@
         </p:nvSpPr>
         <p:spPr>
           <a:xfrm>
-            <a:off x="4521098" y="1728216"/>
-            <a:ext cx="3149498" cy="566928"/>
+            <a:off x="4627778" y="1810512"/>
+            <a:ext cx="2936138" cy="713232"/>
           </a:xfrm>
           <a:prstGeom prst="rect">
             <a:avLst/>
@@ -4557,7 +4540,7 @@
               <a:buNone/>
             </a:pPr>
             <a:r>
-              <a:rPr lang="en-US" sz="2200" dirty="0">
+              <a:rPr lang="en-US" sz="3400" dirty="0">
                 <a:solidFill>
                   <a:srgbClr val="C9A24B"/>
                 </a:solidFill>
@@ -4567,7 +4550,7 @@
               </a:rPr>
               <a:t>Дефицит</a:t>
             </a:r>
-            <a:endParaRPr lang="en-US" sz="2200" dirty="0"/>
+            <a:endParaRPr lang="en-US" sz="3400" dirty="0"/>
           </a:p>
         </p:txBody>
       </p:sp>
@@ -4579,8 +4562,8 @@
         </p:nvSpPr>
         <p:spPr>
           <a:xfrm>
-            <a:off x="4521098" y="2313432"/>
-            <a:ext cx="3149498" cy="2121408"/>
+            <a:off x="4627778" y="2542032"/>
+            <a:ext cx="2936138" cy="1600200"/>
           </a:xfrm>
           <a:prstGeom prst="rect">
             <a:avLst/>
@@ -4594,12 +4577,12 @@
           <a:p>
             <a:pPr indent="0" marL="0">
               <a:lnSpc>
-                <a:spcPct val="112000"/>
+                <a:spcPct val="108000"/>
               </a:lnSpc>
               <a:buNone/>
             </a:pPr>
             <a:r>
-              <a:rPr lang="en-US" sz="1050" dirty="0">
+              <a:rPr lang="en-US" sz="1600" dirty="0">
                 <a:solidFill>
                   <a:srgbClr val="1B2140"/>
                 </a:solidFill>
@@ -4607,9 +4590,9 @@
                 <a:ea typeface="Segoe UI" pitchFamily="34" charset="-122"/>
                 <a:cs typeface="Segoe UI" pitchFamily="34" charset="-120"/>
               </a:rPr>
-              <a:t>Посадочный материал. Полноценных маточных стад муксуна не хватает; наука требует генетического менеджмента</a:t>
-            </a:r>
-            <a:endParaRPr lang="en-US" sz="1050" dirty="0"/>
+              <a:t>Посадочный материал. Маточных стад муксуна не хватает; нужен генетический менеджмент</a:t>
+            </a:r>
+            <a:endParaRPr lang="en-US" sz="1600" dirty="0"/>
           </a:p>
         </p:txBody>
       </p:sp>
@@ -4621,8 +4604,8 @@
         </p:nvSpPr>
         <p:spPr>
           <a:xfrm>
-            <a:off x="4521098" y="4416552"/>
-            <a:ext cx="3149498" cy="201168"/>
+            <a:off x="4627778" y="4197096"/>
+            <a:ext cx="2936138" cy="237744"/>
           </a:xfrm>
           <a:prstGeom prst="rect">
             <a:avLst/>
@@ -4638,7 +4621,7 @@
               <a:buNone/>
             </a:pPr>
             <a:r>
-              <a:rPr lang="en-US" sz="750" i="1" dirty="0">
+              <a:rPr lang="en-US" sz="1200" i="1" dirty="0">
                 <a:solidFill>
                   <a:srgbClr val="6B7699"/>
                 </a:solidFill>
@@ -4652,7 +4635,7 @@
               <a:buNone/>
             </a:pPr>
             <a:r>
-              <a:rPr lang="en-US" sz="750" i="1" u="sng" dirty="0">
+              <a:rPr lang="en-US" sz="1200" i="1" u="sng" dirty="0">
                 <a:solidFill>
                   <a:srgbClr val="6B7699"/>
                 </a:solidFill>
@@ -4669,7 +4652,7 @@
               </a:rPr>
               <a:t>«Научная Россия»</a:t>
             </a:r>
-            <a:endParaRPr lang="en-US" sz="750" dirty="0"/>
+            <a:endParaRPr lang="en-US" sz="1200" dirty="0"/>
           </a:p>
         </p:txBody>
       </p:sp>
@@ -4681,12 +4664,12 @@
         </p:nvSpPr>
         <p:spPr>
           <a:xfrm>
-            <a:off x="8182661" y="1417320"/>
-            <a:ext cx="3624986" cy="3291840"/>
+            <a:off x="8167421" y="1481328"/>
+            <a:ext cx="3521354" cy="3063240"/>
           </a:xfrm>
           <a:prstGeom prst="roundRect">
             <a:avLst>
-              <a:gd name="adj" fmla="val 1944"/>
+              <a:gd name="adj" fmla="val 2687"/>
             </a:avLst>
           </a:prstGeom>
           <a:solidFill>
@@ -4698,6 +4681,13 @@
             </a:solidFill>
             <a:prstDash val="solid"/>
           </a:ln>
+          <a:effectLst>
+            <a:outerShdw sx="100000" sy="100000" kx="0" ky="0" algn="bl" rotWithShape="0" blurRad="177800" dist="50800" dir="5400000">
+              <a:srgbClr val="7E88A8">
+                <a:alpha val="30000"/>
+              </a:srgbClr>
+            </a:outerShdw>
+          </a:effectLst>
         </p:spPr>
       </p:sp>
       <p:sp>
@@ -4708,8 +4698,8 @@
         </p:nvSpPr>
         <p:spPr>
           <a:xfrm>
-            <a:off x="8420405" y="1636776"/>
-            <a:ext cx="274320" cy="34747"/>
+            <a:off x="8460029" y="1737360"/>
+            <a:ext cx="384048" cy="45720"/>
           </a:xfrm>
           <a:prstGeom prst="rect">
             <a:avLst/>
@@ -4728,8 +4718,8 @@
         </p:nvSpPr>
         <p:spPr>
           <a:xfrm>
-            <a:off x="8420405" y="1728216"/>
-            <a:ext cx="3149498" cy="566928"/>
+            <a:off x="8460029" y="1810512"/>
+            <a:ext cx="2936138" cy="713232"/>
           </a:xfrm>
           <a:prstGeom prst="rect">
             <a:avLst/>
@@ -4745,7 +4735,7 @@
               <a:buNone/>
             </a:pPr>
             <a:r>
-              <a:rPr lang="en-US" sz="2200" dirty="0">
+              <a:rPr lang="en-US" sz="3400" dirty="0">
                 <a:solidFill>
                   <a:srgbClr val="1E2761"/>
                 </a:solidFill>
@@ -4755,7 +4745,7 @@
               </a:rPr>
               <a:t>~10%</a:t>
             </a:r>
-            <a:endParaRPr lang="en-US" sz="2200" dirty="0"/>
+            <a:endParaRPr lang="en-US" sz="3400" dirty="0"/>
           </a:p>
         </p:txBody>
       </p:sp>
@@ -4767,8 +4757,8 @@
         </p:nvSpPr>
         <p:spPr>
           <a:xfrm>
-            <a:off x="8420405" y="2313432"/>
-            <a:ext cx="3149498" cy="2121408"/>
+            <a:off x="8460029" y="2542032"/>
+            <a:ext cx="2936138" cy="1600200"/>
           </a:xfrm>
           <a:prstGeom prst="rect">
             <a:avLst/>
@@ -4782,12 +4772,12 @@
           <a:p>
             <a:pPr indent="0" marL="0">
               <a:lnSpc>
-                <a:spcPct val="112000"/>
+                <a:spcPct val="108000"/>
               </a:lnSpc>
               <a:buNone/>
             </a:pPr>
             <a:r>
-              <a:rPr lang="en-US" sz="1050" dirty="0">
+              <a:rPr lang="en-US" sz="1600" dirty="0">
                 <a:solidFill>
                   <a:srgbClr val="1B2140"/>
                 </a:solidFill>
@@ -4795,9 +4785,9 @@
                 <a:ea typeface="Segoe UI" pitchFamily="34" charset="-122"/>
                 <a:cs typeface="Segoe UI" pitchFamily="34" charset="-120"/>
               </a:rPr>
-              <a:t>Выживаемость личинки при выпуске. Зачёт растёт с навеской — нужны технологии подращивания</a:t>
-            </a:r>
-            <a:endParaRPr lang="en-US" sz="1050" dirty="0"/>
+              <a:t>Выживаемость личинки при выпуске. Зачёт растёт с навеской — нужно подращивание</a:t>
+            </a:r>
+            <a:endParaRPr lang="en-US" sz="1600" dirty="0"/>
           </a:p>
         </p:txBody>
       </p:sp>
@@ -4809,8 +4799,8 @@
         </p:nvSpPr>
         <p:spPr>
           <a:xfrm>
-            <a:off x="8420405" y="4416552"/>
-            <a:ext cx="3149498" cy="201168"/>
+            <a:off x="8460029" y="4197096"/>
+            <a:ext cx="2936138" cy="237744"/>
           </a:xfrm>
           <a:prstGeom prst="rect">
             <a:avLst/>
@@ -4826,7 +4816,7 @@
               <a:buNone/>
             </a:pPr>
             <a:r>
-              <a:rPr lang="en-US" sz="750" i="1" dirty="0">
+              <a:rPr lang="en-US" sz="1200" i="1" dirty="0">
                 <a:solidFill>
                   <a:srgbClr val="6B7699"/>
                 </a:solidFill>
@@ -4840,7 +4830,7 @@
               <a:buNone/>
             </a:pPr>
             <a:r>
-              <a:rPr lang="en-US" sz="750" i="1" u="sng" dirty="0">
+              <a:rPr lang="en-US" sz="1200" i="1" u="sng" dirty="0">
                 <a:solidFill>
                   <a:srgbClr val="6B7699"/>
                 </a:solidFill>
@@ -4857,7 +4847,7 @@
               </a:rPr>
               <a:t>«Научная Россия»</a:t>
             </a:r>
-            <a:endParaRPr lang="en-US" sz="750" dirty="0"/>
+            <a:endParaRPr lang="en-US" sz="1200" dirty="0"/>
           </a:p>
         </p:txBody>
       </p:sp>
@@ -4869,8 +4859,8 @@
         </p:nvSpPr>
         <p:spPr>
           <a:xfrm>
-            <a:off x="384048" y="5212080"/>
-            <a:ext cx="50292" cy="530352"/>
+            <a:off x="502920" y="5029200"/>
+            <a:ext cx="64008" cy="822960"/>
           </a:xfrm>
           <a:prstGeom prst="rect">
             <a:avLst/>
@@ -4889,8 +4879,8 @@
         </p:nvSpPr>
         <p:spPr>
           <a:xfrm>
-            <a:off x="585216" y="5193792"/>
-            <a:ext cx="11149279" cy="603504"/>
+            <a:off x="758952" y="5001768"/>
+            <a:ext cx="10820095" cy="877824"/>
           </a:xfrm>
           <a:prstGeom prst="rect">
             <a:avLst/>
@@ -4903,10 +4893,13 @@
           <a:lstStyle/>
           <a:p>
             <a:pPr indent="0" marL="0">
-              <a:buNone/>
-            </a:pPr>
-            <a:r>
-              <a:rPr lang="en-US" sz="1500" dirty="0">
+              <a:lnSpc>
+                <a:spcPct val="105000"/>
+              </a:lnSpc>
+              <a:buNone/>
+            </a:pPr>
+            <a:r>
+              <a:rPr lang="en-US" sz="2000" dirty="0">
                 <a:solidFill>
                   <a:srgbClr val="1E2761"/>
                 </a:solidFill>
@@ -4916,40 +4909,20 @@
               </a:rPr>
               <a:t>За каждым узким местом — готовые научные решения, которые пока не дошли до производства</a:t>
             </a:r>
-            <a:endParaRPr lang="en-US" sz="1500" dirty="0"/>
-          </a:p>
-        </p:txBody>
-      </p:sp>
-      <p:sp>
-        <p:nvSpPr>
-          <p:cNvPr id="22" name="Shape 20"/>
-          <p:cNvSpPr/>
-          <p:nvPr/>
-        </p:nvSpPr>
-        <p:spPr>
-          <a:xfrm>
-            <a:off x="0" y="6803136"/>
-            <a:ext cx="12191695" cy="54864"/>
-          </a:xfrm>
-          <a:prstGeom prst="rect">
-            <a:avLst/>
-          </a:prstGeom>
-          <a:solidFill>
-            <a:srgbClr val="1E2761"/>
-          </a:solidFill>
-          <a:ln/>
-        </p:spPr>
-      </p:sp>
-      <p:sp>
-        <p:nvSpPr>
-          <p:cNvPr id="23" name="Text 21"/>
-          <p:cNvSpPr txBox="1"/>
-          <p:nvPr/>
-        </p:nvSpPr>
-        <p:spPr>
-          <a:xfrm>
-            <a:off x="384048" y="6528816"/>
-            <a:ext cx="1828800" cy="219456"/>
+            <a:endParaRPr lang="en-US" sz="2000" dirty="0"/>
+          </a:p>
+        </p:txBody>
+      </p:sp>
+      <p:sp>
+        <p:nvSpPr>
+          <p:cNvPr id="22" name="Text 20"/>
+          <p:cNvSpPr txBox="1"/>
+          <p:nvPr/>
+        </p:nvSpPr>
+        <p:spPr>
+          <a:xfrm>
+            <a:off x="502920" y="6473952"/>
+            <a:ext cx="1828800" cy="274320"/>
           </a:xfrm>
           <a:prstGeom prst="rect">
             <a:avLst/>
@@ -4965,7 +4938,7 @@
               <a:buNone/>
             </a:pPr>
             <a:r>
-              <a:rPr lang="en-US" sz="750" dirty="0">
+              <a:rPr lang="en-US" sz="1200" dirty="0">
                 <a:solidFill>
                   <a:srgbClr val="6B7699"/>
                 </a:solidFill>
@@ -4975,20 +4948,20 @@
               </a:rPr>
               <a:t>Ситалл</a:t>
             </a:r>
-            <a:endParaRPr lang="en-US" sz="750" dirty="0"/>
-          </a:p>
-        </p:txBody>
-      </p:sp>
-      <p:sp>
-        <p:nvSpPr>
-          <p:cNvPr id="24" name="Text 22"/>
-          <p:cNvSpPr txBox="1"/>
-          <p:nvPr/>
-        </p:nvSpPr>
-        <p:spPr>
-          <a:xfrm>
-            <a:off x="10911535" y="6528816"/>
-            <a:ext cx="914400" cy="219456"/>
+            <a:endParaRPr lang="en-US" sz="1200" dirty="0"/>
+          </a:p>
+        </p:txBody>
+      </p:sp>
+      <p:sp>
+        <p:nvSpPr>
+          <p:cNvPr id="23" name="Text 21"/>
+          <p:cNvSpPr txBox="1"/>
+          <p:nvPr/>
+        </p:nvSpPr>
+        <p:spPr>
+          <a:xfrm>
+            <a:off x="10774375" y="6473952"/>
+            <a:ext cx="914400" cy="274320"/>
           </a:xfrm>
           <a:prstGeom prst="rect">
             <a:avLst/>
@@ -5004,7 +4977,7 @@
               <a:buNone/>
             </a:pPr>
             <a:r>
-              <a:rPr lang="en-US" sz="750" dirty="0">
+              <a:rPr lang="en-US" sz="1200" dirty="0">
                 <a:solidFill>
                   <a:srgbClr val="6B7699"/>
                 </a:solidFill>
@@ -5014,7 +4987,7 @@
               </a:rPr>
               <a:t>03 / 10</a:t>
             </a:r>
-            <a:endParaRPr lang="en-US" sz="750" dirty="0"/>
+            <a:endParaRPr lang="en-US" sz="1200" dirty="0"/>
           </a:p>
         </p:txBody>
       </p:sp>
@@ -5051,8 +5024,8 @@
         </p:nvSpPr>
         <p:spPr>
           <a:xfrm>
-            <a:off x="384048" y="201168"/>
-            <a:ext cx="11423599" cy="237744"/>
+            <a:off x="502920" y="219456"/>
+            <a:ext cx="11185855" cy="274320"/>
           </a:xfrm>
           <a:prstGeom prst="rect">
             <a:avLst/>
@@ -5068,7 +5041,7 @@
               <a:buNone/>
             </a:pPr>
             <a:r>
-              <a:rPr lang="en-US" sz="950" spc="300" kern="0" dirty="0">
+              <a:rPr lang="en-US" sz="1300" spc="300" kern="0" dirty="0">
                 <a:solidFill>
                   <a:srgbClr val="C9A24B"/>
                 </a:solidFill>
@@ -5078,7 +5051,7 @@
               </a:rPr>
               <a:t>КТО МЫ</a:t>
             </a:r>
-            <a:endParaRPr lang="en-US" sz="950" dirty="0"/>
+            <a:endParaRPr lang="en-US" sz="1300" dirty="0"/>
           </a:p>
         </p:txBody>
       </p:sp>
@@ -5090,8 +5063,8 @@
         </p:nvSpPr>
         <p:spPr>
           <a:xfrm>
-            <a:off x="365760" y="457200"/>
-            <a:ext cx="11423599" cy="475488"/>
+            <a:off x="484632" y="512064"/>
+            <a:ext cx="11185855" cy="566928"/>
           </a:xfrm>
           <a:prstGeom prst="rect">
             <a:avLst/>
@@ -5107,7 +5080,7 @@
               <a:buNone/>
             </a:pPr>
             <a:r>
-              <a:rPr lang="en-US" sz="2600" dirty="0">
+              <a:rPr lang="en-US" sz="2700" dirty="0">
                 <a:solidFill>
                   <a:srgbClr val="1E2761"/>
                 </a:solidFill>
@@ -5117,7 +5090,7 @@
               </a:rPr>
               <a:t>Внешний офис трансфера технологий</a:t>
             </a:r>
-            <a:endParaRPr lang="en-US" sz="2600" dirty="0"/>
+            <a:endParaRPr lang="en-US" sz="2700" dirty="0"/>
           </a:p>
         </p:txBody>
       </p:sp>
@@ -5129,8 +5102,8 @@
         </p:nvSpPr>
         <p:spPr>
           <a:xfrm>
-            <a:off x="384048" y="1024128"/>
-            <a:ext cx="960120" cy="41148"/>
+            <a:off x="502920" y="1133856"/>
+            <a:ext cx="1097280" cy="64008"/>
           </a:xfrm>
           <a:prstGeom prst="rect">
             <a:avLst/>
@@ -5149,12 +5122,12 @@
         </p:nvSpPr>
         <p:spPr>
           <a:xfrm>
-            <a:off x="384048" y="1371600"/>
-            <a:ext cx="5574640" cy="2377440"/>
+            <a:off x="502920" y="1481328"/>
+            <a:ext cx="5437480" cy="2304288"/>
           </a:xfrm>
           <a:prstGeom prst="roundRect">
             <a:avLst>
-              <a:gd name="adj" fmla="val 2692"/>
+              <a:gd name="adj" fmla="val 3571"/>
             </a:avLst>
           </a:prstGeom>
           <a:solidFill>
@@ -5166,6 +5139,13 @@
             </a:solidFill>
             <a:prstDash val="solid"/>
           </a:ln>
+          <a:effectLst>
+            <a:outerShdw sx="100000" sy="100000" kx="0" ky="0" algn="bl" rotWithShape="0" blurRad="177800" dist="50800" dir="5400000">
+              <a:srgbClr val="7E88A8">
+                <a:alpha val="30000"/>
+              </a:srgbClr>
+            </a:outerShdw>
+          </a:effectLst>
         </p:spPr>
       </p:sp>
       <p:sp>
@@ -5176,8 +5156,8 @@
         </p:nvSpPr>
         <p:spPr>
           <a:xfrm>
-            <a:off x="621792" y="1572768"/>
-            <a:ext cx="292608" cy="292608"/>
+            <a:off x="795528" y="1719072"/>
+            <a:ext cx="384048" cy="384048"/>
           </a:xfrm>
           <a:prstGeom prst="ellipse">
             <a:avLst/>
@@ -5196,8 +5176,8 @@
         </p:nvSpPr>
         <p:spPr>
           <a:xfrm>
-            <a:off x="621792" y="1572768"/>
-            <a:ext cx="292608" cy="292608"/>
+            <a:off x="795528" y="1719072"/>
+            <a:ext cx="384048" cy="384048"/>
           </a:xfrm>
           <a:prstGeom prst="rect">
             <a:avLst/>
@@ -5213,7 +5193,7 @@
               <a:buNone/>
             </a:pPr>
             <a:r>
-              <a:rPr lang="en-US" sz="1200" dirty="0">
+              <a:rPr lang="en-US" sz="1600" dirty="0">
                 <a:solidFill>
                   <a:srgbClr val="FFFFFF"/>
                 </a:solidFill>
@@ -5223,7 +5203,7 @@
               </a:rPr>
               <a:t>1</a:t>
             </a:r>
-            <a:endParaRPr lang="en-US" sz="1200" dirty="0"/>
+            <a:endParaRPr lang="en-US" sz="1600" dirty="0"/>
           </a:p>
         </p:txBody>
       </p:sp>
@@ -5235,8 +5215,8 @@
         </p:nvSpPr>
         <p:spPr>
           <a:xfrm>
-            <a:off x="621792" y="1938528"/>
-            <a:ext cx="5099152" cy="548640"/>
+            <a:off x="795528" y="2194560"/>
+            <a:ext cx="4852264" cy="365760"/>
           </a:xfrm>
           <a:prstGeom prst="rect">
             <a:avLst/>
@@ -5250,12 +5230,12 @@
           <a:p>
             <a:pPr indent="0" marL="0">
               <a:lnSpc>
-                <a:spcPct val="105000"/>
+                <a:spcPct val="102000"/>
               </a:lnSpc>
               <a:buNone/>
             </a:pPr>
             <a:r>
-              <a:rPr lang="en-US" sz="1350" dirty="0">
+              <a:rPr lang="en-US" sz="2000" dirty="0">
                 <a:solidFill>
                   <a:srgbClr val="1E2761"/>
                 </a:solidFill>
@@ -5265,7 +5245,7 @@
               </a:rPr>
               <a:t>От задачи, а не от разработки</a:t>
             </a:r>
-            <a:endParaRPr lang="en-US" sz="1350" dirty="0"/>
+            <a:endParaRPr lang="en-US" sz="2000" dirty="0"/>
           </a:p>
         </p:txBody>
       </p:sp>
@@ -5277,8 +5257,8 @@
         </p:nvSpPr>
         <p:spPr>
           <a:xfrm>
-            <a:off x="621792" y="2432304"/>
-            <a:ext cx="5099152" cy="1170432"/>
+            <a:off x="795528" y="2633472"/>
+            <a:ext cx="4852264" cy="1005840"/>
           </a:xfrm>
           <a:prstGeom prst="rect">
             <a:avLst/>
@@ -5292,12 +5272,12 @@
           <a:p>
             <a:pPr indent="0" marL="0">
               <a:lnSpc>
-                <a:spcPct val="112000"/>
+                <a:spcPct val="108000"/>
               </a:lnSpc>
               <a:buNone/>
             </a:pPr>
             <a:r>
-              <a:rPr lang="en-US" sz="1000" dirty="0">
+              <a:rPr lang="en-US" sz="1600" dirty="0">
                 <a:solidFill>
                   <a:srgbClr val="1B2140"/>
                 </a:solidFill>
@@ -5307,7 +5287,7 @@
               </a:rPr>
               <a:t>Начинаем там, где предприятие теряет деньги</a:t>
             </a:r>
-            <a:endParaRPr lang="en-US" sz="1000" dirty="0"/>
+            <a:endParaRPr lang="en-US" sz="1600" dirty="0"/>
           </a:p>
         </p:txBody>
       </p:sp>
@@ -5319,12 +5299,12 @@
         </p:nvSpPr>
         <p:spPr>
           <a:xfrm>
-            <a:off x="6233008" y="1371600"/>
-            <a:ext cx="5574640" cy="2377440"/>
+            <a:off x="6251296" y="1481328"/>
+            <a:ext cx="5437480" cy="2304288"/>
           </a:xfrm>
           <a:prstGeom prst="roundRect">
             <a:avLst>
-              <a:gd name="adj" fmla="val 2692"/>
+              <a:gd name="adj" fmla="val 3571"/>
             </a:avLst>
           </a:prstGeom>
           <a:solidFill>
@@ -5336,6 +5316,13 @@
             </a:solidFill>
             <a:prstDash val="solid"/>
           </a:ln>
+          <a:effectLst>
+            <a:outerShdw sx="100000" sy="100000" kx="0" ky="0" algn="bl" rotWithShape="0" blurRad="177800" dist="50800" dir="5400000">
+              <a:srgbClr val="7E88A8">
+                <a:alpha val="30000"/>
+              </a:srgbClr>
+            </a:outerShdw>
+          </a:effectLst>
         </p:spPr>
       </p:sp>
       <p:sp>
@@ -5346,8 +5333,8 @@
         </p:nvSpPr>
         <p:spPr>
           <a:xfrm>
-            <a:off x="6470752" y="1572768"/>
-            <a:ext cx="292608" cy="292608"/>
+            <a:off x="6543904" y="1719072"/>
+            <a:ext cx="384048" cy="384048"/>
           </a:xfrm>
           <a:prstGeom prst="ellipse">
             <a:avLst/>
@@ -5366,8 +5353,8 @@
         </p:nvSpPr>
         <p:spPr>
           <a:xfrm>
-            <a:off x="6470752" y="1572768"/>
-            <a:ext cx="292608" cy="292608"/>
+            <a:off x="6543904" y="1719072"/>
+            <a:ext cx="384048" cy="384048"/>
           </a:xfrm>
           <a:prstGeom prst="rect">
             <a:avLst/>
@@ -5383,7 +5370,7 @@
               <a:buNone/>
             </a:pPr>
             <a:r>
-              <a:rPr lang="en-US" sz="1200" dirty="0">
+              <a:rPr lang="en-US" sz="1600" dirty="0">
                 <a:solidFill>
                   <a:srgbClr val="FFFFFF"/>
                 </a:solidFill>
@@ -5393,7 +5380,7 @@
               </a:rPr>
               <a:t>2</a:t>
             </a:r>
-            <a:endParaRPr lang="en-US" sz="1200" dirty="0"/>
+            <a:endParaRPr lang="en-US" sz="1600" dirty="0"/>
           </a:p>
         </p:txBody>
       </p:sp>
@@ -5405,8 +5392,8 @@
         </p:nvSpPr>
         <p:spPr>
           <a:xfrm>
-            <a:off x="6470752" y="1938528"/>
-            <a:ext cx="5099152" cy="548640"/>
+            <a:off x="6543904" y="2194560"/>
+            <a:ext cx="4852264" cy="365760"/>
           </a:xfrm>
           <a:prstGeom prst="rect">
             <a:avLst/>
@@ -5420,12 +5407,12 @@
           <a:p>
             <a:pPr indent="0" marL="0">
               <a:lnSpc>
-                <a:spcPct val="105000"/>
+                <a:spcPct val="102000"/>
               </a:lnSpc>
               <a:buNone/>
             </a:pPr>
             <a:r>
-              <a:rPr lang="en-US" sz="1350" dirty="0">
+              <a:rPr lang="en-US" sz="2000" dirty="0">
                 <a:solidFill>
                   <a:srgbClr val="1E2761"/>
                 </a:solidFill>
@@ -5435,7 +5422,7 @@
               </a:rPr>
               <a:t>Отвечаем деньгами за внедрение</a:t>
             </a:r>
-            <a:endParaRPr lang="en-US" sz="1350" dirty="0"/>
+            <a:endParaRPr lang="en-US" sz="2000" dirty="0"/>
           </a:p>
         </p:txBody>
       </p:sp>
@@ -5447,8 +5434,8 @@
         </p:nvSpPr>
         <p:spPr>
           <a:xfrm>
-            <a:off x="6470752" y="2432304"/>
-            <a:ext cx="5099152" cy="1170432"/>
+            <a:off x="6543904" y="2633472"/>
+            <a:ext cx="4852264" cy="1005840"/>
           </a:xfrm>
           <a:prstGeom prst="rect">
             <a:avLst/>
@@ -5462,12 +5449,12 @@
           <a:p>
             <a:pPr indent="0" marL="0">
               <a:lnSpc>
-                <a:spcPct val="112000"/>
+                <a:spcPct val="108000"/>
               </a:lnSpc>
               <a:buNone/>
             </a:pPr>
             <a:r>
-              <a:rPr lang="en-US" sz="1000" dirty="0">
+              <a:rPr lang="en-US" sz="1600" dirty="0">
                 <a:solidFill>
                   <a:srgbClr val="1B2140"/>
                 </a:solidFill>
@@ -5477,7 +5464,7 @@
               </a:rPr>
               <a:t>Часть вознаграждения — только при результате</a:t>
             </a:r>
-            <a:endParaRPr lang="en-US" sz="1000" dirty="0"/>
+            <a:endParaRPr lang="en-US" sz="1600" dirty="0"/>
           </a:p>
         </p:txBody>
       </p:sp>
@@ -5489,12 +5476,12 @@
         </p:nvSpPr>
         <p:spPr>
           <a:xfrm>
-            <a:off x="384048" y="4005072"/>
-            <a:ext cx="5574640" cy="2377440"/>
+            <a:off x="502920" y="4096512"/>
+            <a:ext cx="5437480" cy="2304288"/>
           </a:xfrm>
           <a:prstGeom prst="roundRect">
             <a:avLst>
-              <a:gd name="adj" fmla="val 2692"/>
+              <a:gd name="adj" fmla="val 3571"/>
             </a:avLst>
           </a:prstGeom>
           <a:solidFill>
@@ -5506,6 +5493,13 @@
             </a:solidFill>
             <a:prstDash val="solid"/>
           </a:ln>
+          <a:effectLst>
+            <a:outerShdw sx="100000" sy="100000" kx="0" ky="0" algn="bl" rotWithShape="0" blurRad="177800" dist="50800" dir="5400000">
+              <a:srgbClr val="7E88A8">
+                <a:alpha val="30000"/>
+              </a:srgbClr>
+            </a:outerShdw>
+          </a:effectLst>
         </p:spPr>
       </p:sp>
       <p:sp>
@@ -5516,8 +5510,8 @@
         </p:nvSpPr>
         <p:spPr>
           <a:xfrm>
-            <a:off x="621792" y="4206240"/>
-            <a:ext cx="292608" cy="292608"/>
+            <a:off x="795528" y="4334256"/>
+            <a:ext cx="384048" cy="384048"/>
           </a:xfrm>
           <a:prstGeom prst="ellipse">
             <a:avLst/>
@@ -5536,8 +5530,8 @@
         </p:nvSpPr>
         <p:spPr>
           <a:xfrm>
-            <a:off x="621792" y="4206240"/>
-            <a:ext cx="292608" cy="292608"/>
+            <a:off x="795528" y="4334256"/>
+            <a:ext cx="384048" cy="384048"/>
           </a:xfrm>
           <a:prstGeom prst="rect">
             <a:avLst/>
@@ -5553,7 +5547,7 @@
               <a:buNone/>
             </a:pPr>
             <a:r>
-              <a:rPr lang="en-US" sz="1200" dirty="0">
+              <a:rPr lang="en-US" sz="1600" dirty="0">
                 <a:solidFill>
                   <a:srgbClr val="FFFFFF"/>
                 </a:solidFill>
@@ -5563,7 +5557,7 @@
               </a:rPr>
               <a:t>3</a:t>
             </a:r>
-            <a:endParaRPr lang="en-US" sz="1200" dirty="0"/>
+            <a:endParaRPr lang="en-US" sz="1600" dirty="0"/>
           </a:p>
         </p:txBody>
       </p:sp>
@@ -5575,8 +5569,8 @@
         </p:nvSpPr>
         <p:spPr>
           <a:xfrm>
-            <a:off x="621792" y="4572000"/>
-            <a:ext cx="5099152" cy="548640"/>
+            <a:off x="795528" y="4809744"/>
+            <a:ext cx="4852264" cy="365760"/>
           </a:xfrm>
           <a:prstGeom prst="rect">
             <a:avLst/>
@@ -5590,12 +5584,12 @@
           <a:p>
             <a:pPr indent="0" marL="0">
               <a:lnSpc>
-                <a:spcPct val="105000"/>
+                <a:spcPct val="102000"/>
               </a:lnSpc>
               <a:buNone/>
             </a:pPr>
             <a:r>
-              <a:rPr lang="en-US" sz="1350" dirty="0">
+              <a:rPr lang="en-US" sz="2000" dirty="0">
                 <a:solidFill>
                   <a:srgbClr val="1E2761"/>
                 </a:solidFill>
@@ -5605,7 +5599,7 @@
               </a:rPr>
               <a:t>Господдержку собираем сами</a:t>
             </a:r>
-            <a:endParaRPr lang="en-US" sz="1350" dirty="0"/>
+            <a:endParaRPr lang="en-US" sz="2000" dirty="0"/>
           </a:p>
         </p:txBody>
       </p:sp>
@@ -5617,8 +5611,8 @@
         </p:nvSpPr>
         <p:spPr>
           <a:xfrm>
-            <a:off x="621792" y="5065776"/>
-            <a:ext cx="5099152" cy="1170432"/>
+            <a:off x="795528" y="5248656"/>
+            <a:ext cx="4852264" cy="1005840"/>
           </a:xfrm>
           <a:prstGeom prst="rect">
             <a:avLst/>
@@ -5632,12 +5626,12 @@
           <a:p>
             <a:pPr indent="0" marL="0">
               <a:lnSpc>
-                <a:spcPct val="112000"/>
+                <a:spcPct val="108000"/>
               </a:lnSpc>
               <a:buNone/>
             </a:pPr>
             <a:r>
-              <a:rPr lang="en-US" sz="1000" dirty="0">
+              <a:rPr lang="en-US" sz="1600" dirty="0">
                 <a:solidFill>
                   <a:srgbClr val="1B2140"/>
                 </a:solidFill>
@@ -5645,9 +5639,9 @@
                 <a:ea typeface="Segoe UI" pitchFamily="34" charset="-122"/>
                 <a:cs typeface="Segoe UI" pitchFamily="34" charset="-120"/>
               </a:rPr>
-              <a:t>Заявки готовим мы, а не сотрудники предприятия</a:t>
-            </a:r>
-            <a:endParaRPr lang="en-US" sz="1000" dirty="0"/>
+              <a:t>Документацию готовим мы, а не сотрудники предприятия</a:t>
+            </a:r>
+            <a:endParaRPr lang="en-US" sz="1600" dirty="0"/>
           </a:p>
         </p:txBody>
       </p:sp>
@@ -5659,12 +5653,12 @@
         </p:nvSpPr>
         <p:spPr>
           <a:xfrm>
-            <a:off x="6233008" y="4005072"/>
-            <a:ext cx="5574640" cy="2377440"/>
+            <a:off x="6251296" y="4096512"/>
+            <a:ext cx="5437480" cy="2304288"/>
           </a:xfrm>
           <a:prstGeom prst="roundRect">
             <a:avLst>
-              <a:gd name="adj" fmla="val 2692"/>
+              <a:gd name="adj" fmla="val 3571"/>
             </a:avLst>
           </a:prstGeom>
           <a:solidFill>
@@ -5676,6 +5670,13 @@
             </a:solidFill>
             <a:prstDash val="solid"/>
           </a:ln>
+          <a:effectLst>
+            <a:outerShdw sx="100000" sy="100000" kx="0" ky="0" algn="bl" rotWithShape="0" blurRad="177800" dist="50800" dir="5400000">
+              <a:srgbClr val="7E88A8">
+                <a:alpha val="30000"/>
+              </a:srgbClr>
+            </a:outerShdw>
+          </a:effectLst>
         </p:spPr>
       </p:sp>
       <p:sp>
@@ -5686,8 +5687,8 @@
         </p:nvSpPr>
         <p:spPr>
           <a:xfrm>
-            <a:off x="6470752" y="4206240"/>
-            <a:ext cx="292608" cy="292608"/>
+            <a:off x="6543904" y="4334256"/>
+            <a:ext cx="384048" cy="384048"/>
           </a:xfrm>
           <a:prstGeom prst="ellipse">
             <a:avLst/>
@@ -5706,8 +5707,8 @@
         </p:nvSpPr>
         <p:spPr>
           <a:xfrm>
-            <a:off x="6470752" y="4206240"/>
-            <a:ext cx="292608" cy="292608"/>
+            <a:off x="6543904" y="4334256"/>
+            <a:ext cx="384048" cy="384048"/>
           </a:xfrm>
           <a:prstGeom prst="rect">
             <a:avLst/>
@@ -5723,7 +5724,7 @@
               <a:buNone/>
             </a:pPr>
             <a:r>
-              <a:rPr lang="en-US" sz="1200" dirty="0">
+              <a:rPr lang="en-US" sz="1600" dirty="0">
                 <a:solidFill>
                   <a:srgbClr val="FFFFFF"/>
                 </a:solidFill>
@@ -5733,7 +5734,7 @@
               </a:rPr>
               <a:t>4</a:t>
             </a:r>
-            <a:endParaRPr lang="en-US" sz="1200" dirty="0"/>
+            <a:endParaRPr lang="en-US" sz="1600" dirty="0"/>
           </a:p>
         </p:txBody>
       </p:sp>
@@ -5745,8 +5746,8 @@
         </p:nvSpPr>
         <p:spPr>
           <a:xfrm>
-            <a:off x="6470752" y="4572000"/>
-            <a:ext cx="5099152" cy="548640"/>
+            <a:off x="6543904" y="4809744"/>
+            <a:ext cx="4852264" cy="365760"/>
           </a:xfrm>
           <a:prstGeom prst="rect">
             <a:avLst/>
@@ -5760,12 +5761,12 @@
           <a:p>
             <a:pPr indent="0" marL="0">
               <a:lnSpc>
-                <a:spcPct val="105000"/>
+                <a:spcPct val="102000"/>
               </a:lnSpc>
               <a:buNone/>
             </a:pPr>
             <a:r>
-              <a:rPr lang="en-US" sz="1350" dirty="0">
+              <a:rPr lang="en-US" sz="2000" dirty="0">
                 <a:solidFill>
                   <a:srgbClr val="1E2761"/>
                 </a:solidFill>
@@ -5773,9 +5774,9 @@
                 <a:ea typeface="Segoe UI Semibold" pitchFamily="34" charset="-122"/>
                 <a:cs typeface="Segoe UI Semibold" pitchFamily="34" charset="-120"/>
               </a:rPr>
-              <a:t>Науке приводим заказ</a:t>
-            </a:r>
-            <a:endParaRPr lang="en-US" sz="1350" dirty="0"/>
+              <a:t>Госцентрам приводим заказчика</a:t>
+            </a:r>
+            <a:endParaRPr lang="en-US" sz="2000" dirty="0"/>
           </a:p>
         </p:txBody>
       </p:sp>
@@ -5787,8 +5788,8 @@
         </p:nvSpPr>
         <p:spPr>
           <a:xfrm>
-            <a:off x="6470752" y="5065776"/>
-            <a:ext cx="5099152" cy="1170432"/>
+            <a:off x="6543904" y="5248656"/>
+            <a:ext cx="4852264" cy="1005840"/>
           </a:xfrm>
           <a:prstGeom prst="rect">
             <a:avLst/>
@@ -5802,12 +5803,12 @@
           <a:p>
             <a:pPr indent="0" marL="0">
               <a:lnSpc>
-                <a:spcPct val="112000"/>
+                <a:spcPct val="108000"/>
               </a:lnSpc>
               <a:buNone/>
             </a:pPr>
             <a:r>
-              <a:rPr lang="en-US" sz="1000" dirty="0">
+              <a:rPr lang="en-US" sz="1600" dirty="0">
                 <a:solidFill>
                   <a:srgbClr val="1B2140"/>
                 </a:solidFill>
@@ -5815,42 +5816,22 @@
                 <a:ea typeface="Segoe UI" pitchFamily="34" charset="-122"/>
                 <a:cs typeface="Segoe UI" pitchFamily="34" charset="-120"/>
               </a:rPr>
-              <a:t>Институты и инжиниринговые центры — партнёры и исполнители</a:t>
-            </a:r>
-            <a:endParaRPr lang="en-US" sz="1000" dirty="0"/>
-          </a:p>
-        </p:txBody>
-      </p:sp>
-      <p:sp>
-        <p:nvSpPr>
-          <p:cNvPr id="25" name="Shape 23"/>
-          <p:cNvSpPr/>
-          <p:nvPr/>
-        </p:nvSpPr>
-        <p:spPr>
-          <a:xfrm>
-            <a:off x="0" y="6803136"/>
-            <a:ext cx="12191695" cy="54864"/>
-          </a:xfrm>
-          <a:prstGeom prst="rect">
-            <a:avLst/>
-          </a:prstGeom>
-          <a:solidFill>
-            <a:srgbClr val="1E2761"/>
-          </a:solidFill>
-          <a:ln/>
-        </p:spPr>
-      </p:sp>
-      <p:sp>
-        <p:nvSpPr>
-          <p:cNvPr id="26" name="Text 24"/>
-          <p:cNvSpPr txBox="1"/>
-          <p:nvPr/>
-        </p:nvSpPr>
-        <p:spPr>
-          <a:xfrm>
-            <a:off x="384048" y="6528816"/>
-            <a:ext cx="1828800" cy="219456"/>
+              <a:t>НОЦ, ЦТТ и фонды для нас партнёры и исполнители</a:t>
+            </a:r>
+            <a:endParaRPr lang="en-US" sz="1600" dirty="0"/>
+          </a:p>
+        </p:txBody>
+      </p:sp>
+      <p:sp>
+        <p:nvSpPr>
+          <p:cNvPr id="25" name="Text 23"/>
+          <p:cNvSpPr txBox="1"/>
+          <p:nvPr/>
+        </p:nvSpPr>
+        <p:spPr>
+          <a:xfrm>
+            <a:off x="502920" y="6473952"/>
+            <a:ext cx="1828800" cy="274320"/>
           </a:xfrm>
           <a:prstGeom prst="rect">
             <a:avLst/>
@@ -5866,7 +5847,7 @@
               <a:buNone/>
             </a:pPr>
             <a:r>
-              <a:rPr lang="en-US" sz="750" dirty="0">
+              <a:rPr lang="en-US" sz="1200" dirty="0">
                 <a:solidFill>
                   <a:srgbClr val="6B7699"/>
                 </a:solidFill>
@@ -5876,20 +5857,20 @@
               </a:rPr>
               <a:t>Ситалл</a:t>
             </a:r>
-            <a:endParaRPr lang="en-US" sz="750" dirty="0"/>
-          </a:p>
-        </p:txBody>
-      </p:sp>
-      <p:sp>
-        <p:nvSpPr>
-          <p:cNvPr id="27" name="Text 25"/>
-          <p:cNvSpPr txBox="1"/>
-          <p:nvPr/>
-        </p:nvSpPr>
-        <p:spPr>
-          <a:xfrm>
-            <a:off x="10911535" y="6528816"/>
-            <a:ext cx="914400" cy="219456"/>
+            <a:endParaRPr lang="en-US" sz="1200" dirty="0"/>
+          </a:p>
+        </p:txBody>
+      </p:sp>
+      <p:sp>
+        <p:nvSpPr>
+          <p:cNvPr id="26" name="Text 24"/>
+          <p:cNvSpPr txBox="1"/>
+          <p:nvPr/>
+        </p:nvSpPr>
+        <p:spPr>
+          <a:xfrm>
+            <a:off x="10774375" y="6473952"/>
+            <a:ext cx="914400" cy="274320"/>
           </a:xfrm>
           <a:prstGeom prst="rect">
             <a:avLst/>
@@ -5905,7 +5886,7 @@
               <a:buNone/>
             </a:pPr>
             <a:r>
-              <a:rPr lang="en-US" sz="750" dirty="0">
+              <a:rPr lang="en-US" sz="1200" dirty="0">
                 <a:solidFill>
                   <a:srgbClr val="6B7699"/>
                 </a:solidFill>
@@ -5915,7 +5896,7 @@
               </a:rPr>
               <a:t>04 / 10</a:t>
             </a:r>
-            <a:endParaRPr lang="en-US" sz="750" dirty="0"/>
+            <a:endParaRPr lang="en-US" sz="1200" dirty="0"/>
           </a:p>
         </p:txBody>
       </p:sp>
@@ -5952,8 +5933,8 @@
         </p:nvSpPr>
         <p:spPr>
           <a:xfrm>
-            <a:off x="384048" y="201168"/>
-            <a:ext cx="11423599" cy="237744"/>
+            <a:off x="502920" y="219456"/>
+            <a:ext cx="11185855" cy="274320"/>
           </a:xfrm>
           <a:prstGeom prst="rect">
             <a:avLst/>
@@ -5969,7 +5950,7 @@
               <a:buNone/>
             </a:pPr>
             <a:r>
-              <a:rPr lang="en-US" sz="950" spc="300" kern="0" dirty="0">
+              <a:rPr lang="en-US" sz="1300" spc="300" kern="0" dirty="0">
                 <a:solidFill>
                   <a:srgbClr val="C9A24B"/>
                 </a:solidFill>
@@ -5979,7 +5960,7 @@
               </a:rPr>
               <a:t>КАК ЭТО РАБОТАЕТ</a:t>
             </a:r>
-            <a:endParaRPr lang="en-US" sz="950" dirty="0"/>
+            <a:endParaRPr lang="en-US" sz="1300" dirty="0"/>
           </a:p>
         </p:txBody>
       </p:sp>
@@ -5991,8 +5972,8 @@
         </p:nvSpPr>
         <p:spPr>
           <a:xfrm>
-            <a:off x="365760" y="457200"/>
-            <a:ext cx="11423599" cy="475488"/>
+            <a:off x="484632" y="512064"/>
+            <a:ext cx="11185855" cy="566928"/>
           </a:xfrm>
           <a:prstGeom prst="rect">
             <a:avLst/>
@@ -6008,7 +5989,7 @@
               <a:buNone/>
             </a:pPr>
             <a:r>
-              <a:rPr lang="en-US" sz="2600" dirty="0">
+              <a:rPr lang="en-US" sz="2700" dirty="0">
                 <a:solidFill>
                   <a:srgbClr val="1E2761"/>
                 </a:solidFill>
@@ -6016,9 +5997,9 @@
                 <a:ea typeface="Segoe UI Semibold" pitchFamily="34" charset="-122"/>
                 <a:cs typeface="Segoe UI Semibold" pitchFamily="34" charset="-120"/>
               </a:rPr>
-              <a:t>Один цикл: от задачи до внедрения</a:t>
-            </a:r>
-            <a:endParaRPr lang="en-US" sz="2600" dirty="0"/>
+              <a:t>Один цикл: от задачи завода до внедрения</a:t>
+            </a:r>
+            <a:endParaRPr lang="en-US" sz="2700" dirty="0"/>
           </a:p>
         </p:txBody>
       </p:sp>
@@ -6030,8 +6011,8 @@
         </p:nvSpPr>
         <p:spPr>
           <a:xfrm>
-            <a:off x="384048" y="1024128"/>
-            <a:ext cx="960120" cy="41148"/>
+            <a:off x="502920" y="1133856"/>
+            <a:ext cx="1097280" cy="64008"/>
           </a:xfrm>
           <a:prstGeom prst="rect">
             <a:avLst/>
@@ -6050,8 +6031,8 @@
         </p:nvSpPr>
         <p:spPr>
           <a:xfrm>
-            <a:off x="1892808" y="1298448"/>
-            <a:ext cx="2350694" cy="32004"/>
+            <a:off x="2331720" y="1444752"/>
+            <a:ext cx="2188388" cy="45720"/>
           </a:xfrm>
           <a:prstGeom prst="rect">
             <a:avLst/>
@@ -6070,24 +6051,27 @@
         </p:nvSpPr>
         <p:spPr>
           <a:xfrm>
-            <a:off x="1892808" y="1371600"/>
-            <a:ext cx="2350694" cy="256032"/>
-          </a:xfrm>
-          <a:prstGeom prst="rect">
-            <a:avLst/>
-          </a:prstGeom>
-          <a:noFill/>
-          <a:ln/>
-        </p:spPr>
-        <p:txBody>
-          <a:bodyPr wrap="square" lIns="0" tIns="0" rIns="0" bIns="0" rtlCol="0" anchor="ctr"/>
-          <a:lstStyle/>
-          <a:p>
-            <a:pPr indent="0" marL="0">
-              <a:buNone/>
-            </a:pPr>
-            <a:r>
-              <a:rPr lang="en-US" sz="1100" dirty="0">
+            <a:off x="2331720" y="1554480"/>
+            <a:ext cx="2188388" cy="566928"/>
+          </a:xfrm>
+          <a:prstGeom prst="rect">
+            <a:avLst/>
+          </a:prstGeom>
+          <a:noFill/>
+          <a:ln/>
+        </p:spPr>
+        <p:txBody>
+          <a:bodyPr wrap="square" lIns="0" tIns="0" rIns="0" bIns="0" rtlCol="0" anchor="t"/>
+          <a:lstStyle/>
+          <a:p>
+            <a:pPr indent="0" marL="0">
+              <a:lnSpc>
+                <a:spcPct val="100000"/>
+              </a:lnSpc>
+              <a:buNone/>
+            </a:pPr>
+            <a:r>
+              <a:rPr lang="en-US" sz="1600" dirty="0">
                 <a:solidFill>
                   <a:srgbClr val="1E2761"/>
                 </a:solidFill>
@@ -6097,7 +6081,7 @@
               </a:rPr>
               <a:t>1. Задача</a:t>
             </a:r>
-            <a:endParaRPr lang="en-US" sz="1100" dirty="0"/>
+            <a:endParaRPr lang="en-US" sz="1600" dirty="0"/>
           </a:p>
         </p:txBody>
       </p:sp>
@@ -6109,8 +6093,8 @@
         </p:nvSpPr>
         <p:spPr>
           <a:xfrm>
-            <a:off x="4398950" y="1298448"/>
-            <a:ext cx="2350694" cy="32004"/>
+            <a:off x="4721276" y="1444752"/>
+            <a:ext cx="2188388" cy="45720"/>
           </a:xfrm>
           <a:prstGeom prst="rect">
             <a:avLst/>
@@ -6129,24 +6113,27 @@
         </p:nvSpPr>
         <p:spPr>
           <a:xfrm>
-            <a:off x="4398950" y="1371600"/>
-            <a:ext cx="2350694" cy="256032"/>
-          </a:xfrm>
-          <a:prstGeom prst="rect">
-            <a:avLst/>
-          </a:prstGeom>
-          <a:noFill/>
-          <a:ln/>
-        </p:spPr>
-        <p:txBody>
-          <a:bodyPr wrap="square" lIns="0" tIns="0" rIns="0" bIns="0" rtlCol="0" anchor="ctr"/>
-          <a:lstStyle/>
-          <a:p>
-            <a:pPr indent="0" marL="0">
-              <a:buNone/>
-            </a:pPr>
-            <a:r>
-              <a:rPr lang="en-US" sz="1100" dirty="0">
+            <a:off x="4721276" y="1554480"/>
+            <a:ext cx="2188388" cy="566928"/>
+          </a:xfrm>
+          <a:prstGeom prst="rect">
+            <a:avLst/>
+          </a:prstGeom>
+          <a:noFill/>
+          <a:ln/>
+        </p:spPr>
+        <p:txBody>
+          <a:bodyPr wrap="square" lIns="0" tIns="0" rIns="0" bIns="0" rtlCol="0" anchor="t"/>
+          <a:lstStyle/>
+          <a:p>
+            <a:pPr indent="0" marL="0">
+              <a:lnSpc>
+                <a:spcPct val="100000"/>
+              </a:lnSpc>
+              <a:buNone/>
+            </a:pPr>
+            <a:r>
+              <a:rPr lang="en-US" sz="1600" dirty="0">
                 <a:solidFill>
                   <a:srgbClr val="1E2761"/>
                 </a:solidFill>
@@ -6156,7 +6143,7 @@
               </a:rPr>
               <a:t>2. Поиск и проверка</a:t>
             </a:r>
-            <a:endParaRPr lang="en-US" sz="1100" dirty="0"/>
+            <a:endParaRPr lang="en-US" sz="1600" dirty="0"/>
           </a:p>
         </p:txBody>
       </p:sp>
@@ -6168,8 +6155,8 @@
         </p:nvSpPr>
         <p:spPr>
           <a:xfrm>
-            <a:off x="6905092" y="1298448"/>
-            <a:ext cx="2350694" cy="32004"/>
+            <a:off x="7110832" y="1444752"/>
+            <a:ext cx="2188388" cy="45720"/>
           </a:xfrm>
           <a:prstGeom prst="rect">
             <a:avLst/>
@@ -6188,24 +6175,27 @@
         </p:nvSpPr>
         <p:spPr>
           <a:xfrm>
-            <a:off x="6905092" y="1371600"/>
-            <a:ext cx="2350694" cy="256032"/>
-          </a:xfrm>
-          <a:prstGeom prst="rect">
-            <a:avLst/>
-          </a:prstGeom>
-          <a:noFill/>
-          <a:ln/>
-        </p:spPr>
-        <p:txBody>
-          <a:bodyPr wrap="square" lIns="0" tIns="0" rIns="0" bIns="0" rtlCol="0" anchor="ctr"/>
-          <a:lstStyle/>
-          <a:p>
-            <a:pPr indent="0" marL="0">
-              <a:buNone/>
-            </a:pPr>
-            <a:r>
-              <a:rPr lang="en-US" sz="1100" dirty="0">
+            <a:off x="7110832" y="1554480"/>
+            <a:ext cx="2188388" cy="566928"/>
+          </a:xfrm>
+          <a:prstGeom prst="rect">
+            <a:avLst/>
+          </a:prstGeom>
+          <a:noFill/>
+          <a:ln/>
+        </p:spPr>
+        <p:txBody>
+          <a:bodyPr wrap="square" lIns="0" tIns="0" rIns="0" bIns="0" rtlCol="0" anchor="t"/>
+          <a:lstStyle/>
+          <a:p>
+            <a:pPr indent="0" marL="0">
+              <a:lnSpc>
+                <a:spcPct val="100000"/>
+              </a:lnSpc>
+              <a:buNone/>
+            </a:pPr>
+            <a:r>
+              <a:rPr lang="en-US" sz="1600" dirty="0">
                 <a:solidFill>
                   <a:srgbClr val="1E2761"/>
                 </a:solidFill>
@@ -6215,7 +6205,7 @@
               </a:rPr>
               <a:t>3. Сделка и поддержка</a:t>
             </a:r>
-            <a:endParaRPr lang="en-US" sz="1100" dirty="0"/>
+            <a:endParaRPr lang="en-US" sz="1600" dirty="0"/>
           </a:p>
         </p:txBody>
       </p:sp>
@@ -6227,8 +6217,8 @@
         </p:nvSpPr>
         <p:spPr>
           <a:xfrm>
-            <a:off x="9411233" y="1298448"/>
-            <a:ext cx="2350694" cy="32004"/>
+            <a:off x="9500387" y="1444752"/>
+            <a:ext cx="2188388" cy="45720"/>
           </a:xfrm>
           <a:prstGeom prst="rect">
             <a:avLst/>
@@ -6247,24 +6237,27 @@
         </p:nvSpPr>
         <p:spPr>
           <a:xfrm>
-            <a:off x="9411233" y="1371600"/>
-            <a:ext cx="2350694" cy="256032"/>
-          </a:xfrm>
-          <a:prstGeom prst="rect">
-            <a:avLst/>
-          </a:prstGeom>
-          <a:noFill/>
-          <a:ln/>
-        </p:spPr>
-        <p:txBody>
-          <a:bodyPr wrap="square" lIns="0" tIns="0" rIns="0" bIns="0" rtlCol="0" anchor="ctr"/>
-          <a:lstStyle/>
-          <a:p>
-            <a:pPr indent="0" marL="0">
-              <a:buNone/>
-            </a:pPr>
-            <a:r>
-              <a:rPr lang="en-US" sz="1100" dirty="0">
+            <a:off x="9500387" y="1554480"/>
+            <a:ext cx="2188388" cy="566928"/>
+          </a:xfrm>
+          <a:prstGeom prst="rect">
+            <a:avLst/>
+          </a:prstGeom>
+          <a:noFill/>
+          <a:ln/>
+        </p:spPr>
+        <p:txBody>
+          <a:bodyPr wrap="square" lIns="0" tIns="0" rIns="0" bIns="0" rtlCol="0" anchor="t"/>
+          <a:lstStyle/>
+          <a:p>
+            <a:pPr indent="0" marL="0">
+              <a:lnSpc>
+                <a:spcPct val="100000"/>
+              </a:lnSpc>
+              <a:buNone/>
+            </a:pPr>
+            <a:r>
+              <a:rPr lang="en-US" sz="1600" dirty="0">
                 <a:solidFill>
                   <a:srgbClr val="1E2761"/>
                 </a:solidFill>
@@ -6274,7 +6267,7 @@
               </a:rPr>
               <a:t>4. Внедрение</a:t>
             </a:r>
-            <a:endParaRPr lang="en-US" sz="1100" dirty="0"/>
+            <a:endParaRPr lang="en-US" sz="1600" dirty="0"/>
           </a:p>
         </p:txBody>
       </p:sp>
@@ -6286,8 +6279,8 @@
         </p:nvSpPr>
         <p:spPr>
           <a:xfrm>
-            <a:off x="384048" y="1783080"/>
-            <a:ext cx="1417320" cy="868680"/>
+            <a:off x="502920" y="2231136"/>
+            <a:ext cx="1691640" cy="1152144"/>
           </a:xfrm>
           <a:prstGeom prst="rect">
             <a:avLst/>
@@ -6303,7 +6296,7 @@
               <a:buNone/>
             </a:pPr>
             <a:r>
-              <a:rPr lang="en-US" sz="900" spc="200" kern="0" dirty="0">
+              <a:rPr lang="en-US" sz="1400" spc="200" kern="0" dirty="0">
                 <a:solidFill>
                   <a:srgbClr val="6B7699"/>
                 </a:solidFill>
@@ -6313,7 +6306,7 @@
               </a:rPr>
               <a:t>ПРЕДПРИЯТИЕ</a:t>
             </a:r>
-            <a:endParaRPr lang="en-US" sz="900" dirty="0"/>
+            <a:endParaRPr lang="en-US" sz="1400" dirty="0"/>
           </a:p>
         </p:txBody>
       </p:sp>
@@ -6325,12 +6318,12 @@
         </p:nvSpPr>
         <p:spPr>
           <a:xfrm>
-            <a:off x="1892808" y="1783080"/>
-            <a:ext cx="2350694" cy="868680"/>
+            <a:off x="2331720" y="2231136"/>
+            <a:ext cx="2188388" cy="1152144"/>
           </a:xfrm>
           <a:prstGeom prst="roundRect">
             <a:avLst>
-              <a:gd name="adj" fmla="val 7368"/>
+              <a:gd name="adj" fmla="val 7143"/>
             </a:avLst>
           </a:prstGeom>
           <a:solidFill>
@@ -6342,6 +6335,13 @@
             </a:solidFill>
             <a:prstDash val="solid"/>
           </a:ln>
+          <a:effectLst>
+            <a:outerShdw sx="100000" sy="100000" kx="0" ky="0" algn="bl" rotWithShape="0" blurRad="177800" dist="50800" dir="5400000">
+              <a:srgbClr val="7E88A8">
+                <a:alpha val="30000"/>
+              </a:srgbClr>
+            </a:outerShdw>
+          </a:effectLst>
         </p:spPr>
       </p:sp>
       <p:sp>
@@ -6352,8 +6352,8 @@
         </p:nvSpPr>
         <p:spPr>
           <a:xfrm>
-            <a:off x="2020824" y="1783080"/>
-            <a:ext cx="2094662" cy="868680"/>
+            <a:off x="2496312" y="2231136"/>
+            <a:ext cx="1859204" cy="1152144"/>
           </a:xfrm>
           <a:prstGeom prst="rect">
             <a:avLst/>
@@ -6372,7 +6372,7 @@
               <a:buNone/>
             </a:pPr>
             <a:r>
-              <a:rPr lang="en-US" sz="1050" dirty="0">
+              <a:rPr lang="en-US" sz="1600" dirty="0">
                 <a:solidFill>
                   <a:srgbClr val="1B2140"/>
                 </a:solidFill>
@@ -6380,9 +6380,9 @@
                 <a:ea typeface="Segoe UI" pitchFamily="34" charset="-122"/>
                 <a:cs typeface="Segoe UI" pitchFamily="34" charset="-120"/>
               </a:rPr>
-              <a:t>называет задачу</a:t>
-            </a:r>
-            <a:endParaRPr lang="en-US" sz="1050" dirty="0"/>
+              <a:t>Обозначает</a:t>
+            </a:r>
+            <a:endParaRPr lang="en-US" sz="1600" dirty="0"/>
           </a:p>
           <a:p>
             <a:pPr indent="0" marL="0">
@@ -6392,7 +6392,7 @@
               <a:buNone/>
             </a:pPr>
             <a:r>
-              <a:rPr lang="en-US" sz="1050" dirty="0">
+              <a:rPr lang="en-US" sz="1600" dirty="0">
                 <a:solidFill>
                   <a:srgbClr val="1B2140"/>
                 </a:solidFill>
@@ -6400,9 +6400,9 @@
                 <a:ea typeface="Segoe UI" pitchFamily="34" charset="-122"/>
                 <a:cs typeface="Segoe UI" pitchFamily="34" charset="-120"/>
               </a:rPr>
-              <a:t>и её цену</a:t>
-            </a:r>
-            <a:endParaRPr lang="en-US" sz="1050" dirty="0"/>
+              <a:t>потребность</a:t>
+            </a:r>
+            <a:endParaRPr lang="en-US" sz="1600" dirty="0"/>
           </a:p>
         </p:txBody>
       </p:sp>
@@ -6414,12 +6414,12 @@
         </p:nvSpPr>
         <p:spPr>
           <a:xfrm>
-            <a:off x="4398950" y="1783080"/>
-            <a:ext cx="2350694" cy="868680"/>
+            <a:off x="4721276" y="2231136"/>
+            <a:ext cx="2188388" cy="1152144"/>
           </a:xfrm>
           <a:prstGeom prst="roundRect">
             <a:avLst>
-              <a:gd name="adj" fmla="val 7368"/>
+              <a:gd name="adj" fmla="val 7143"/>
             </a:avLst>
           </a:prstGeom>
           <a:solidFill>
@@ -6431,6 +6431,13 @@
             </a:solidFill>
             <a:prstDash val="solid"/>
           </a:ln>
+          <a:effectLst>
+            <a:outerShdw sx="100000" sy="100000" kx="0" ky="0" algn="bl" rotWithShape="0" blurRad="177800" dist="50800" dir="5400000">
+              <a:srgbClr val="7E88A8">
+                <a:alpha val="30000"/>
+              </a:srgbClr>
+            </a:outerShdw>
+          </a:effectLst>
         </p:spPr>
       </p:sp>
       <p:sp>
@@ -6441,8 +6448,8 @@
         </p:nvSpPr>
         <p:spPr>
           <a:xfrm>
-            <a:off x="4526966" y="1783080"/>
-            <a:ext cx="2094662" cy="868680"/>
+            <a:off x="4885868" y="2231136"/>
+            <a:ext cx="1859204" cy="1152144"/>
           </a:xfrm>
           <a:prstGeom prst="rect">
             <a:avLst/>
@@ -6461,7 +6468,7 @@
               <a:buNone/>
             </a:pPr>
             <a:r>
-              <a:rPr lang="en-US" sz="1050" dirty="0">
+              <a:rPr lang="en-US" sz="1600" dirty="0">
                 <a:solidFill>
                   <a:srgbClr val="1B2140"/>
                 </a:solidFill>
@@ -6469,9 +6476,9 @@
                 <a:ea typeface="Segoe UI" pitchFamily="34" charset="-122"/>
                 <a:cs typeface="Segoe UI" pitchFamily="34" charset="-120"/>
               </a:rPr>
-              <a:t>выбирает из списка</a:t>
-            </a:r>
-            <a:endParaRPr lang="en-US" sz="1050" dirty="0"/>
+              <a:t>Выбирает из списка</a:t>
+            </a:r>
+            <a:endParaRPr lang="en-US" sz="1600" dirty="0"/>
           </a:p>
         </p:txBody>
       </p:sp>
@@ -6483,12 +6490,12 @@
         </p:nvSpPr>
         <p:spPr>
           <a:xfrm>
-            <a:off x="6905092" y="1783080"/>
-            <a:ext cx="2350694" cy="868680"/>
+            <a:off x="7110832" y="2231136"/>
+            <a:ext cx="2188388" cy="1152144"/>
           </a:xfrm>
           <a:prstGeom prst="roundRect">
             <a:avLst>
-              <a:gd name="adj" fmla="val 7368"/>
+              <a:gd name="adj" fmla="val 7143"/>
             </a:avLst>
           </a:prstGeom>
           <a:solidFill>
@@ -6500,6 +6507,13 @@
             </a:solidFill>
             <a:prstDash val="solid"/>
           </a:ln>
+          <a:effectLst>
+            <a:outerShdw sx="100000" sy="100000" kx="0" ky="0" algn="bl" rotWithShape="0" blurRad="177800" dist="50800" dir="5400000">
+              <a:srgbClr val="7E88A8">
+                <a:alpha val="30000"/>
+              </a:srgbClr>
+            </a:outerShdw>
+          </a:effectLst>
         </p:spPr>
       </p:sp>
       <p:sp>
@@ -6510,8 +6524,8 @@
         </p:nvSpPr>
         <p:spPr>
           <a:xfrm>
-            <a:off x="7033108" y="1783080"/>
-            <a:ext cx="2094662" cy="868680"/>
+            <a:off x="7275424" y="2231136"/>
+            <a:ext cx="1859204" cy="1152144"/>
           </a:xfrm>
           <a:prstGeom prst="rect">
             <a:avLst/>
@@ -6530,7 +6544,7 @@
               <a:buNone/>
             </a:pPr>
             <a:r>
-              <a:rPr lang="en-US" sz="1050" dirty="0">
+              <a:rPr lang="en-US" sz="1600" dirty="0">
                 <a:solidFill>
                   <a:srgbClr val="1B2140"/>
                 </a:solidFill>
@@ -6538,9 +6552,9 @@
                 <a:ea typeface="Segoe UI" pitchFamily="34" charset="-122"/>
                 <a:cs typeface="Segoe UI" pitchFamily="34" charset="-120"/>
               </a:rPr>
-              <a:t>подписывает договор</a:t>
-            </a:r>
-            <a:endParaRPr lang="en-US" sz="1050" dirty="0"/>
+              <a:t>Подписывает договор</a:t>
+            </a:r>
+            <a:endParaRPr lang="en-US" sz="1600" dirty="0"/>
           </a:p>
         </p:txBody>
       </p:sp>
@@ -6552,12 +6566,12 @@
         </p:nvSpPr>
         <p:spPr>
           <a:xfrm>
-            <a:off x="9411233" y="1783080"/>
-            <a:ext cx="2350694" cy="868680"/>
+            <a:off x="9500387" y="2231136"/>
+            <a:ext cx="2188388" cy="1152144"/>
           </a:xfrm>
           <a:prstGeom prst="roundRect">
             <a:avLst>
-              <a:gd name="adj" fmla="val 7368"/>
+              <a:gd name="adj" fmla="val 7143"/>
             </a:avLst>
           </a:prstGeom>
           <a:solidFill>
@@ -6569,6 +6583,13 @@
             </a:solidFill>
             <a:prstDash val="solid"/>
           </a:ln>
+          <a:effectLst>
+            <a:outerShdw sx="100000" sy="100000" kx="0" ky="0" algn="bl" rotWithShape="0" blurRad="177800" dist="50800" dir="5400000">
+              <a:srgbClr val="7E88A8">
+                <a:alpha val="30000"/>
+              </a:srgbClr>
+            </a:outerShdw>
+          </a:effectLst>
         </p:spPr>
       </p:sp>
       <p:sp>
@@ -6579,8 +6600,8 @@
         </p:nvSpPr>
         <p:spPr>
           <a:xfrm>
-            <a:off x="9539249" y="1783080"/>
-            <a:ext cx="2094662" cy="868680"/>
+            <a:off x="9664979" y="2231136"/>
+            <a:ext cx="1859204" cy="1152144"/>
           </a:xfrm>
           <a:prstGeom prst="rect">
             <a:avLst/>
@@ -6599,7 +6620,7 @@
               <a:buNone/>
             </a:pPr>
             <a:r>
-              <a:rPr lang="en-US" sz="1050" dirty="0">
+              <a:rPr lang="en-US" sz="1600" dirty="0">
                 <a:solidFill>
                   <a:srgbClr val="1B2140"/>
                 </a:solidFill>
@@ -6607,9 +6628,29 @@
                 <a:ea typeface="Segoe UI" pitchFamily="34" charset="-122"/>
                 <a:cs typeface="Segoe UI" pitchFamily="34" charset="-120"/>
               </a:rPr>
-              <a:t>получает технологию</a:t>
-            </a:r>
-            <a:endParaRPr lang="en-US" sz="1050" dirty="0"/>
+              <a:t>Получает работающую</a:t>
+            </a:r>
+            <a:endParaRPr lang="en-US" sz="1600" dirty="0"/>
+          </a:p>
+          <a:p>
+            <a:pPr indent="0" marL="0">
+              <a:lnSpc>
+                <a:spcPct val="105000"/>
+              </a:lnSpc>
+              <a:buNone/>
+            </a:pPr>
+            <a:r>
+              <a:rPr lang="en-US" sz="1600" dirty="0">
+                <a:solidFill>
+                  <a:srgbClr val="1B2140"/>
+                </a:solidFill>
+                <a:latin typeface="Segoe UI" pitchFamily="34" charset="0"/>
+                <a:ea typeface="Segoe UI" pitchFamily="34" charset="-122"/>
+                <a:cs typeface="Segoe UI" pitchFamily="34" charset="-120"/>
+              </a:rPr>
+              <a:t>технологию</a:t>
+            </a:r>
+            <a:endParaRPr lang="en-US" sz="1600" dirty="0"/>
           </a:p>
         </p:txBody>
       </p:sp>
@@ -6621,8 +6662,8 @@
         </p:nvSpPr>
         <p:spPr>
           <a:xfrm>
-            <a:off x="384048" y="2816352"/>
-            <a:ext cx="1417320" cy="868680"/>
+            <a:off x="502920" y="3566160"/>
+            <a:ext cx="1691640" cy="1152144"/>
           </a:xfrm>
           <a:prstGeom prst="rect">
             <a:avLst/>
@@ -6638,7 +6679,7 @@
               <a:buNone/>
             </a:pPr>
             <a:r>
-              <a:rPr lang="en-US" sz="900" spc="200" kern="0" dirty="0">
+              <a:rPr lang="en-US" sz="1400" spc="200" kern="0" dirty="0">
                 <a:solidFill>
                   <a:srgbClr val="1E2761"/>
                 </a:solidFill>
@@ -6648,7 +6689,7 @@
               </a:rPr>
               <a:t>СИТАЛЛ</a:t>
             </a:r>
-            <a:endParaRPr lang="en-US" sz="900" dirty="0"/>
+            <a:endParaRPr lang="en-US" sz="1400" dirty="0"/>
           </a:p>
         </p:txBody>
       </p:sp>
@@ -6660,12 +6701,12 @@
         </p:nvSpPr>
         <p:spPr>
           <a:xfrm>
-            <a:off x="1892808" y="2816352"/>
-            <a:ext cx="2350694" cy="868680"/>
+            <a:off x="2331720" y="3566160"/>
+            <a:ext cx="2188388" cy="1152144"/>
           </a:xfrm>
           <a:prstGeom prst="roundRect">
             <a:avLst>
-              <a:gd name="adj" fmla="val 7368"/>
+              <a:gd name="adj" fmla="val 7143"/>
             </a:avLst>
           </a:prstGeom>
           <a:solidFill>
@@ -6677,6 +6718,13 @@
             </a:solidFill>
             <a:prstDash val="solid"/>
           </a:ln>
+          <a:effectLst>
+            <a:outerShdw sx="100000" sy="100000" kx="0" ky="0" algn="bl" rotWithShape="0" blurRad="177800" dist="50800" dir="5400000">
+              <a:srgbClr val="7E88A8">
+                <a:alpha val="30000"/>
+              </a:srgbClr>
+            </a:outerShdw>
+          </a:effectLst>
         </p:spPr>
       </p:sp>
       <p:sp>
@@ -6687,8 +6735,8 @@
         </p:nvSpPr>
         <p:spPr>
           <a:xfrm>
-            <a:off x="2020824" y="2816352"/>
-            <a:ext cx="2094662" cy="868680"/>
+            <a:off x="2496312" y="3566160"/>
+            <a:ext cx="1859204" cy="1152144"/>
           </a:xfrm>
           <a:prstGeom prst="rect">
             <a:avLst/>
@@ -6707,7 +6755,7 @@
               <a:buNone/>
             </a:pPr>
             <a:r>
-              <a:rPr lang="en-US" sz="1050" dirty="0">
+              <a:rPr lang="en-US" sz="1600" dirty="0">
                 <a:solidFill>
                   <a:srgbClr val="1B2140"/>
                 </a:solidFill>
@@ -6715,9 +6763,9 @@
                 <a:ea typeface="Segoe UI Semibold" pitchFamily="34" charset="-122"/>
                 <a:cs typeface="Segoe UI Semibold" pitchFamily="34" charset="-120"/>
               </a:rPr>
-              <a:t>переводит</a:t>
-            </a:r>
-            <a:endParaRPr lang="en-US" sz="1050" dirty="0"/>
+              <a:t>Переводим</a:t>
+            </a:r>
+            <a:endParaRPr lang="en-US" sz="1600" dirty="0"/>
           </a:p>
           <a:p>
             <a:pPr indent="0" marL="0">
@@ -6727,7 +6775,7 @@
               <a:buNone/>
             </a:pPr>
             <a:r>
-              <a:rPr lang="en-US" sz="1050" dirty="0">
+              <a:rPr lang="en-US" sz="1600" dirty="0">
                 <a:solidFill>
                   <a:srgbClr val="1B2140"/>
                 </a:solidFill>
@@ -6737,7 +6785,7 @@
               </a:rPr>
               <a:t>в техзадание</a:t>
             </a:r>
-            <a:endParaRPr lang="en-US" sz="1050" dirty="0"/>
+            <a:endParaRPr lang="en-US" sz="1600" dirty="0"/>
           </a:p>
         </p:txBody>
       </p:sp>
@@ -6749,12 +6797,12 @@
         </p:nvSpPr>
         <p:spPr>
           <a:xfrm>
-            <a:off x="4398950" y="2816352"/>
-            <a:ext cx="2350694" cy="868680"/>
+            <a:off x="4721276" y="3566160"/>
+            <a:ext cx="2188388" cy="1152144"/>
           </a:xfrm>
           <a:prstGeom prst="roundRect">
             <a:avLst>
-              <a:gd name="adj" fmla="val 7368"/>
+              <a:gd name="adj" fmla="val 7143"/>
             </a:avLst>
           </a:prstGeom>
           <a:solidFill>
@@ -6766,6 +6814,13 @@
             </a:solidFill>
             <a:prstDash val="solid"/>
           </a:ln>
+          <a:effectLst>
+            <a:outerShdw sx="100000" sy="100000" kx="0" ky="0" algn="bl" rotWithShape="0" blurRad="177800" dist="50800" dir="5400000">
+              <a:srgbClr val="7E88A8">
+                <a:alpha val="30000"/>
+              </a:srgbClr>
+            </a:outerShdw>
+          </a:effectLst>
         </p:spPr>
       </p:sp>
       <p:sp>
@@ -6776,8 +6831,8 @@
         </p:nvSpPr>
         <p:spPr>
           <a:xfrm>
-            <a:off x="4526966" y="2816352"/>
-            <a:ext cx="2094662" cy="868680"/>
+            <a:off x="4885868" y="3566160"/>
+            <a:ext cx="1859204" cy="1152144"/>
           </a:xfrm>
           <a:prstGeom prst="rect">
             <a:avLst/>
@@ -6796,7 +6851,7 @@
               <a:buNone/>
             </a:pPr>
             <a:r>
-              <a:rPr lang="en-US" sz="1050" dirty="0">
+              <a:rPr lang="en-US" sz="1600" dirty="0">
                 <a:solidFill>
                   <a:srgbClr val="1B2140"/>
                 </a:solidFill>
@@ -6804,9 +6859,9 @@
                 <a:ea typeface="Segoe UI Semibold" pitchFamily="34" charset="-122"/>
                 <a:cs typeface="Segoe UI Semibold" pitchFamily="34" charset="-120"/>
               </a:rPr>
-              <a:t>ищет и проверяет</a:t>
-            </a:r>
-            <a:endParaRPr lang="en-US" sz="1050" dirty="0"/>
+              <a:t>Ищем и проверяем</a:t>
+            </a:r>
+            <a:endParaRPr lang="en-US" sz="1600" dirty="0"/>
           </a:p>
           <a:p>
             <a:pPr indent="0" marL="0">
@@ -6816,7 +6871,7 @@
               <a:buNone/>
             </a:pPr>
             <a:r>
-              <a:rPr lang="en-US" sz="1050" dirty="0">
+              <a:rPr lang="en-US" sz="1600" dirty="0">
                 <a:solidFill>
                   <a:srgbClr val="1B2140"/>
                 </a:solidFill>
@@ -6824,9 +6879,9 @@
                 <a:ea typeface="Segoe UI Semibold" pitchFamily="34" charset="-122"/>
                 <a:cs typeface="Segoe UI Semibold" pitchFamily="34" charset="-120"/>
               </a:rPr>
-              <a:t>с учёными</a:t>
-            </a:r>
-            <a:endParaRPr lang="en-US" sz="1050" dirty="0"/>
+              <a:t>решения и поставщиков</a:t>
+            </a:r>
+            <a:endParaRPr lang="en-US" sz="1600" dirty="0"/>
           </a:p>
         </p:txBody>
       </p:sp>
@@ -6838,12 +6893,12 @@
         </p:nvSpPr>
         <p:spPr>
           <a:xfrm>
-            <a:off x="6905092" y="2816352"/>
-            <a:ext cx="2350694" cy="868680"/>
+            <a:off x="7110832" y="3566160"/>
+            <a:ext cx="2188388" cy="1152144"/>
           </a:xfrm>
           <a:prstGeom prst="roundRect">
             <a:avLst>
-              <a:gd name="adj" fmla="val 7368"/>
+              <a:gd name="adj" fmla="val 7143"/>
             </a:avLst>
           </a:prstGeom>
           <a:solidFill>
@@ -6855,6 +6910,13 @@
             </a:solidFill>
             <a:prstDash val="solid"/>
           </a:ln>
+          <a:effectLst>
+            <a:outerShdw sx="100000" sy="100000" kx="0" ky="0" algn="bl" rotWithShape="0" blurRad="177800" dist="50800" dir="5400000">
+              <a:srgbClr val="7E88A8">
+                <a:alpha val="30000"/>
+              </a:srgbClr>
+            </a:outerShdw>
+          </a:effectLst>
         </p:spPr>
       </p:sp>
       <p:sp>
@@ -6865,8 +6927,8 @@
         </p:nvSpPr>
         <p:spPr>
           <a:xfrm>
-            <a:off x="7033108" y="2816352"/>
-            <a:ext cx="2094662" cy="868680"/>
+            <a:off x="7275424" y="3566160"/>
+            <a:ext cx="1859204" cy="1152144"/>
           </a:xfrm>
           <a:prstGeom prst="rect">
             <a:avLst/>
@@ -6885,7 +6947,7 @@
               <a:buNone/>
             </a:pPr>
             <a:r>
-              <a:rPr lang="en-US" sz="1050" dirty="0">
+              <a:rPr lang="en-US" sz="1600" dirty="0">
                 <a:solidFill>
                   <a:srgbClr val="1B2140"/>
                 </a:solidFill>
@@ -6893,9 +6955,9 @@
                 <a:ea typeface="Segoe UI Semibold" pitchFamily="34" charset="-122"/>
                 <a:cs typeface="Segoe UI Semibold" pitchFamily="34" charset="-120"/>
               </a:rPr>
-              <a:t>собирает сделку</a:t>
-            </a:r>
-            <a:endParaRPr lang="en-US" sz="1050" dirty="0"/>
+              <a:t>Структурируем</a:t>
+            </a:r>
+            <a:endParaRPr lang="en-US" sz="1600" dirty="0"/>
           </a:p>
           <a:p>
             <a:pPr indent="0" marL="0">
@@ -6905,7 +6967,7 @@
               <a:buNone/>
             </a:pPr>
             <a:r>
-              <a:rPr lang="en-US" sz="1050" dirty="0">
+              <a:rPr lang="en-US" sz="1600" dirty="0">
                 <a:solidFill>
                   <a:srgbClr val="1B2140"/>
                 </a:solidFill>
@@ -6913,9 +6975,9 @@
                 <a:ea typeface="Segoe UI Semibold" pitchFamily="34" charset="-122"/>
                 <a:cs typeface="Segoe UI Semibold" pitchFamily="34" charset="-120"/>
               </a:rPr>
-              <a:t>и поддержку</a:t>
-            </a:r>
-            <a:endParaRPr lang="en-US" sz="1050" dirty="0"/>
+              <a:t>и ведём сделку</a:t>
+            </a:r>
+            <a:endParaRPr lang="en-US" sz="1600" dirty="0"/>
           </a:p>
         </p:txBody>
       </p:sp>
@@ -6927,12 +6989,12 @@
         </p:nvSpPr>
         <p:spPr>
           <a:xfrm>
-            <a:off x="9411233" y="2816352"/>
-            <a:ext cx="2350694" cy="868680"/>
+            <a:off x="9500387" y="3566160"/>
+            <a:ext cx="2188388" cy="1152144"/>
           </a:xfrm>
           <a:prstGeom prst="roundRect">
             <a:avLst>
-              <a:gd name="adj" fmla="val 7368"/>
+              <a:gd name="adj" fmla="val 7143"/>
             </a:avLst>
           </a:prstGeom>
           <a:solidFill>
@@ -6944,6 +7006,13 @@
             </a:solidFill>
             <a:prstDash val="solid"/>
           </a:ln>
+          <a:effectLst>
+            <a:outerShdw sx="100000" sy="100000" kx="0" ky="0" algn="bl" rotWithShape="0" blurRad="177800" dist="50800" dir="5400000">
+              <a:srgbClr val="7E88A8">
+                <a:alpha val="30000"/>
+              </a:srgbClr>
+            </a:outerShdw>
+          </a:effectLst>
         </p:spPr>
       </p:sp>
       <p:sp>
@@ -6954,8 +7023,8 @@
         </p:nvSpPr>
         <p:spPr>
           <a:xfrm>
-            <a:off x="9539249" y="2816352"/>
-            <a:ext cx="2094662" cy="868680"/>
+            <a:off x="9664979" y="3566160"/>
+            <a:ext cx="1859204" cy="1152144"/>
           </a:xfrm>
           <a:prstGeom prst="rect">
             <a:avLst/>
@@ -6974,7 +7043,7 @@
               <a:buNone/>
             </a:pPr>
             <a:r>
-              <a:rPr lang="en-US" sz="1050" dirty="0">
+              <a:rPr lang="en-US" sz="1600" dirty="0">
                 <a:solidFill>
                   <a:srgbClr val="1B2140"/>
                 </a:solidFill>
@@ -6982,9 +7051,9 @@
                 <a:ea typeface="Segoe UI Semibold" pitchFamily="34" charset="-122"/>
                 <a:cs typeface="Segoe UI Semibold" pitchFamily="34" charset="-120"/>
               </a:rPr>
-              <a:t>ведёт до пуска,</a:t>
-            </a:r>
-            <a:endParaRPr lang="en-US" sz="1050" dirty="0"/>
+              <a:t>Сопровождаем</a:t>
+            </a:r>
+            <a:endParaRPr lang="en-US" sz="1600" dirty="0"/>
           </a:p>
           <a:p>
             <a:pPr indent="0" marL="0">
@@ -6994,7 +7063,7 @@
               <a:buNone/>
             </a:pPr>
             <a:r>
-              <a:rPr lang="en-US" sz="1050" dirty="0">
+              <a:rPr lang="en-US" sz="1600" dirty="0">
                 <a:solidFill>
                   <a:srgbClr val="1B2140"/>
                 </a:solidFill>
@@ -7002,9 +7071,9 @@
                 <a:ea typeface="Segoe UI Semibold" pitchFamily="34" charset="-122"/>
                 <a:cs typeface="Segoe UI Semibold" pitchFamily="34" charset="-120"/>
               </a:rPr>
-              <a:t>отвечает за срок</a:t>
-            </a:r>
-            <a:endParaRPr lang="en-US" sz="1050" dirty="0"/>
+              <a:t>внедрение до запуска</a:t>
+            </a:r>
+            <a:endParaRPr lang="en-US" sz="1600" dirty="0"/>
           </a:p>
         </p:txBody>
       </p:sp>
@@ -7016,8 +7085,8 @@
         </p:nvSpPr>
         <p:spPr>
           <a:xfrm>
-            <a:off x="384048" y="3849624"/>
-            <a:ext cx="1417320" cy="868680"/>
+            <a:off x="502920" y="4901184"/>
+            <a:ext cx="1691640" cy="1152144"/>
           </a:xfrm>
           <a:prstGeom prst="rect">
             <a:avLst/>
@@ -7033,7 +7102,7 @@
               <a:buNone/>
             </a:pPr>
             <a:r>
-              <a:rPr lang="en-US" sz="900" spc="200" kern="0" dirty="0">
+              <a:rPr lang="en-US" sz="1400" spc="200" kern="0" dirty="0">
                 <a:solidFill>
                   <a:srgbClr val="6B7699"/>
                 </a:solidFill>
@@ -7043,7 +7112,7 @@
               </a:rPr>
               <a:t>НАУКА</a:t>
             </a:r>
-            <a:endParaRPr lang="en-US" sz="900" dirty="0"/>
+            <a:endParaRPr lang="en-US" sz="1400" dirty="0"/>
           </a:p>
         </p:txBody>
       </p:sp>
@@ -7055,12 +7124,12 @@
         </p:nvSpPr>
         <p:spPr>
           <a:xfrm>
-            <a:off x="4398950" y="3849624"/>
-            <a:ext cx="2350694" cy="868680"/>
+            <a:off x="4721276" y="4901184"/>
+            <a:ext cx="2188388" cy="1152144"/>
           </a:xfrm>
           <a:prstGeom prst="roundRect">
             <a:avLst>
-              <a:gd name="adj" fmla="val 7368"/>
+              <a:gd name="adj" fmla="val 7143"/>
             </a:avLst>
           </a:prstGeom>
           <a:solidFill>
@@ -7072,6 +7141,13 @@
             </a:solidFill>
             <a:prstDash val="solid"/>
           </a:ln>
+          <a:effectLst>
+            <a:outerShdw sx="100000" sy="100000" kx="0" ky="0" algn="bl" rotWithShape="0" blurRad="177800" dist="50800" dir="5400000">
+              <a:srgbClr val="7E88A8">
+                <a:alpha val="30000"/>
+              </a:srgbClr>
+            </a:outerShdw>
+          </a:effectLst>
         </p:spPr>
       </p:sp>
       <p:sp>
@@ -7082,8 +7158,8 @@
         </p:nvSpPr>
         <p:spPr>
           <a:xfrm>
-            <a:off x="4526966" y="3849624"/>
-            <a:ext cx="2094662" cy="868680"/>
+            <a:off x="4885868" y="4901184"/>
+            <a:ext cx="1859204" cy="1152144"/>
           </a:xfrm>
           <a:prstGeom prst="rect">
             <a:avLst/>
@@ -7102,7 +7178,7 @@
               <a:buNone/>
             </a:pPr>
             <a:r>
-              <a:rPr lang="en-US" sz="1050" dirty="0">
+              <a:rPr lang="en-US" sz="1600" dirty="0">
                 <a:solidFill>
                   <a:srgbClr val="1B2140"/>
                 </a:solidFill>
@@ -7110,9 +7186,9 @@
                 <a:ea typeface="Segoe UI" pitchFamily="34" charset="-122"/>
                 <a:cs typeface="Segoe UI" pitchFamily="34" charset="-120"/>
               </a:rPr>
-              <a:t>даёт решения</a:t>
-            </a:r>
-            <a:endParaRPr lang="en-US" sz="1050" dirty="0"/>
+              <a:t>Даёт решения</a:t>
+            </a:r>
+            <a:endParaRPr lang="en-US" sz="1600" dirty="0"/>
           </a:p>
         </p:txBody>
       </p:sp>
@@ -7124,12 +7200,12 @@
         </p:nvSpPr>
         <p:spPr>
           <a:xfrm>
-            <a:off x="6905092" y="3849624"/>
-            <a:ext cx="2350694" cy="868680"/>
+            <a:off x="7110832" y="4901184"/>
+            <a:ext cx="2188388" cy="1152144"/>
           </a:xfrm>
           <a:prstGeom prst="roundRect">
             <a:avLst>
-              <a:gd name="adj" fmla="val 7368"/>
+              <a:gd name="adj" fmla="val 7143"/>
             </a:avLst>
           </a:prstGeom>
           <a:solidFill>
@@ -7141,6 +7217,13 @@
             </a:solidFill>
             <a:prstDash val="solid"/>
           </a:ln>
+          <a:effectLst>
+            <a:outerShdw sx="100000" sy="100000" kx="0" ky="0" algn="bl" rotWithShape="0" blurRad="177800" dist="50800" dir="5400000">
+              <a:srgbClr val="7E88A8">
+                <a:alpha val="30000"/>
+              </a:srgbClr>
+            </a:outerShdw>
+          </a:effectLst>
         </p:spPr>
       </p:sp>
       <p:sp>
@@ -7151,8 +7234,8 @@
         </p:nvSpPr>
         <p:spPr>
           <a:xfrm>
-            <a:off x="7033108" y="3849624"/>
-            <a:ext cx="2094662" cy="868680"/>
+            <a:off x="7275424" y="4901184"/>
+            <a:ext cx="1859204" cy="1152144"/>
           </a:xfrm>
           <a:prstGeom prst="rect">
             <a:avLst/>
@@ -7171,7 +7254,7 @@
               <a:buNone/>
             </a:pPr>
             <a:r>
-              <a:rPr lang="en-US" sz="1050" dirty="0">
+              <a:rPr lang="en-US" sz="1600" dirty="0">
                 <a:solidFill>
                   <a:srgbClr val="1B2140"/>
                 </a:solidFill>
@@ -7179,9 +7262,9 @@
                 <a:ea typeface="Segoe UI" pitchFamily="34" charset="-122"/>
                 <a:cs typeface="Segoe UI" pitchFamily="34" charset="-120"/>
               </a:rPr>
-              <a:t>исполняет НИОКР</a:t>
-            </a:r>
-            <a:endParaRPr lang="en-US" sz="1050" dirty="0"/>
+              <a:t>Исполняет НИОКР</a:t>
+            </a:r>
+            <a:endParaRPr lang="en-US" sz="1600" dirty="0"/>
           </a:p>
         </p:txBody>
       </p:sp>
@@ -7193,12 +7276,12 @@
         </p:nvSpPr>
         <p:spPr>
           <a:xfrm>
-            <a:off x="9411233" y="3849624"/>
-            <a:ext cx="2350694" cy="868680"/>
+            <a:off x="9500387" y="4901184"/>
+            <a:ext cx="2188388" cy="1152144"/>
           </a:xfrm>
           <a:prstGeom prst="roundRect">
             <a:avLst>
-              <a:gd name="adj" fmla="val 7368"/>
+              <a:gd name="adj" fmla="val 7143"/>
             </a:avLst>
           </a:prstGeom>
           <a:solidFill>
@@ -7210,6 +7293,13 @@
             </a:solidFill>
             <a:prstDash val="solid"/>
           </a:ln>
+          <a:effectLst>
+            <a:outerShdw sx="100000" sy="100000" kx="0" ky="0" algn="bl" rotWithShape="0" blurRad="177800" dist="50800" dir="5400000">
+              <a:srgbClr val="7E88A8">
+                <a:alpha val="30000"/>
+              </a:srgbClr>
+            </a:outerShdw>
+          </a:effectLst>
         </p:spPr>
       </p:sp>
       <p:sp>
@@ -7220,8 +7310,8 @@
         </p:nvSpPr>
         <p:spPr>
           <a:xfrm>
-            <a:off x="9539249" y="3849624"/>
-            <a:ext cx="2094662" cy="868680"/>
+            <a:off x="9664979" y="4901184"/>
+            <a:ext cx="1859204" cy="1152144"/>
           </a:xfrm>
           <a:prstGeom prst="rect">
             <a:avLst/>
@@ -7240,7 +7330,7 @@
               <a:buNone/>
             </a:pPr>
             <a:r>
-              <a:rPr lang="en-US" sz="1050" dirty="0">
+              <a:rPr lang="en-US" sz="1600" dirty="0">
                 <a:solidFill>
                   <a:srgbClr val="1B2140"/>
                 </a:solidFill>
@@ -7248,9 +7338,9 @@
                 <a:ea typeface="Segoe UI" pitchFamily="34" charset="-122"/>
                 <a:cs typeface="Segoe UI" pitchFamily="34" charset="-120"/>
               </a:rPr>
-              <a:t>дорабатывает</a:t>
-            </a:r>
-            <a:endParaRPr lang="en-US" sz="1050" dirty="0"/>
+              <a:t>Дорабатывает</a:t>
+            </a:r>
+            <a:endParaRPr lang="en-US" sz="1600" dirty="0"/>
           </a:p>
           <a:p>
             <a:pPr indent="0" marL="0">
@@ -7260,7 +7350,7 @@
               <a:buNone/>
             </a:pPr>
             <a:r>
-              <a:rPr lang="en-US" sz="1050" dirty="0">
+              <a:rPr lang="en-US" sz="1600" dirty="0">
                 <a:solidFill>
                   <a:srgbClr val="1B2140"/>
                 </a:solidFill>
@@ -7270,7 +7360,7 @@
               </a:rPr>
               <a:t>под производство</a:t>
             </a:r>
-            <a:endParaRPr lang="en-US" sz="1050" dirty="0"/>
+            <a:endParaRPr lang="en-US" sz="1600" dirty="0"/>
           </a:p>
         </p:txBody>
       </p:sp>
@@ -7282,8 +7372,8 @@
         </p:nvSpPr>
         <p:spPr>
           <a:xfrm>
-            <a:off x="384048" y="5074920"/>
-            <a:ext cx="11423599" cy="219456"/>
+            <a:off x="502920" y="6473952"/>
+            <a:ext cx="1828800" cy="274320"/>
           </a:xfrm>
           <a:prstGeom prst="rect">
             <a:avLst/>
@@ -7299,88 +7389,7 @@
               <a:buNone/>
             </a:pPr>
             <a:r>
-              <a:rPr lang="en-US" sz="900" spc="250" kern="0" dirty="0">
-                <a:solidFill>
-                  <a:srgbClr val="C9A24B"/>
-                </a:solidFill>
-                <a:latin typeface="Segoe UI Semibold" pitchFamily="34" charset="0"/>
-                <a:ea typeface="Segoe UI Semibold" pitchFamily="34" charset="-122"/>
-                <a:cs typeface="Segoe UI Semibold" pitchFamily="34" charset="-120"/>
-              </a:rPr>
-              <a:t>ГОСУДАРСТВЕННЫЕ ИНСТРУМЕНТЫ, КОТОРЫЕ МЫ ПОДКЛЮЧАЕМ</a:t>
-            </a:r>
-            <a:endParaRPr lang="en-US" sz="900" dirty="0"/>
-          </a:p>
-        </p:txBody>
-      </p:sp>
-      <p:sp>
-        <p:nvSpPr>
-          <p:cNvPr id="39" name="Text 37"/>
-          <p:cNvSpPr txBox="1"/>
-          <p:nvPr/>
-        </p:nvSpPr>
-        <p:spPr>
-          <a:xfrm>
-            <a:off x="384048" y="5413248"/>
-            <a:ext cx="2650160" cy="274320"/>
-          </a:xfrm>
-          <a:prstGeom prst="rect">
-            <a:avLst/>
-          </a:prstGeom>
-          <a:noFill/>
-          <a:ln/>
-        </p:spPr>
-        <p:txBody>
-          <a:bodyPr wrap="square" lIns="0" tIns="0" rIns="0" bIns="0" rtlCol="0" anchor="ctr"/>
-          <a:lstStyle/>
-          <a:p>
-            <a:pPr indent="0" marL="0">
-              <a:buNone/>
-            </a:pPr>
-            <a:r>
-              <a:rPr lang="en-US" sz="1050" dirty="0">
-                <a:solidFill>
-                  <a:srgbClr val="1E2761"/>
-                </a:solidFill>
-                <a:latin typeface="Segoe UI Semibold" pitchFamily="34" charset="0"/>
-                <a:ea typeface="Segoe UI Semibold" pitchFamily="34" charset="-122"/>
-                <a:cs typeface="Segoe UI Semibold" pitchFamily="34" charset="-120"/>
-              </a:rPr>
-              <a:t>Постановление № 218</a:t>
-            </a:r>
-            <a:endParaRPr lang="en-US" sz="1050" dirty="0"/>
-          </a:p>
-        </p:txBody>
-      </p:sp>
-      <p:sp>
-        <p:nvSpPr>
-          <p:cNvPr id="40" name="Text 38"/>
-          <p:cNvSpPr txBox="1"/>
-          <p:nvPr/>
-        </p:nvSpPr>
-        <p:spPr>
-          <a:xfrm>
-            <a:off x="384048" y="5705856"/>
-            <a:ext cx="2650160" cy="457200"/>
-          </a:xfrm>
-          <a:prstGeom prst="rect">
-            <a:avLst/>
-          </a:prstGeom>
-          <a:noFill/>
-          <a:ln/>
-        </p:spPr>
-        <p:txBody>
-          <a:bodyPr wrap="square" lIns="0" tIns="0" rIns="0" bIns="0" rtlCol="0" anchor="ctr"/>
-          <a:lstStyle/>
-          <a:p>
-            <a:pPr indent="0" marL="0">
-              <a:lnSpc>
-                <a:spcPct val="105000"/>
-              </a:lnSpc>
-              <a:buNone/>
-            </a:pPr>
-            <a:r>
-              <a:rPr lang="en-US" sz="950" dirty="0">
+              <a:rPr lang="en-US" sz="1200" dirty="0">
                 <a:solidFill>
                   <a:srgbClr val="6B7699"/>
                 </a:solidFill>
@@ -7388,22 +7397,22 @@
                 <a:ea typeface="Segoe UI" pitchFamily="34" charset="-122"/>
                 <a:cs typeface="Segoe UI" pitchFamily="34" charset="-120"/>
               </a:rPr>
-              <a:t>до 70% стоимости исследований</a:t>
-            </a:r>
-            <a:endParaRPr lang="en-US" sz="950" dirty="0"/>
-          </a:p>
-        </p:txBody>
-      </p:sp>
-      <p:sp>
-        <p:nvSpPr>
-          <p:cNvPr id="41" name="Text 39"/>
-          <p:cNvSpPr txBox="1"/>
-          <p:nvPr/>
-        </p:nvSpPr>
-        <p:spPr>
-          <a:xfrm>
-            <a:off x="3308528" y="5413248"/>
-            <a:ext cx="2650160" cy="274320"/>
+              <a:t>Ситалл</a:t>
+            </a:r>
+            <a:endParaRPr lang="en-US" sz="1200" dirty="0"/>
+          </a:p>
+        </p:txBody>
+      </p:sp>
+      <p:sp>
+        <p:nvSpPr>
+          <p:cNvPr id="39" name="Text 37"/>
+          <p:cNvSpPr txBox="1"/>
+          <p:nvPr/>
+        </p:nvSpPr>
+        <p:spPr>
+          <a:xfrm>
+            <a:off x="10774375" y="6473952"/>
+            <a:ext cx="914400" cy="274320"/>
           </a:xfrm>
           <a:prstGeom prst="rect">
             <a:avLst/>
@@ -7415,53 +7424,11 @@
           <a:bodyPr wrap="square" lIns="0" tIns="0" rIns="0" bIns="0" rtlCol="0" anchor="ctr"/>
           <a:lstStyle/>
           <a:p>
-            <a:pPr indent="0" marL="0">
-              <a:buNone/>
-            </a:pPr>
-            <a:r>
-              <a:rPr lang="en-US" sz="1050" dirty="0">
-                <a:solidFill>
-                  <a:srgbClr val="1E2761"/>
-                </a:solidFill>
-                <a:latin typeface="Segoe UI Semibold" pitchFamily="34" charset="0"/>
-                <a:ea typeface="Segoe UI Semibold" pitchFamily="34" charset="-122"/>
-                <a:cs typeface="Segoe UI Semibold" pitchFamily="34" charset="-120"/>
-              </a:rPr>
-              <a:t>Коэффициент 2</a:t>
-            </a:r>
-            <a:endParaRPr lang="en-US" sz="1050" dirty="0"/>
-          </a:p>
-        </p:txBody>
-      </p:sp>
-      <p:sp>
-        <p:nvSpPr>
-          <p:cNvPr id="42" name="Text 40"/>
-          <p:cNvSpPr txBox="1"/>
-          <p:nvPr/>
-        </p:nvSpPr>
-        <p:spPr>
-          <a:xfrm>
-            <a:off x="3308528" y="5705856"/>
-            <a:ext cx="2650160" cy="457200"/>
-          </a:xfrm>
-          <a:prstGeom prst="rect">
-            <a:avLst/>
-          </a:prstGeom>
-          <a:noFill/>
-          <a:ln/>
-        </p:spPr>
-        <p:txBody>
-          <a:bodyPr wrap="square" lIns="0" tIns="0" rIns="0" bIns="0" rtlCol="0" anchor="ctr"/>
-          <a:lstStyle/>
-          <a:p>
-            <a:pPr indent="0" marL="0">
-              <a:lnSpc>
-                <a:spcPct val="105000"/>
-              </a:lnSpc>
-              <a:buNone/>
-            </a:pPr>
-            <a:r>
-              <a:rPr lang="en-US" sz="950" dirty="0">
+            <a:pPr algn="r" indent="0" marL="0">
+              <a:buNone/>
+            </a:pPr>
+            <a:r>
+              <a:rPr lang="en-US" sz="1200" dirty="0">
                 <a:solidFill>
                   <a:srgbClr val="6B7699"/>
                 </a:solidFill>
@@ -7469,269 +7436,9 @@
                 <a:ea typeface="Segoe UI" pitchFamily="34" charset="-122"/>
                 <a:cs typeface="Segoe UI" pitchFamily="34" charset="-120"/>
               </a:rPr>
-              <a:t>по налогу на прибыль, без конкурса</a:t>
-            </a:r>
-            <a:endParaRPr lang="en-US" sz="950" dirty="0"/>
-          </a:p>
-        </p:txBody>
-      </p:sp>
-      <p:sp>
-        <p:nvSpPr>
-          <p:cNvPr id="43" name="Text 41"/>
-          <p:cNvSpPr txBox="1"/>
-          <p:nvPr/>
-        </p:nvSpPr>
-        <p:spPr>
-          <a:xfrm>
-            <a:off x="6233008" y="5413248"/>
-            <a:ext cx="2650160" cy="274320"/>
-          </a:xfrm>
-          <a:prstGeom prst="rect">
-            <a:avLst/>
-          </a:prstGeom>
-          <a:noFill/>
-          <a:ln/>
-        </p:spPr>
-        <p:txBody>
-          <a:bodyPr wrap="square" lIns="0" tIns="0" rIns="0" bIns="0" rtlCol="0" anchor="ctr"/>
-          <a:lstStyle/>
-          <a:p>
-            <a:pPr indent="0" marL="0">
-              <a:buNone/>
-            </a:pPr>
-            <a:r>
-              <a:rPr lang="en-US" sz="1050" dirty="0">
-                <a:solidFill>
-                  <a:srgbClr val="1E2761"/>
-                </a:solidFill>
-                <a:latin typeface="Segoe UI Semibold" pitchFamily="34" charset="0"/>
-                <a:ea typeface="Segoe UI Semibold" pitchFamily="34" charset="-122"/>
-                <a:cs typeface="Segoe UI Semibold" pitchFamily="34" charset="-120"/>
-              </a:rPr>
-              <a:t>Грант на доращивание</a:t>
-            </a:r>
-            <a:endParaRPr lang="en-US" sz="1050" dirty="0"/>
-          </a:p>
-        </p:txBody>
-      </p:sp>
-      <p:sp>
-        <p:nvSpPr>
-          <p:cNvPr id="44" name="Text 42"/>
-          <p:cNvSpPr txBox="1"/>
-          <p:nvPr/>
-        </p:nvSpPr>
-        <p:spPr>
-          <a:xfrm>
-            <a:off x="6233008" y="5705856"/>
-            <a:ext cx="2650160" cy="457200"/>
-          </a:xfrm>
-          <a:prstGeom prst="rect">
-            <a:avLst/>
-          </a:prstGeom>
-          <a:noFill/>
-          <a:ln/>
-        </p:spPr>
-        <p:txBody>
-          <a:bodyPr wrap="square" lIns="0" tIns="0" rIns="0" bIns="0" rtlCol="0" anchor="ctr"/>
-          <a:lstStyle/>
-          <a:p>
-            <a:pPr indent="0" marL="0">
-              <a:lnSpc>
-                <a:spcPct val="105000"/>
-              </a:lnSpc>
-              <a:buNone/>
-            </a:pPr>
-            <a:r>
-              <a:rPr lang="en-US" sz="950" dirty="0">
-                <a:solidFill>
-                  <a:srgbClr val="6B7699"/>
-                </a:solidFill>
-                <a:latin typeface="Segoe UI" pitchFamily="34" charset="0"/>
-                <a:ea typeface="Segoe UI" pitchFamily="34" charset="-122"/>
-                <a:cs typeface="Segoe UI" pitchFamily="34" charset="-120"/>
-              </a:rPr>
-              <a:t>до 250 млн ₽</a:t>
-            </a:r>
-            <a:endParaRPr lang="en-US" sz="950" dirty="0"/>
-          </a:p>
-        </p:txBody>
-      </p:sp>
-      <p:sp>
-        <p:nvSpPr>
-          <p:cNvPr id="45" name="Text 43"/>
-          <p:cNvSpPr txBox="1"/>
-          <p:nvPr/>
-        </p:nvSpPr>
-        <p:spPr>
-          <a:xfrm>
-            <a:off x="9157487" y="5413248"/>
-            <a:ext cx="2650160" cy="274320"/>
-          </a:xfrm>
-          <a:prstGeom prst="rect">
-            <a:avLst/>
-          </a:prstGeom>
-          <a:noFill/>
-          <a:ln/>
-        </p:spPr>
-        <p:txBody>
-          <a:bodyPr wrap="square" lIns="0" tIns="0" rIns="0" bIns="0" rtlCol="0" anchor="ctr"/>
-          <a:lstStyle/>
-          <a:p>
-            <a:pPr indent="0" marL="0">
-              <a:buNone/>
-            </a:pPr>
-            <a:r>
-              <a:rPr lang="en-US" sz="1050" dirty="0">
-                <a:solidFill>
-                  <a:srgbClr val="1E2761"/>
-                </a:solidFill>
-                <a:latin typeface="Segoe UI Semibold" pitchFamily="34" charset="0"/>
-                <a:ea typeface="Segoe UI Semibold" pitchFamily="34" charset="-122"/>
-                <a:cs typeface="Segoe UI Semibold" pitchFamily="34" charset="-120"/>
-              </a:rPr>
-              <a:t>Субсидии Росрыболовства</a:t>
-            </a:r>
-            <a:endParaRPr lang="en-US" sz="1050" dirty="0"/>
-          </a:p>
-        </p:txBody>
-      </p:sp>
-      <p:sp>
-        <p:nvSpPr>
-          <p:cNvPr id="46" name="Text 44"/>
-          <p:cNvSpPr txBox="1"/>
-          <p:nvPr/>
-        </p:nvSpPr>
-        <p:spPr>
-          <a:xfrm>
-            <a:off x="9157487" y="5705856"/>
-            <a:ext cx="2650160" cy="457200"/>
-          </a:xfrm>
-          <a:prstGeom prst="rect">
-            <a:avLst/>
-          </a:prstGeom>
-          <a:noFill/>
-          <a:ln/>
-        </p:spPr>
-        <p:txBody>
-          <a:bodyPr wrap="square" lIns="0" tIns="0" rIns="0" bIns="0" rtlCol="0" anchor="ctr"/>
-          <a:lstStyle/>
-          <a:p>
-            <a:pPr indent="0" marL="0">
-              <a:lnSpc>
-                <a:spcPct val="105000"/>
-              </a:lnSpc>
-              <a:buNone/>
-            </a:pPr>
-            <a:r>
-              <a:rPr lang="en-US" sz="950" dirty="0">
-                <a:solidFill>
-                  <a:srgbClr val="6B7699"/>
-                </a:solidFill>
-                <a:latin typeface="Segoe UI" pitchFamily="34" charset="0"/>
-                <a:ea typeface="Segoe UI" pitchFamily="34" charset="-122"/>
-                <a:cs typeface="Segoe UI" pitchFamily="34" charset="-120"/>
-              </a:rPr>
-              <a:t>поддержка аквакультуры</a:t>
-            </a:r>
-            <a:endParaRPr lang="en-US" sz="950" dirty="0"/>
-          </a:p>
-        </p:txBody>
-      </p:sp>
-      <p:sp>
-        <p:nvSpPr>
-          <p:cNvPr id="47" name="Shape 45"/>
-          <p:cNvSpPr/>
-          <p:nvPr/>
-        </p:nvSpPr>
-        <p:spPr>
-          <a:xfrm>
-            <a:off x="0" y="6803136"/>
-            <a:ext cx="12191695" cy="54864"/>
-          </a:xfrm>
-          <a:prstGeom prst="rect">
-            <a:avLst/>
-          </a:prstGeom>
-          <a:solidFill>
-            <a:srgbClr val="1E2761"/>
-          </a:solidFill>
-          <a:ln/>
-        </p:spPr>
-      </p:sp>
-      <p:sp>
-        <p:nvSpPr>
-          <p:cNvPr id="48" name="Text 46"/>
-          <p:cNvSpPr txBox="1"/>
-          <p:nvPr/>
-        </p:nvSpPr>
-        <p:spPr>
-          <a:xfrm>
-            <a:off x="384048" y="6528816"/>
-            <a:ext cx="1828800" cy="219456"/>
-          </a:xfrm>
-          <a:prstGeom prst="rect">
-            <a:avLst/>
-          </a:prstGeom>
-          <a:noFill/>
-          <a:ln/>
-        </p:spPr>
-        <p:txBody>
-          <a:bodyPr wrap="square" lIns="0" tIns="0" rIns="0" bIns="0" rtlCol="0" anchor="ctr"/>
-          <a:lstStyle/>
-          <a:p>
-            <a:pPr indent="0" marL="0">
-              <a:buNone/>
-            </a:pPr>
-            <a:r>
-              <a:rPr lang="en-US" sz="750" dirty="0">
-                <a:solidFill>
-                  <a:srgbClr val="6B7699"/>
-                </a:solidFill>
-                <a:latin typeface="Segoe UI" pitchFamily="34" charset="0"/>
-                <a:ea typeface="Segoe UI" pitchFamily="34" charset="-122"/>
-                <a:cs typeface="Segoe UI" pitchFamily="34" charset="-120"/>
-              </a:rPr>
-              <a:t>Ситалл</a:t>
-            </a:r>
-            <a:endParaRPr lang="en-US" sz="750" dirty="0"/>
-          </a:p>
-        </p:txBody>
-      </p:sp>
-      <p:sp>
-        <p:nvSpPr>
-          <p:cNvPr id="49" name="Text 47"/>
-          <p:cNvSpPr txBox="1"/>
-          <p:nvPr/>
-        </p:nvSpPr>
-        <p:spPr>
-          <a:xfrm>
-            <a:off x="10911535" y="6528816"/>
-            <a:ext cx="914400" cy="219456"/>
-          </a:xfrm>
-          <a:prstGeom prst="rect">
-            <a:avLst/>
-          </a:prstGeom>
-          <a:noFill/>
-          <a:ln/>
-        </p:spPr>
-        <p:txBody>
-          <a:bodyPr wrap="square" lIns="0" tIns="0" rIns="0" bIns="0" rtlCol="0" anchor="ctr"/>
-          <a:lstStyle/>
-          <a:p>
-            <a:pPr algn="r" indent="0" marL="0">
-              <a:buNone/>
-            </a:pPr>
-            <a:r>
-              <a:rPr lang="en-US" sz="750" dirty="0">
-                <a:solidFill>
-                  <a:srgbClr val="6B7699"/>
-                </a:solidFill>
-                <a:latin typeface="Segoe UI" pitchFamily="34" charset="0"/>
-                <a:ea typeface="Segoe UI" pitchFamily="34" charset="-122"/>
-                <a:cs typeface="Segoe UI" pitchFamily="34" charset="-120"/>
-              </a:rPr>
               <a:t>05 / 10</a:t>
             </a:r>
-            <a:endParaRPr lang="en-US" sz="750" dirty="0"/>
+            <a:endParaRPr lang="en-US" sz="1200" dirty="0"/>
           </a:p>
         </p:txBody>
       </p:sp>
@@ -7768,8 +7475,8 @@
         </p:nvSpPr>
         <p:spPr>
           <a:xfrm>
-            <a:off x="384048" y="201168"/>
-            <a:ext cx="11423599" cy="237744"/>
+            <a:off x="502920" y="219456"/>
+            <a:ext cx="11185855" cy="274320"/>
           </a:xfrm>
           <a:prstGeom prst="rect">
             <a:avLst/>
@@ -7785,7 +7492,7 @@
               <a:buNone/>
             </a:pPr>
             <a:r>
-              <a:rPr lang="en-US" sz="950" spc="300" kern="0" dirty="0">
+              <a:rPr lang="en-US" sz="1300" spc="300" kern="0" dirty="0">
                 <a:solidFill>
                   <a:srgbClr val="C9A24B"/>
                 </a:solidFill>
@@ -7795,7 +7502,7 @@
               </a:rPr>
               <a:t>ЧЕМ РАБОТАЕМ</a:t>
             </a:r>
-            <a:endParaRPr lang="en-US" sz="950" dirty="0"/>
+            <a:endParaRPr lang="en-US" sz="1300" dirty="0"/>
           </a:p>
         </p:txBody>
       </p:sp>
@@ -7807,8 +7514,8 @@
         </p:nvSpPr>
         <p:spPr>
           <a:xfrm>
-            <a:off x="365760" y="457200"/>
-            <a:ext cx="11423599" cy="475488"/>
+            <a:off x="484632" y="512064"/>
+            <a:ext cx="11185855" cy="566928"/>
           </a:xfrm>
           <a:prstGeom prst="rect">
             <a:avLst/>
@@ -7824,7 +7531,7 @@
               <a:buNone/>
             </a:pPr>
             <a:r>
-              <a:rPr lang="en-US" sz="2600" dirty="0">
+              <a:rPr lang="en-US" sz="2700" dirty="0">
                 <a:solidFill>
                   <a:srgbClr val="1E2761"/>
                 </a:solidFill>
@@ -7832,9 +7539,9 @@
                 <a:ea typeface="Segoe UI Semibold" pitchFamily="34" charset="-122"/>
                 <a:cs typeface="Segoe UI Semibold" pitchFamily="34" charset="-120"/>
               </a:rPr>
-              <a:t>Ситалл Скаут: подбор решений за сутки</a:t>
-            </a:r>
-            <a:endParaRPr lang="en-US" sz="2600" dirty="0"/>
+              <a:t>Ситалл Скаут: платформа подбора решений</a:t>
+            </a:r>
+            <a:endParaRPr lang="en-US" sz="2700" dirty="0"/>
           </a:p>
         </p:txBody>
       </p:sp>
@@ -7846,8 +7553,8 @@
         </p:nvSpPr>
         <p:spPr>
           <a:xfrm>
-            <a:off x="384048" y="1024128"/>
-            <a:ext cx="960120" cy="41148"/>
+            <a:off x="502920" y="1133856"/>
+            <a:ext cx="1097280" cy="64008"/>
           </a:xfrm>
           <a:prstGeom prst="rect">
             <a:avLst/>
@@ -7866,12 +7573,12 @@
         </p:nvSpPr>
         <p:spPr>
           <a:xfrm>
-            <a:off x="384048" y="1417320"/>
-            <a:ext cx="3749040" cy="3977640"/>
+            <a:off x="502920" y="1481328"/>
+            <a:ext cx="4114800" cy="4709160"/>
           </a:xfrm>
           <a:prstGeom prst="roundRect">
             <a:avLst>
-              <a:gd name="adj" fmla="val 1707"/>
+              <a:gd name="adj" fmla="val 2000"/>
             </a:avLst>
           </a:prstGeom>
           <a:solidFill>
@@ -7883,6 +7590,13 @@
             </a:solidFill>
             <a:prstDash val="solid"/>
           </a:ln>
+          <a:effectLst>
+            <a:outerShdw sx="100000" sy="100000" kx="0" ky="0" algn="bl" rotWithShape="0" blurRad="177800" dist="50800" dir="5400000">
+              <a:srgbClr val="7E88A8">
+                <a:alpha val="30000"/>
+              </a:srgbClr>
+            </a:outerShdw>
+          </a:effectLst>
         </p:spPr>
       </p:sp>
       <p:sp>
@@ -7893,8 +7607,8 @@
         </p:nvSpPr>
         <p:spPr>
           <a:xfrm>
-            <a:off x="621792" y="1636776"/>
-            <a:ext cx="274320" cy="34747"/>
+            <a:off x="832104" y="1810512"/>
+            <a:ext cx="457200" cy="54864"/>
           </a:xfrm>
           <a:prstGeom prst="rect">
             <a:avLst/>
@@ -7913,8 +7627,8 @@
         </p:nvSpPr>
         <p:spPr>
           <a:xfrm>
-            <a:off x="621792" y="1728216"/>
-            <a:ext cx="3273552" cy="566928"/>
+            <a:off x="832104" y="2011680"/>
+            <a:ext cx="3456432" cy="1371600"/>
           </a:xfrm>
           <a:prstGeom prst="rect">
             <a:avLst/>
@@ -7930,9 +7644,9 @@
               <a:buNone/>
             </a:pPr>
             <a:r>
-              <a:rPr lang="en-US" sz="4800" dirty="0">
-                <a:solidFill>
-                  <a:srgbClr val="C9A24B"/>
+              <a:rPr lang="en-US" sz="7600" dirty="0">
+                <a:solidFill>
+                  <a:srgbClr val="1E2761"/>
                 </a:solidFill>
                 <a:latin typeface="Segoe UI Semibold" pitchFamily="34" charset="0"/>
                 <a:ea typeface="Segoe UI Semibold" pitchFamily="34" charset="-122"/>
@@ -7940,7 +7654,7 @@
               </a:rPr>
               <a:t>5–7</a:t>
             </a:r>
-            <a:endParaRPr lang="en-US" sz="4800" dirty="0"/>
+            <a:endParaRPr lang="en-US" sz="7600" dirty="0"/>
           </a:p>
         </p:txBody>
       </p:sp>
@@ -7952,27 +7666,27 @@
         </p:nvSpPr>
         <p:spPr>
           <a:xfrm>
-            <a:off x="621792" y="2313432"/>
-            <a:ext cx="3273552" cy="2807208"/>
-          </a:xfrm>
-          <a:prstGeom prst="rect">
-            <a:avLst/>
-          </a:prstGeom>
-          <a:noFill/>
-          <a:ln/>
-        </p:spPr>
-        <p:txBody>
-          <a:bodyPr wrap="square" lIns="0" tIns="0" rIns="0" bIns="0" rtlCol="0" anchor="t"/>
+            <a:off x="832104" y="3520440"/>
+            <a:ext cx="3456432" cy="1737360"/>
+          </a:xfrm>
+          <a:prstGeom prst="rect">
+            <a:avLst/>
+          </a:prstGeom>
+          <a:noFill/>
+          <a:ln/>
+        </p:spPr>
+        <p:txBody>
+          <a:bodyPr wrap="square" lIns="0" tIns="0" rIns="0" bIns="0" rtlCol="0" anchor="ctr"/>
           <a:lstStyle/>
           <a:p>
             <a:pPr indent="0" marL="0">
               <a:lnSpc>
-                <a:spcPct val="112000"/>
+                <a:spcPct val="118000"/>
               </a:lnSpc>
               <a:buNone/>
             </a:pPr>
             <a:r>
-              <a:rPr lang="en-US" sz="1050" dirty="0">
+              <a:rPr lang="en-US" sz="1800" dirty="0">
                 <a:solidFill>
                   <a:srgbClr val="1B2140"/>
                 </a:solidFill>
@@ -7980,19 +7694,19 @@
                 <a:ea typeface="Segoe UI" pitchFamily="34" charset="-122"/>
                 <a:cs typeface="Segoe UI" pitchFamily="34" charset="-120"/>
               </a:rPr>
-              <a:t>проверенных решений под задачу предприятия.</a:t>
-            </a:r>
-            <a:endParaRPr lang="en-US" sz="1050" dirty="0"/>
+              <a:t>проверенных решений</a:t>
+            </a:r>
+            <a:endParaRPr lang="en-US" sz="1800" dirty="0"/>
           </a:p>
           <a:p>
             <a:pPr indent="0" marL="0">
               <a:lnSpc>
-                <a:spcPct val="112000"/>
+                <a:spcPct val="118000"/>
               </a:lnSpc>
               <a:buNone/>
             </a:pPr>
             <a:r>
-              <a:rPr lang="en-US" sz="1050" dirty="0">
+              <a:rPr lang="en-US" sz="1800" dirty="0">
                 <a:solidFill>
                   <a:srgbClr val="1B2140"/>
                 </a:solidFill>
@@ -8000,9 +7714,29 @@
                 <a:ea typeface="Segoe UI" pitchFamily="34" charset="-122"/>
                 <a:cs typeface="Segoe UI" pitchFamily="34" charset="-120"/>
               </a:rPr>
+              <a:t>под задачу предприятия.</a:t>
+            </a:r>
+            <a:endParaRPr lang="en-US" sz="1800" dirty="0"/>
+          </a:p>
+          <a:p>
+            <a:pPr indent="0" marL="0">
+              <a:lnSpc>
+                <a:spcPct val="118000"/>
+              </a:lnSpc>
+              <a:buNone/>
+            </a:pPr>
+            <a:r>
+              <a:rPr lang="en-US" sz="1800" dirty="0">
+                <a:solidFill>
+                  <a:srgbClr val="1B2140"/>
+                </a:solidFill>
+                <a:latin typeface="Segoe UI" pitchFamily="34" charset="0"/>
+                <a:ea typeface="Segoe UI" pitchFamily="34" charset="-122"/>
+                <a:cs typeface="Segoe UI" pitchFamily="34" charset="-120"/>
+              </a:rPr>
               <a:t>Срок: сутки вместо недель</a:t>
             </a:r>
-            <a:endParaRPr lang="en-US" sz="1050" dirty="0"/>
+            <a:endParaRPr lang="en-US" sz="1800" dirty="0"/>
           </a:p>
         </p:txBody>
       </p:sp>
@@ -8014,12 +7748,12 @@
         </p:nvSpPr>
         <p:spPr>
           <a:xfrm>
-            <a:off x="4407408" y="1417320"/>
-            <a:ext cx="7400239" cy="1207008"/>
+            <a:off x="4983480" y="1481328"/>
+            <a:ext cx="6705295" cy="1426464"/>
           </a:xfrm>
           <a:prstGeom prst="roundRect">
             <a:avLst>
-              <a:gd name="adj" fmla="val 5303"/>
+              <a:gd name="adj" fmla="val 5769"/>
             </a:avLst>
           </a:prstGeom>
           <a:solidFill>
@@ -8031,6 +7765,13 @@
             </a:solidFill>
             <a:prstDash val="solid"/>
           </a:ln>
+          <a:effectLst>
+            <a:outerShdw sx="100000" sy="100000" kx="0" ky="0" algn="bl" rotWithShape="0" blurRad="177800" dist="50800" dir="5400000">
+              <a:srgbClr val="7E88A8">
+                <a:alpha val="30000"/>
+              </a:srgbClr>
+            </a:outerShdw>
+          </a:effectLst>
         </p:spPr>
       </p:sp>
       <p:sp>
@@ -8041,8 +7782,8 @@
         </p:nvSpPr>
         <p:spPr>
           <a:xfrm>
-            <a:off x="4645152" y="1618488"/>
-            <a:ext cx="274320" cy="34747"/>
+            <a:off x="5276088" y="1700784"/>
+            <a:ext cx="384048" cy="45720"/>
           </a:xfrm>
           <a:prstGeom prst="rect">
             <a:avLst/>
@@ -8061,8 +7802,8 @@
         </p:nvSpPr>
         <p:spPr>
           <a:xfrm>
-            <a:off x="4645152" y="1709928"/>
-            <a:ext cx="6924751" cy="292608"/>
+            <a:off x="5276088" y="1810512"/>
+            <a:ext cx="6120079" cy="347472"/>
           </a:xfrm>
           <a:prstGeom prst="rect">
             <a:avLst/>
@@ -8078,7 +7819,7 @@
               <a:buNone/>
             </a:pPr>
             <a:r>
-              <a:rPr lang="en-US" sz="1300" dirty="0">
+              <a:rPr lang="en-US" sz="2000" dirty="0">
                 <a:solidFill>
                   <a:srgbClr val="1E2761"/>
                 </a:solidFill>
@@ -8088,7 +7829,7 @@
               </a:rPr>
               <a:t>Проверяет человек</a:t>
             </a:r>
-            <a:endParaRPr lang="en-US" sz="1300" dirty="0"/>
+            <a:endParaRPr lang="en-US" sz="2000" dirty="0"/>
           </a:p>
         </p:txBody>
       </p:sp>
@@ -8100,24 +7841,27 @@
         </p:nvSpPr>
         <p:spPr>
           <a:xfrm>
-            <a:off x="4645152" y="2020824"/>
-            <a:ext cx="6924751" cy="457200"/>
-          </a:xfrm>
-          <a:prstGeom prst="rect">
-            <a:avLst/>
-          </a:prstGeom>
-          <a:noFill/>
-          <a:ln/>
-        </p:spPr>
-        <p:txBody>
-          <a:bodyPr wrap="square" lIns="0" tIns="0" rIns="0" bIns="0" rtlCol="0" anchor="ctr"/>
-          <a:lstStyle/>
-          <a:p>
-            <a:pPr indent="0" marL="0">
-              <a:buNone/>
-            </a:pPr>
-            <a:r>
-              <a:rPr lang="en-US" sz="1050" dirty="0">
+            <a:off x="5276088" y="2194560"/>
+            <a:ext cx="6120079" cy="603504"/>
+          </a:xfrm>
+          <a:prstGeom prst="rect">
+            <a:avLst/>
+          </a:prstGeom>
+          <a:noFill/>
+          <a:ln/>
+        </p:spPr>
+        <p:txBody>
+          <a:bodyPr wrap="square" lIns="0" tIns="0" rIns="0" bIns="0" rtlCol="0" anchor="t"/>
+          <a:lstStyle/>
+          <a:p>
+            <a:pPr indent="0" marL="0">
+              <a:lnSpc>
+                <a:spcPct val="105000"/>
+              </a:lnSpc>
+              <a:buNone/>
+            </a:pPr>
+            <a:r>
+              <a:rPr lang="en-US" sz="1600" dirty="0">
                 <a:solidFill>
                   <a:srgbClr val="1B2140"/>
                 </a:solidFill>
@@ -8125,9 +7869,9 @@
                 <a:ea typeface="Segoe UI" pitchFamily="34" charset="-122"/>
                 <a:cs typeface="Segoe UI" pitchFamily="34" charset="-120"/>
               </a:rPr>
-              <a:t>Инструмент даёт черновик, решение подтверждает учёный</a:t>
-            </a:r>
-            <a:endParaRPr lang="en-US" sz="1050" dirty="0"/>
+              <a:t>Инструмент даёт варианты, подтверждает профильный специалист</a:t>
+            </a:r>
+            <a:endParaRPr lang="en-US" sz="1600" dirty="0"/>
           </a:p>
         </p:txBody>
       </p:sp>
@@ -8139,12 +7883,12 @@
         </p:nvSpPr>
         <p:spPr>
           <a:xfrm>
-            <a:off x="4407408" y="2807208"/>
-            <a:ext cx="7400239" cy="1207008"/>
+            <a:off x="4983480" y="3108960"/>
+            <a:ext cx="6705295" cy="1426464"/>
           </a:xfrm>
           <a:prstGeom prst="roundRect">
             <a:avLst>
-              <a:gd name="adj" fmla="val 5303"/>
+              <a:gd name="adj" fmla="val 5769"/>
             </a:avLst>
           </a:prstGeom>
           <a:solidFill>
@@ -8156,6 +7900,13 @@
             </a:solidFill>
             <a:prstDash val="solid"/>
           </a:ln>
+          <a:effectLst>
+            <a:outerShdw sx="100000" sy="100000" kx="0" ky="0" algn="bl" rotWithShape="0" blurRad="177800" dist="50800" dir="5400000">
+              <a:srgbClr val="7E88A8">
+                <a:alpha val="30000"/>
+              </a:srgbClr>
+            </a:outerShdw>
+          </a:effectLst>
         </p:spPr>
       </p:sp>
       <p:sp>
@@ -8166,8 +7917,8 @@
         </p:nvSpPr>
         <p:spPr>
           <a:xfrm>
-            <a:off x="4645152" y="3008376"/>
-            <a:ext cx="274320" cy="34747"/>
+            <a:off x="5276088" y="3328416"/>
+            <a:ext cx="384048" cy="45720"/>
           </a:xfrm>
           <a:prstGeom prst="rect">
             <a:avLst/>
@@ -8186,8 +7937,8 @@
         </p:nvSpPr>
         <p:spPr>
           <a:xfrm>
-            <a:off x="4645152" y="3099816"/>
-            <a:ext cx="6924751" cy="292608"/>
+            <a:off x="5276088" y="3438144"/>
+            <a:ext cx="6120079" cy="347472"/>
           </a:xfrm>
           <a:prstGeom prst="rect">
             <a:avLst/>
@@ -8203,7 +7954,7 @@
               <a:buNone/>
             </a:pPr>
             <a:r>
-              <a:rPr lang="en-US" sz="1300" dirty="0">
+              <a:rPr lang="en-US" sz="2000" dirty="0">
                 <a:solidFill>
                   <a:srgbClr val="1E2761"/>
                 </a:solidFill>
@@ -8213,7 +7964,7 @@
               </a:rPr>
               <a:t>Открытые данные</a:t>
             </a:r>
-            <a:endParaRPr lang="en-US" sz="1300" dirty="0"/>
+            <a:endParaRPr lang="en-US" sz="2000" dirty="0"/>
           </a:p>
         </p:txBody>
       </p:sp>
@@ -8225,24 +7976,27 @@
         </p:nvSpPr>
         <p:spPr>
           <a:xfrm>
-            <a:off x="4645152" y="3410712"/>
-            <a:ext cx="6924751" cy="457200"/>
-          </a:xfrm>
-          <a:prstGeom prst="rect">
-            <a:avLst/>
-          </a:prstGeom>
-          <a:noFill/>
-          <a:ln/>
-        </p:spPr>
-        <p:txBody>
-          <a:bodyPr wrap="square" lIns="0" tIns="0" rIns="0" bIns="0" rtlCol="0" anchor="ctr"/>
-          <a:lstStyle/>
-          <a:p>
-            <a:pPr indent="0" marL="0">
-              <a:buNone/>
-            </a:pPr>
-            <a:r>
-              <a:rPr lang="en-US" sz="1050" dirty="0">
+            <a:off x="5276088" y="3822192"/>
+            <a:ext cx="6120079" cy="603504"/>
+          </a:xfrm>
+          <a:prstGeom prst="rect">
+            <a:avLst/>
+          </a:prstGeom>
+          <a:noFill/>
+          <a:ln/>
+        </p:spPr>
+        <p:txBody>
+          <a:bodyPr wrap="square" lIns="0" tIns="0" rIns="0" bIns="0" rtlCol="0" anchor="t"/>
+          <a:lstStyle/>
+          <a:p>
+            <a:pPr indent="0" marL="0">
+              <a:lnSpc>
+                <a:spcPct val="105000"/>
+              </a:lnSpc>
+              <a:buNone/>
+            </a:pPr>
+            <a:r>
+              <a:rPr lang="en-US" sz="1600" dirty="0">
                 <a:solidFill>
                   <a:srgbClr val="1B2140"/>
                 </a:solidFill>
@@ -8252,7 +8006,7 @@
               </a:rPr>
               <a:t>Публикации, патенты, гранты, российский и мировой веб</a:t>
             </a:r>
-            <a:endParaRPr lang="en-US" sz="1050" dirty="0"/>
+            <a:endParaRPr lang="en-US" sz="1600" dirty="0"/>
           </a:p>
         </p:txBody>
       </p:sp>
@@ -8264,12 +8018,12 @@
         </p:nvSpPr>
         <p:spPr>
           <a:xfrm>
-            <a:off x="4407408" y="4197096"/>
-            <a:ext cx="7400239" cy="1207008"/>
+            <a:off x="4983480" y="4736592"/>
+            <a:ext cx="6705295" cy="1426464"/>
           </a:xfrm>
           <a:prstGeom prst="roundRect">
             <a:avLst>
-              <a:gd name="adj" fmla="val 5303"/>
+              <a:gd name="adj" fmla="val 5769"/>
             </a:avLst>
           </a:prstGeom>
           <a:solidFill>
@@ -8281,6 +8035,13 @@
             </a:solidFill>
             <a:prstDash val="solid"/>
           </a:ln>
+          <a:effectLst>
+            <a:outerShdw sx="100000" sy="100000" kx="0" ky="0" algn="bl" rotWithShape="0" blurRad="177800" dist="50800" dir="5400000">
+              <a:srgbClr val="7E88A8">
+                <a:alpha val="30000"/>
+              </a:srgbClr>
+            </a:outerShdw>
+          </a:effectLst>
         </p:spPr>
       </p:sp>
       <p:sp>
@@ -8291,8 +8052,8 @@
         </p:nvSpPr>
         <p:spPr>
           <a:xfrm>
-            <a:off x="4645152" y="4398264"/>
-            <a:ext cx="274320" cy="34747"/>
+            <a:off x="5276088" y="4956048"/>
+            <a:ext cx="384048" cy="45720"/>
           </a:xfrm>
           <a:prstGeom prst="rect">
             <a:avLst/>
@@ -8311,8 +8072,8 @@
         </p:nvSpPr>
         <p:spPr>
           <a:xfrm>
-            <a:off x="4645152" y="4489704"/>
-            <a:ext cx="6924751" cy="292608"/>
+            <a:off x="5276088" y="5065776"/>
+            <a:ext cx="6120079" cy="347472"/>
           </a:xfrm>
           <a:prstGeom prst="rect">
             <a:avLst/>
@@ -8328,7 +8089,7 @@
               <a:buNone/>
             </a:pPr>
             <a:r>
-              <a:rPr lang="en-US" sz="1300" dirty="0">
+              <a:rPr lang="en-US" sz="2000" dirty="0">
                 <a:solidFill>
                   <a:srgbClr val="1E2761"/>
                 </a:solidFill>
@@ -8338,7 +8099,7 @@
               </a:rPr>
               <a:t>Показываем в деле</a:t>
             </a:r>
-            <a:endParaRPr lang="en-US" sz="1300" dirty="0"/>
+            <a:endParaRPr lang="en-US" sz="2000" dirty="0"/>
           </a:p>
         </p:txBody>
       </p:sp>
@@ -8350,24 +8111,27 @@
         </p:nvSpPr>
         <p:spPr>
           <a:xfrm>
-            <a:off x="4645152" y="4800600"/>
-            <a:ext cx="6924751" cy="457200"/>
-          </a:xfrm>
-          <a:prstGeom prst="rect">
-            <a:avLst/>
-          </a:prstGeom>
-          <a:noFill/>
-          <a:ln/>
-        </p:spPr>
-        <p:txBody>
-          <a:bodyPr wrap="square" lIns="0" tIns="0" rIns="0" bIns="0" rtlCol="0" anchor="ctr"/>
-          <a:lstStyle/>
-          <a:p>
-            <a:pPr indent="0" marL="0">
-              <a:buNone/>
-            </a:pPr>
-            <a:r>
-              <a:rPr lang="en-US" sz="1050" dirty="0">
+            <a:off x="5276088" y="5449824"/>
+            <a:ext cx="6120079" cy="603504"/>
+          </a:xfrm>
+          <a:prstGeom prst="rect">
+            <a:avLst/>
+          </a:prstGeom>
+          <a:noFill/>
+          <a:ln/>
+        </p:spPr>
+        <p:txBody>
+          <a:bodyPr wrap="square" lIns="0" tIns="0" rIns="0" bIns="0" rtlCol="0" anchor="t"/>
+          <a:lstStyle/>
+          <a:p>
+            <a:pPr indent="0" marL="0">
+              <a:lnSpc>
+                <a:spcPct val="105000"/>
+              </a:lnSpc>
+              <a:buNone/>
+            </a:pPr>
+            <a:r>
+              <a:rPr lang="en-US" sz="1600" dirty="0">
                 <a:solidFill>
                   <a:srgbClr val="1B2140"/>
                 </a:solidFill>
@@ -8377,40 +8141,20 @@
               </a:rPr>
               <a:t>Демонстрация на вашей задаче — по запросу</a:t>
             </a:r>
-            <a:endParaRPr lang="en-US" sz="1050" dirty="0"/>
-          </a:p>
-        </p:txBody>
-      </p:sp>
-      <p:sp>
-        <p:nvSpPr>
-          <p:cNvPr id="21" name="Shape 19"/>
-          <p:cNvSpPr/>
-          <p:nvPr/>
-        </p:nvSpPr>
-        <p:spPr>
-          <a:xfrm>
-            <a:off x="384048" y="5806440"/>
-            <a:ext cx="50292" cy="530352"/>
-          </a:xfrm>
-          <a:prstGeom prst="rect">
-            <a:avLst/>
-          </a:prstGeom>
-          <a:solidFill>
-            <a:srgbClr val="1E2761"/>
-          </a:solidFill>
-          <a:ln/>
-        </p:spPr>
-      </p:sp>
-      <p:sp>
-        <p:nvSpPr>
-          <p:cNvPr id="22" name="Text 20"/>
-          <p:cNvSpPr txBox="1"/>
-          <p:nvPr/>
-        </p:nvSpPr>
-        <p:spPr>
-          <a:xfrm>
-            <a:off x="585216" y="5788152"/>
-            <a:ext cx="11149279" cy="603504"/>
+            <a:endParaRPr lang="en-US" sz="1600" dirty="0"/>
+          </a:p>
+        </p:txBody>
+      </p:sp>
+      <p:sp>
+        <p:nvSpPr>
+          <p:cNvPr id="21" name="Text 19"/>
+          <p:cNvSpPr txBox="1"/>
+          <p:nvPr/>
+        </p:nvSpPr>
+        <p:spPr>
+          <a:xfrm>
+            <a:off x="502920" y="6473952"/>
+            <a:ext cx="1828800" cy="274320"/>
           </a:xfrm>
           <a:prstGeom prst="rect">
             <a:avLst/>
@@ -8426,66 +8170,7 @@
               <a:buNone/>
             </a:pPr>
             <a:r>
-              <a:rPr lang="en-US" sz="1500" dirty="0">
-                <a:solidFill>
-                  <a:srgbClr val="1E2761"/>
-                </a:solidFill>
-                <a:latin typeface="Segoe UI Semibold" pitchFamily="34" charset="0"/>
-                <a:ea typeface="Segoe UI Semibold" pitchFamily="34" charset="-122"/>
-                <a:cs typeface="Segoe UI Semibold" pitchFamily="34" charset="-120"/>
-              </a:rPr>
-              <a:t>Инструмент разработан и работает</a:t>
-            </a:r>
-            <a:endParaRPr lang="en-US" sz="1500" dirty="0"/>
-          </a:p>
-        </p:txBody>
-      </p:sp>
-      <p:sp>
-        <p:nvSpPr>
-          <p:cNvPr id="23" name="Shape 21"/>
-          <p:cNvSpPr/>
-          <p:nvPr/>
-        </p:nvSpPr>
-        <p:spPr>
-          <a:xfrm>
-            <a:off x="0" y="6803136"/>
-            <a:ext cx="12191695" cy="54864"/>
-          </a:xfrm>
-          <a:prstGeom prst="rect">
-            <a:avLst/>
-          </a:prstGeom>
-          <a:solidFill>
-            <a:srgbClr val="1E2761"/>
-          </a:solidFill>
-          <a:ln/>
-        </p:spPr>
-      </p:sp>
-      <p:sp>
-        <p:nvSpPr>
-          <p:cNvPr id="24" name="Text 22"/>
-          <p:cNvSpPr txBox="1"/>
-          <p:nvPr/>
-        </p:nvSpPr>
-        <p:spPr>
-          <a:xfrm>
-            <a:off x="384048" y="6528816"/>
-            <a:ext cx="1828800" cy="219456"/>
-          </a:xfrm>
-          <a:prstGeom prst="rect">
-            <a:avLst/>
-          </a:prstGeom>
-          <a:noFill/>
-          <a:ln/>
-        </p:spPr>
-        <p:txBody>
-          <a:bodyPr wrap="square" lIns="0" tIns="0" rIns="0" bIns="0" rtlCol="0" anchor="ctr"/>
-          <a:lstStyle/>
-          <a:p>
-            <a:pPr indent="0" marL="0">
-              <a:buNone/>
-            </a:pPr>
-            <a:r>
-              <a:rPr lang="en-US" sz="750" dirty="0">
+              <a:rPr lang="en-US" sz="1200" dirty="0">
                 <a:solidFill>
                   <a:srgbClr val="6B7699"/>
                 </a:solidFill>
@@ -8495,20 +8180,20 @@
               </a:rPr>
               <a:t>Ситалл</a:t>
             </a:r>
-            <a:endParaRPr lang="en-US" sz="750" dirty="0"/>
-          </a:p>
-        </p:txBody>
-      </p:sp>
-      <p:sp>
-        <p:nvSpPr>
-          <p:cNvPr id="25" name="Text 23"/>
-          <p:cNvSpPr txBox="1"/>
-          <p:nvPr/>
-        </p:nvSpPr>
-        <p:spPr>
-          <a:xfrm>
-            <a:off x="10911535" y="6528816"/>
-            <a:ext cx="914400" cy="219456"/>
+            <a:endParaRPr lang="en-US" sz="1200" dirty="0"/>
+          </a:p>
+        </p:txBody>
+      </p:sp>
+      <p:sp>
+        <p:nvSpPr>
+          <p:cNvPr id="22" name="Text 20"/>
+          <p:cNvSpPr txBox="1"/>
+          <p:nvPr/>
+        </p:nvSpPr>
+        <p:spPr>
+          <a:xfrm>
+            <a:off x="10774375" y="6473952"/>
+            <a:ext cx="914400" cy="274320"/>
           </a:xfrm>
           <a:prstGeom prst="rect">
             <a:avLst/>
@@ -8524,7 +8209,7 @@
               <a:buNone/>
             </a:pPr>
             <a:r>
-              <a:rPr lang="en-US" sz="750" dirty="0">
+              <a:rPr lang="en-US" sz="1200" dirty="0">
                 <a:solidFill>
                   <a:srgbClr val="6B7699"/>
                 </a:solidFill>
@@ -8534,7 +8219,7 @@
               </a:rPr>
               <a:t>06 / 10</a:t>
             </a:r>
-            <a:endParaRPr lang="en-US" sz="750" dirty="0"/>
+            <a:endParaRPr lang="en-US" sz="1200" dirty="0"/>
           </a:p>
         </p:txBody>
       </p:sp>
@@ -8571,8 +8256,8 @@
         </p:nvSpPr>
         <p:spPr>
           <a:xfrm>
-            <a:off x="384048" y="201168"/>
-            <a:ext cx="11423599" cy="237744"/>
+            <a:off x="502920" y="219456"/>
+            <a:ext cx="11185855" cy="274320"/>
           </a:xfrm>
           <a:prstGeom prst="rect">
             <a:avLst/>
@@ -8588,7 +8273,7 @@
               <a:buNone/>
             </a:pPr>
             <a:r>
-              <a:rPr lang="en-US" sz="950" spc="300" kern="0" dirty="0">
+              <a:rPr lang="en-US" sz="1300" spc="300" kern="0" dirty="0">
                 <a:solidFill>
                   <a:srgbClr val="C9A24B"/>
                 </a:solidFill>
@@ -8598,7 +8283,7 @@
               </a:rPr>
               <a:t>НАПРАВЛЕНИЯ ПОИСКА</a:t>
             </a:r>
-            <a:endParaRPr lang="en-US" sz="950" dirty="0"/>
+            <a:endParaRPr lang="en-US" sz="1300" dirty="0"/>
           </a:p>
         </p:txBody>
       </p:sp>
@@ -8610,8 +8295,8 @@
         </p:nvSpPr>
         <p:spPr>
           <a:xfrm>
-            <a:off x="365760" y="457200"/>
-            <a:ext cx="11423599" cy="475488"/>
+            <a:off x="484632" y="512064"/>
+            <a:ext cx="11185855" cy="566928"/>
           </a:xfrm>
           <a:prstGeom prst="rect">
             <a:avLst/>
@@ -8627,7 +8312,7 @@
               <a:buNone/>
             </a:pPr>
             <a:r>
-              <a:rPr lang="en-US" sz="2600" dirty="0">
+              <a:rPr lang="en-US" sz="2700" dirty="0">
                 <a:solidFill>
                   <a:srgbClr val="1E2761"/>
                 </a:solidFill>
@@ -8637,7 +8322,7 @@
               </a:rPr>
               <a:t>Что мы можем найти под задачи завода</a:t>
             </a:r>
-            <a:endParaRPr lang="en-US" sz="2600" dirty="0"/>
+            <a:endParaRPr lang="en-US" sz="2700" dirty="0"/>
           </a:p>
         </p:txBody>
       </p:sp>
@@ -8649,8 +8334,8 @@
         </p:nvSpPr>
         <p:spPr>
           <a:xfrm>
-            <a:off x="384048" y="1024128"/>
-            <a:ext cx="960120" cy="41148"/>
+            <a:off x="502920" y="1133856"/>
+            <a:ext cx="1097280" cy="64008"/>
           </a:xfrm>
           <a:prstGeom prst="rect">
             <a:avLst/>
@@ -8669,12 +8354,12 @@
         </p:nvSpPr>
         <p:spPr>
           <a:xfrm>
-            <a:off x="384048" y="1371600"/>
-            <a:ext cx="3624986" cy="1965960"/>
+            <a:off x="502920" y="1444752"/>
+            <a:ext cx="3545738" cy="2148840"/>
           </a:xfrm>
           <a:prstGeom prst="roundRect">
             <a:avLst>
-              <a:gd name="adj" fmla="val 3256"/>
+              <a:gd name="adj" fmla="val 3830"/>
             </a:avLst>
           </a:prstGeom>
           <a:solidFill>
@@ -8686,6 +8371,13 @@
             </a:solidFill>
             <a:prstDash val="solid"/>
           </a:ln>
+          <a:effectLst>
+            <a:outerShdw sx="100000" sy="100000" kx="0" ky="0" algn="bl" rotWithShape="0" blurRad="177800" dist="50800" dir="5400000">
+              <a:srgbClr val="7E88A8">
+                <a:alpha val="30000"/>
+              </a:srgbClr>
+            </a:outerShdw>
+          </a:effectLst>
         </p:spPr>
       </p:sp>
       <p:sp>
@@ -8696,8 +8388,8 @@
         </p:nvSpPr>
         <p:spPr>
           <a:xfrm>
-            <a:off x="621792" y="1572768"/>
-            <a:ext cx="292608" cy="292608"/>
+            <a:off x="795528" y="1682496"/>
+            <a:ext cx="384048" cy="384048"/>
           </a:xfrm>
           <a:prstGeom prst="ellipse">
             <a:avLst/>
@@ -8716,8 +8408,8 @@
         </p:nvSpPr>
         <p:spPr>
           <a:xfrm>
-            <a:off x="621792" y="1572768"/>
-            <a:ext cx="292608" cy="292608"/>
+            <a:off x="795528" y="1682496"/>
+            <a:ext cx="384048" cy="384048"/>
           </a:xfrm>
           <a:prstGeom prst="rect">
             <a:avLst/>
@@ -8733,7 +8425,7 @@
               <a:buNone/>
             </a:pPr>
             <a:r>
-              <a:rPr lang="en-US" sz="1200" dirty="0">
+              <a:rPr lang="en-US" sz="1600" dirty="0">
                 <a:solidFill>
                   <a:srgbClr val="FFFFFF"/>
                 </a:solidFill>
@@ -8743,7 +8435,7 @@
               </a:rPr>
               <a:t>1</a:t>
             </a:r>
-            <a:endParaRPr lang="en-US" sz="1200" dirty="0"/>
+            <a:endParaRPr lang="en-US" sz="1600" dirty="0"/>
           </a:p>
         </p:txBody>
       </p:sp>
@@ -8755,8 +8447,8 @@
         </p:nvSpPr>
         <p:spPr>
           <a:xfrm>
-            <a:off x="621792" y="1938528"/>
-            <a:ext cx="3149498" cy="548640"/>
+            <a:off x="795528" y="2157984"/>
+            <a:ext cx="2960522" cy="384048"/>
           </a:xfrm>
           <a:prstGeom prst="rect">
             <a:avLst/>
@@ -8770,12 +8462,12 @@
           <a:p>
             <a:pPr indent="0" marL="0">
               <a:lnSpc>
-                <a:spcPct val="105000"/>
+                <a:spcPct val="102000"/>
               </a:lnSpc>
               <a:buNone/>
             </a:pPr>
             <a:r>
-              <a:rPr lang="en-US" sz="1350" dirty="0">
+              <a:rPr lang="en-US" sz="2000" dirty="0">
                 <a:solidFill>
                   <a:srgbClr val="1E2761"/>
                 </a:solidFill>
@@ -8785,7 +8477,7 @@
               </a:rPr>
               <a:t>Корма</a:t>
             </a:r>
-            <a:endParaRPr lang="en-US" sz="1350" dirty="0"/>
+            <a:endParaRPr lang="en-US" sz="2000" dirty="0"/>
           </a:p>
         </p:txBody>
       </p:sp>
@@ -8797,8 +8489,8 @@
         </p:nvSpPr>
         <p:spPr>
           <a:xfrm>
-            <a:off x="621792" y="2487168"/>
-            <a:ext cx="3149498" cy="704088"/>
+            <a:off x="795528" y="2615184"/>
+            <a:ext cx="2960522" cy="832104"/>
           </a:xfrm>
           <a:prstGeom prst="rect">
             <a:avLst/>
@@ -8812,12 +8504,12 @@
           <a:p>
             <a:pPr indent="0" marL="0">
               <a:lnSpc>
-                <a:spcPct val="112000"/>
+                <a:spcPct val="108000"/>
               </a:lnSpc>
               <a:buNone/>
             </a:pPr>
             <a:r>
-              <a:rPr lang="en-US" sz="1000" dirty="0">
+              <a:rPr lang="en-US" sz="1600" dirty="0">
                 <a:solidFill>
                   <a:srgbClr val="1B2140"/>
                 </a:solidFill>
@@ -8827,7 +8519,7 @@
               </a:rPr>
               <a:t>Отечественные рецептуры для осетровых и сиговых</a:t>
             </a:r>
-            <a:endParaRPr lang="en-US" sz="1000" dirty="0"/>
+            <a:endParaRPr lang="en-US" sz="1600" dirty="0"/>
           </a:p>
         </p:txBody>
       </p:sp>
@@ -8839,12 +8531,12 @@
         </p:nvSpPr>
         <p:spPr>
           <a:xfrm>
-            <a:off x="4283354" y="1371600"/>
-            <a:ext cx="3624986" cy="1965960"/>
+            <a:off x="4322978" y="1444752"/>
+            <a:ext cx="3545738" cy="2148840"/>
           </a:xfrm>
           <a:prstGeom prst="roundRect">
             <a:avLst>
-              <a:gd name="adj" fmla="val 3256"/>
+              <a:gd name="adj" fmla="val 3830"/>
             </a:avLst>
           </a:prstGeom>
           <a:solidFill>
@@ -8856,6 +8548,13 @@
             </a:solidFill>
             <a:prstDash val="solid"/>
           </a:ln>
+          <a:effectLst>
+            <a:outerShdw sx="100000" sy="100000" kx="0" ky="0" algn="bl" rotWithShape="0" blurRad="177800" dist="50800" dir="5400000">
+              <a:srgbClr val="7E88A8">
+                <a:alpha val="30000"/>
+              </a:srgbClr>
+            </a:outerShdw>
+          </a:effectLst>
         </p:spPr>
       </p:sp>
       <p:sp>
@@ -8866,8 +8565,8 @@
         </p:nvSpPr>
         <p:spPr>
           <a:xfrm>
-            <a:off x="4521098" y="1572768"/>
-            <a:ext cx="292608" cy="292608"/>
+            <a:off x="4615586" y="1682496"/>
+            <a:ext cx="384048" cy="384048"/>
           </a:xfrm>
           <a:prstGeom prst="ellipse">
             <a:avLst/>
@@ -8886,8 +8585,8 @@
         </p:nvSpPr>
         <p:spPr>
           <a:xfrm>
-            <a:off x="4521098" y="1572768"/>
-            <a:ext cx="292608" cy="292608"/>
+            <a:off x="4615586" y="1682496"/>
+            <a:ext cx="384048" cy="384048"/>
           </a:xfrm>
           <a:prstGeom prst="rect">
             <a:avLst/>
@@ -8903,7 +8602,7 @@
               <a:buNone/>
             </a:pPr>
             <a:r>
-              <a:rPr lang="en-US" sz="1200" dirty="0">
+              <a:rPr lang="en-US" sz="1600" dirty="0">
                 <a:solidFill>
                   <a:srgbClr val="FFFFFF"/>
                 </a:solidFill>
@@ -8913,7 +8612,7 @@
               </a:rPr>
               <a:t>2</a:t>
             </a:r>
-            <a:endParaRPr lang="en-US" sz="1200" dirty="0"/>
+            <a:endParaRPr lang="en-US" sz="1600" dirty="0"/>
           </a:p>
         </p:txBody>
       </p:sp>
@@ -8925,8 +8624,8 @@
         </p:nvSpPr>
         <p:spPr>
           <a:xfrm>
-            <a:off x="4521098" y="1938528"/>
-            <a:ext cx="3149498" cy="548640"/>
+            <a:off x="4615586" y="2157984"/>
+            <a:ext cx="2960522" cy="384048"/>
           </a:xfrm>
           <a:prstGeom prst="rect">
             <a:avLst/>
@@ -8940,12 +8639,12 @@
           <a:p>
             <a:pPr indent="0" marL="0">
               <a:lnSpc>
-                <a:spcPct val="105000"/>
+                <a:spcPct val="102000"/>
               </a:lnSpc>
               <a:buNone/>
             </a:pPr>
             <a:r>
-              <a:rPr lang="en-US" sz="1350" dirty="0">
+              <a:rPr lang="en-US" sz="2000" dirty="0">
                 <a:solidFill>
                   <a:srgbClr val="1E2761"/>
                 </a:solidFill>
@@ -8955,7 +8654,7 @@
               </a:rPr>
               <a:t>Маточные стада</a:t>
             </a:r>
-            <a:endParaRPr lang="en-US" sz="1350" dirty="0"/>
+            <a:endParaRPr lang="en-US" sz="2000" dirty="0"/>
           </a:p>
         </p:txBody>
       </p:sp>
@@ -8967,8 +8666,8 @@
         </p:nvSpPr>
         <p:spPr>
           <a:xfrm>
-            <a:off x="4521098" y="2487168"/>
-            <a:ext cx="3149498" cy="704088"/>
+            <a:off x="4615586" y="2615184"/>
+            <a:ext cx="2960522" cy="832104"/>
           </a:xfrm>
           <a:prstGeom prst="rect">
             <a:avLst/>
@@ -8982,12 +8681,12 @@
           <a:p>
             <a:pPr indent="0" marL="0">
               <a:lnSpc>
-                <a:spcPct val="112000"/>
+                <a:spcPct val="108000"/>
               </a:lnSpc>
               <a:buNone/>
             </a:pPr>
             <a:r>
-              <a:rPr lang="en-US" sz="1000" dirty="0">
+              <a:rPr lang="en-US" sz="1600" dirty="0">
                 <a:solidFill>
                   <a:srgbClr val="1B2140"/>
                 </a:solidFill>
@@ -8997,7 +8696,7 @@
               </a:rPr>
               <a:t>Криоконсервация и генетическая паспортизация</a:t>
             </a:r>
-            <a:endParaRPr lang="en-US" sz="1000" dirty="0"/>
+            <a:endParaRPr lang="en-US" sz="1600" dirty="0"/>
           </a:p>
         </p:txBody>
       </p:sp>
@@ -9009,12 +8708,12 @@
         </p:nvSpPr>
         <p:spPr>
           <a:xfrm>
-            <a:off x="8182661" y="1371600"/>
-            <a:ext cx="3624986" cy="1965960"/>
+            <a:off x="8143037" y="1444752"/>
+            <a:ext cx="3545738" cy="2148840"/>
           </a:xfrm>
           <a:prstGeom prst="roundRect">
             <a:avLst>
-              <a:gd name="adj" fmla="val 3256"/>
+              <a:gd name="adj" fmla="val 3830"/>
             </a:avLst>
           </a:prstGeom>
           <a:solidFill>
@@ -9026,6 +8725,13 @@
             </a:solidFill>
             <a:prstDash val="solid"/>
           </a:ln>
+          <a:effectLst>
+            <a:outerShdw sx="100000" sy="100000" kx="0" ky="0" algn="bl" rotWithShape="0" blurRad="177800" dist="50800" dir="5400000">
+              <a:srgbClr val="7E88A8">
+                <a:alpha val="30000"/>
+              </a:srgbClr>
+            </a:outerShdw>
+          </a:effectLst>
         </p:spPr>
       </p:sp>
       <p:sp>
@@ -9036,8 +8742,8 @@
         </p:nvSpPr>
         <p:spPr>
           <a:xfrm>
-            <a:off x="8420405" y="1572768"/>
-            <a:ext cx="292608" cy="292608"/>
+            <a:off x="8435645" y="1682496"/>
+            <a:ext cx="384048" cy="384048"/>
           </a:xfrm>
           <a:prstGeom prst="ellipse">
             <a:avLst/>
@@ -9056,8 +8762,8 @@
         </p:nvSpPr>
         <p:spPr>
           <a:xfrm>
-            <a:off x="8420405" y="1572768"/>
-            <a:ext cx="292608" cy="292608"/>
+            <a:off x="8435645" y="1682496"/>
+            <a:ext cx="384048" cy="384048"/>
           </a:xfrm>
           <a:prstGeom prst="rect">
             <a:avLst/>
@@ -9073,7 +8779,7 @@
               <a:buNone/>
             </a:pPr>
             <a:r>
-              <a:rPr lang="en-US" sz="1200" dirty="0">
+              <a:rPr lang="en-US" sz="1600" dirty="0">
                 <a:solidFill>
                   <a:srgbClr val="FFFFFF"/>
                 </a:solidFill>
@@ -9083,7 +8789,7 @@
               </a:rPr>
               <a:t>3</a:t>
             </a:r>
-            <a:endParaRPr lang="en-US" sz="1200" dirty="0"/>
+            <a:endParaRPr lang="en-US" sz="1600" dirty="0"/>
           </a:p>
         </p:txBody>
       </p:sp>
@@ -9095,8 +8801,8 @@
         </p:nvSpPr>
         <p:spPr>
           <a:xfrm>
-            <a:off x="8420405" y="1938528"/>
-            <a:ext cx="3149498" cy="548640"/>
+            <a:off x="8435645" y="2157984"/>
+            <a:ext cx="2960522" cy="384048"/>
           </a:xfrm>
           <a:prstGeom prst="rect">
             <a:avLst/>
@@ -9110,12 +8816,12 @@
           <a:p>
             <a:pPr indent="0" marL="0">
               <a:lnSpc>
-                <a:spcPct val="105000"/>
+                <a:spcPct val="102000"/>
               </a:lnSpc>
               <a:buNone/>
             </a:pPr>
             <a:r>
-              <a:rPr lang="en-US" sz="1350" dirty="0">
+              <a:rPr lang="en-US" sz="2000" dirty="0">
                 <a:solidFill>
                   <a:srgbClr val="1E2761"/>
                 </a:solidFill>
@@ -9123,9 +8829,9 @@
                 <a:ea typeface="Segoe UI Semibold" pitchFamily="34" charset="-122"/>
                 <a:cs typeface="Segoe UI Semibold" pitchFamily="34" charset="-120"/>
               </a:rPr>
-              <a:t>Подращивание молоди</a:t>
-            </a:r>
-            <a:endParaRPr lang="en-US" sz="1350" dirty="0"/>
+              <a:t>Подращивание</a:t>
+            </a:r>
+            <a:endParaRPr lang="en-US" sz="2000" dirty="0"/>
           </a:p>
         </p:txBody>
       </p:sp>
@@ -9137,8 +8843,8 @@
         </p:nvSpPr>
         <p:spPr>
           <a:xfrm>
-            <a:off x="8420405" y="2487168"/>
-            <a:ext cx="3149498" cy="704088"/>
+            <a:off x="8435645" y="2615184"/>
+            <a:ext cx="2960522" cy="832104"/>
           </a:xfrm>
           <a:prstGeom prst="rect">
             <a:avLst/>
@@ -9152,12 +8858,12 @@
           <a:p>
             <a:pPr indent="0" marL="0">
               <a:lnSpc>
-                <a:spcPct val="112000"/>
+                <a:spcPct val="108000"/>
               </a:lnSpc>
               <a:buNone/>
             </a:pPr>
             <a:r>
-              <a:rPr lang="en-US" sz="1000" dirty="0">
+              <a:rPr lang="en-US" sz="1600" dirty="0">
                 <a:solidFill>
                   <a:srgbClr val="1B2140"/>
                 </a:solidFill>
@@ -9167,7 +8873,7 @@
               </a:rPr>
               <a:t>Высокие навески — рост зачётности выпусков</a:t>
             </a:r>
-            <a:endParaRPr lang="en-US" sz="1000" dirty="0"/>
+            <a:endParaRPr lang="en-US" sz="1600" dirty="0"/>
           </a:p>
         </p:txBody>
       </p:sp>
@@ -9179,12 +8885,189 @@
         </p:nvSpPr>
         <p:spPr>
           <a:xfrm>
-            <a:off x="384048" y="3575304"/>
-            <a:ext cx="3624986" cy="1965960"/>
+            <a:off x="502920" y="3867912"/>
+            <a:ext cx="3545738" cy="2148840"/>
           </a:xfrm>
           <a:prstGeom prst="roundRect">
             <a:avLst>
-              <a:gd name="adj" fmla="val 3256"/>
+              <a:gd name="adj" fmla="val 3830"/>
+            </a:avLst>
+          </a:prstGeom>
+          <a:solidFill>
+            <a:srgbClr val="FFFFFF"/>
+          </a:solidFill>
+          <a:ln w="22225">
+            <a:solidFill>
+              <a:srgbClr val="C9A24B"/>
+            </a:solidFill>
+            <a:prstDash val="solid"/>
+          </a:ln>
+          <a:effectLst>
+            <a:outerShdw sx="100000" sy="100000" kx="0" ky="0" algn="bl" rotWithShape="0" blurRad="177800" dist="50800" dir="5400000">
+              <a:srgbClr val="7E88A8">
+                <a:alpha val="30000"/>
+              </a:srgbClr>
+            </a:outerShdw>
+          </a:effectLst>
+        </p:spPr>
+      </p:sp>
+      <p:sp>
+        <p:nvSpPr>
+          <p:cNvPr id="21" name="Shape 19"/>
+          <p:cNvSpPr/>
+          <p:nvPr/>
+        </p:nvSpPr>
+        <p:spPr>
+          <a:xfrm>
+            <a:off x="795528" y="4105656"/>
+            <a:ext cx="384048" cy="384048"/>
+          </a:xfrm>
+          <a:prstGeom prst="ellipse">
+            <a:avLst/>
+          </a:prstGeom>
+          <a:solidFill>
+            <a:srgbClr val="C9A24B"/>
+          </a:solidFill>
+          <a:ln/>
+        </p:spPr>
+      </p:sp>
+      <p:sp>
+        <p:nvSpPr>
+          <p:cNvPr id="22" name="Text 20"/>
+          <p:cNvSpPr txBox="1"/>
+          <p:nvPr/>
+        </p:nvSpPr>
+        <p:spPr>
+          <a:xfrm>
+            <a:off x="795528" y="4105656"/>
+            <a:ext cx="384048" cy="384048"/>
+          </a:xfrm>
+          <a:prstGeom prst="rect">
+            <a:avLst/>
+          </a:prstGeom>
+          <a:noFill/>
+          <a:ln/>
+        </p:spPr>
+        <p:txBody>
+          <a:bodyPr wrap="square" lIns="0" tIns="0" rIns="0" bIns="0" rtlCol="0" anchor="ctr"/>
+          <a:lstStyle/>
+          <a:p>
+            <a:pPr algn="ctr" indent="0" marL="0">
+              <a:buNone/>
+            </a:pPr>
+            <a:r>
+              <a:rPr lang="en-US" sz="1600" dirty="0">
+                <a:solidFill>
+                  <a:srgbClr val="FFFFFF"/>
+                </a:solidFill>
+                <a:latin typeface="Segoe UI Semibold" pitchFamily="34" charset="0"/>
+                <a:ea typeface="Segoe UI Semibold" pitchFamily="34" charset="-122"/>
+                <a:cs typeface="Segoe UI Semibold" pitchFamily="34" charset="-120"/>
+              </a:rPr>
+              <a:t>4</a:t>
+            </a:r>
+            <a:endParaRPr lang="en-US" sz="1600" dirty="0"/>
+          </a:p>
+        </p:txBody>
+      </p:sp>
+      <p:sp>
+        <p:nvSpPr>
+          <p:cNvPr id="23" name="Text 21"/>
+          <p:cNvSpPr txBox="1"/>
+          <p:nvPr/>
+        </p:nvSpPr>
+        <p:spPr>
+          <a:xfrm>
+            <a:off x="795528" y="4581144"/>
+            <a:ext cx="2960522" cy="384048"/>
+          </a:xfrm>
+          <a:prstGeom prst="rect">
+            <a:avLst/>
+          </a:prstGeom>
+          <a:noFill/>
+          <a:ln/>
+        </p:spPr>
+        <p:txBody>
+          <a:bodyPr wrap="square" lIns="0" tIns="0" rIns="0" bIns="0" rtlCol="0" anchor="t"/>
+          <a:lstStyle/>
+          <a:p>
+            <a:pPr indent="0" marL="0">
+              <a:lnSpc>
+                <a:spcPct val="102000"/>
+              </a:lnSpc>
+              <a:buNone/>
+            </a:pPr>
+            <a:r>
+              <a:rPr lang="en-US" sz="2000" dirty="0">
+                <a:solidFill>
+                  <a:srgbClr val="1E2761"/>
+                </a:solidFill>
+                <a:latin typeface="Segoe UI Semibold" pitchFamily="34" charset="0"/>
+                <a:ea typeface="Segoe UI Semibold" pitchFamily="34" charset="-122"/>
+                <a:cs typeface="Segoe UI Semibold" pitchFamily="34" charset="-120"/>
+              </a:rPr>
+              <a:t>Инкубация</a:t>
+            </a:r>
+            <a:endParaRPr lang="en-US" sz="2000" dirty="0"/>
+          </a:p>
+        </p:txBody>
+      </p:sp>
+      <p:sp>
+        <p:nvSpPr>
+          <p:cNvPr id="24" name="Text 22"/>
+          <p:cNvSpPr txBox="1"/>
+          <p:nvPr/>
+        </p:nvSpPr>
+        <p:spPr>
+          <a:xfrm>
+            <a:off x="795528" y="5038344"/>
+            <a:ext cx="2960522" cy="832104"/>
+          </a:xfrm>
+          <a:prstGeom prst="rect">
+            <a:avLst/>
+          </a:prstGeom>
+          <a:noFill/>
+          <a:ln/>
+        </p:spPr>
+        <p:txBody>
+          <a:bodyPr wrap="square" lIns="0" tIns="0" rIns="0" bIns="0" rtlCol="0" anchor="t"/>
+          <a:lstStyle/>
+          <a:p>
+            <a:pPr indent="0" marL="0">
+              <a:lnSpc>
+                <a:spcPct val="108000"/>
+              </a:lnSpc>
+              <a:buNone/>
+            </a:pPr>
+            <a:r>
+              <a:rPr lang="en-US" sz="1600" dirty="0">
+                <a:solidFill>
+                  <a:srgbClr val="1B2140"/>
+                </a:solidFill>
+                <a:latin typeface="Segoe UI" pitchFamily="34" charset="0"/>
+                <a:ea typeface="Segoe UI" pitchFamily="34" charset="-122"/>
+                <a:cs typeface="Segoe UI" pitchFamily="34" charset="-120"/>
+              </a:rPr>
+              <a:t>Машинное зрение: счёт икры, контроль среды</a:t>
+            </a:r>
+            <a:endParaRPr lang="en-US" sz="1600" dirty="0"/>
+          </a:p>
+        </p:txBody>
+      </p:sp>
+      <p:sp>
+        <p:nvSpPr>
+          <p:cNvPr id="25" name="Shape 23"/>
+          <p:cNvSpPr/>
+          <p:nvPr/>
+        </p:nvSpPr>
+        <p:spPr>
+          <a:xfrm>
+            <a:off x="4322978" y="3867912"/>
+            <a:ext cx="3545738" cy="2148840"/>
+          </a:xfrm>
+          <a:prstGeom prst="roundRect">
+            <a:avLst>
+              <a:gd name="adj" fmla="val 3830"/>
             </a:avLst>
           </a:prstGeom>
           <a:solidFill>
@@ -9196,18 +9079,25 @@
             </a:solidFill>
             <a:prstDash val="solid"/>
           </a:ln>
-        </p:spPr>
-      </p:sp>
-      <p:sp>
-        <p:nvSpPr>
-          <p:cNvPr id="21" name="Shape 19"/>
+          <a:effectLst>
+            <a:outerShdw sx="100000" sy="100000" kx="0" ky="0" algn="bl" rotWithShape="0" blurRad="177800" dist="50800" dir="5400000">
+              <a:srgbClr val="7E88A8">
+                <a:alpha val="30000"/>
+              </a:srgbClr>
+            </a:outerShdw>
+          </a:effectLst>
+        </p:spPr>
+      </p:sp>
+      <p:sp>
+        <p:nvSpPr>
+          <p:cNvPr id="26" name="Shape 24"/>
           <p:cNvSpPr/>
           <p:nvPr/>
         </p:nvSpPr>
         <p:spPr>
           <a:xfrm>
-            <a:off x="621792" y="3776472"/>
-            <a:ext cx="292608" cy="292608"/>
+            <a:off x="4615586" y="4105656"/>
+            <a:ext cx="384048" cy="384048"/>
           </a:xfrm>
           <a:prstGeom prst="ellipse">
             <a:avLst/>
@@ -9220,14 +9110,14 @@
       </p:sp>
       <p:sp>
         <p:nvSpPr>
-          <p:cNvPr id="22" name="Text 20"/>
-          <p:cNvSpPr txBox="1"/>
-          <p:nvPr/>
-        </p:nvSpPr>
-        <p:spPr>
-          <a:xfrm>
-            <a:off x="621792" y="3776472"/>
-            <a:ext cx="292608" cy="292608"/>
+          <p:cNvPr id="27" name="Text 25"/>
+          <p:cNvSpPr txBox="1"/>
+          <p:nvPr/>
+        </p:nvSpPr>
+        <p:spPr>
+          <a:xfrm>
+            <a:off x="4615586" y="4105656"/>
+            <a:ext cx="384048" cy="384048"/>
           </a:xfrm>
           <a:prstGeom prst="rect">
             <a:avLst/>
@@ -9243,7 +9133,7 @@
               <a:buNone/>
             </a:pPr>
             <a:r>
-              <a:rPr lang="en-US" sz="1200" dirty="0">
+              <a:rPr lang="en-US" sz="1600" dirty="0">
                 <a:solidFill>
                   <a:srgbClr val="FFFFFF"/>
                 </a:solidFill>
@@ -9251,22 +9141,22 @@
                 <a:ea typeface="Segoe UI Semibold" pitchFamily="34" charset="-122"/>
                 <a:cs typeface="Segoe UI Semibold" pitchFamily="34" charset="-120"/>
               </a:rPr>
-              <a:t>4</a:t>
-            </a:r>
-            <a:endParaRPr lang="en-US" sz="1200" dirty="0"/>
-          </a:p>
-        </p:txBody>
-      </p:sp>
-      <p:sp>
-        <p:nvSpPr>
-          <p:cNvPr id="23" name="Text 21"/>
-          <p:cNvSpPr txBox="1"/>
-          <p:nvPr/>
-        </p:nvSpPr>
-        <p:spPr>
-          <a:xfrm>
-            <a:off x="621792" y="4142232"/>
-            <a:ext cx="3149498" cy="548640"/>
+              <a:t>5</a:t>
+            </a:r>
+            <a:endParaRPr lang="en-US" sz="1600" dirty="0"/>
+          </a:p>
+        </p:txBody>
+      </p:sp>
+      <p:sp>
+        <p:nvSpPr>
+          <p:cNvPr id="28" name="Text 26"/>
+          <p:cNvSpPr txBox="1"/>
+          <p:nvPr/>
+        </p:nvSpPr>
+        <p:spPr>
+          <a:xfrm>
+            <a:off x="4615586" y="4581144"/>
+            <a:ext cx="2960522" cy="384048"/>
           </a:xfrm>
           <a:prstGeom prst="rect">
             <a:avLst/>
@@ -9280,12 +9170,12 @@
           <a:p>
             <a:pPr indent="0" marL="0">
               <a:lnSpc>
-                <a:spcPct val="105000"/>
+                <a:spcPct val="102000"/>
               </a:lnSpc>
               <a:buNone/>
             </a:pPr>
             <a:r>
-              <a:rPr lang="en-US" sz="1350" dirty="0">
+              <a:rPr lang="en-US" sz="2000" dirty="0">
                 <a:solidFill>
                   <a:srgbClr val="1E2761"/>
                 </a:solidFill>
@@ -9293,22 +9183,22 @@
                 <a:ea typeface="Segoe UI Semibold" pitchFamily="34" charset="-122"/>
                 <a:cs typeface="Segoe UI Semibold" pitchFamily="34" charset="-120"/>
               </a:rPr>
-              <a:t>Мониторинг инкубации</a:t>
-            </a:r>
-            <a:endParaRPr lang="en-US" sz="1350" dirty="0"/>
-          </a:p>
-        </p:txBody>
-      </p:sp>
-      <p:sp>
-        <p:nvSpPr>
-          <p:cNvPr id="24" name="Text 22"/>
-          <p:cNvSpPr txBox="1"/>
-          <p:nvPr/>
-        </p:nvSpPr>
-        <p:spPr>
-          <a:xfrm>
-            <a:off x="621792" y="4690872"/>
-            <a:ext cx="3149498" cy="704088"/>
+              <a:t>Ихтиопатология</a:t>
+            </a:r>
+            <a:endParaRPr lang="en-US" sz="2000" dirty="0"/>
+          </a:p>
+        </p:txBody>
+      </p:sp>
+      <p:sp>
+        <p:nvSpPr>
+          <p:cNvPr id="29" name="Text 27"/>
+          <p:cNvSpPr txBox="1"/>
+          <p:nvPr/>
+        </p:nvSpPr>
+        <p:spPr>
+          <a:xfrm>
+            <a:off x="4615586" y="5038344"/>
+            <a:ext cx="2960522" cy="832104"/>
           </a:xfrm>
           <a:prstGeom prst="rect">
             <a:avLst/>
@@ -9322,12 +9212,12 @@
           <a:p>
             <a:pPr indent="0" marL="0">
               <a:lnSpc>
-                <a:spcPct val="112000"/>
+                <a:spcPct val="108000"/>
               </a:lnSpc>
               <a:buNone/>
             </a:pPr>
             <a:r>
-              <a:rPr lang="en-US" sz="1000" dirty="0">
+              <a:rPr lang="en-US" sz="1600" dirty="0">
                 <a:solidFill>
                   <a:srgbClr val="1B2140"/>
                 </a:solidFill>
@@ -9335,26 +9225,26 @@
                 <a:ea typeface="Segoe UI" pitchFamily="34" charset="-122"/>
                 <a:cs typeface="Segoe UI" pitchFamily="34" charset="-120"/>
               </a:rPr>
-              <a:t>Машинное зрение: счёт икры, контроль среды</a:t>
-            </a:r>
-            <a:endParaRPr lang="en-US" sz="1000" dirty="0"/>
-          </a:p>
-        </p:txBody>
-      </p:sp>
-      <p:sp>
-        <p:nvSpPr>
-          <p:cNvPr id="25" name="Shape 23"/>
+              <a:t>Диагностика, вакцины и пробиотики в УЗВ</a:t>
+            </a:r>
+            <a:endParaRPr lang="en-US" sz="1600" dirty="0"/>
+          </a:p>
+        </p:txBody>
+      </p:sp>
+      <p:sp>
+        <p:nvSpPr>
+          <p:cNvPr id="30" name="Shape 28"/>
           <p:cNvSpPr/>
           <p:nvPr/>
         </p:nvSpPr>
         <p:spPr>
           <a:xfrm>
-            <a:off x="4283354" y="3575304"/>
-            <a:ext cx="3624986" cy="1965960"/>
+            <a:off x="8143037" y="3867912"/>
+            <a:ext cx="3545738" cy="2148840"/>
           </a:xfrm>
           <a:prstGeom prst="roundRect">
             <a:avLst>
-              <a:gd name="adj" fmla="val 3256"/>
+              <a:gd name="adj" fmla="val 3830"/>
             </a:avLst>
           </a:prstGeom>
           <a:solidFill>
@@ -9366,18 +9256,25 @@
             </a:solidFill>
             <a:prstDash val="solid"/>
           </a:ln>
-        </p:spPr>
-      </p:sp>
-      <p:sp>
-        <p:nvSpPr>
-          <p:cNvPr id="26" name="Shape 24"/>
+          <a:effectLst>
+            <a:outerShdw sx="100000" sy="100000" kx="0" ky="0" algn="bl" rotWithShape="0" blurRad="177800" dist="50800" dir="5400000">
+              <a:srgbClr val="7E88A8">
+                <a:alpha val="30000"/>
+              </a:srgbClr>
+            </a:outerShdw>
+          </a:effectLst>
+        </p:spPr>
+      </p:sp>
+      <p:sp>
+        <p:nvSpPr>
+          <p:cNvPr id="31" name="Shape 29"/>
           <p:cNvSpPr/>
           <p:nvPr/>
         </p:nvSpPr>
         <p:spPr>
           <a:xfrm>
-            <a:off x="4521098" y="3776472"/>
-            <a:ext cx="292608" cy="292608"/>
+            <a:off x="8435645" y="4105656"/>
+            <a:ext cx="384048" cy="384048"/>
           </a:xfrm>
           <a:prstGeom prst="ellipse">
             <a:avLst/>
@@ -9390,14 +9287,14 @@
       </p:sp>
       <p:sp>
         <p:nvSpPr>
-          <p:cNvPr id="27" name="Text 25"/>
-          <p:cNvSpPr txBox="1"/>
-          <p:nvPr/>
-        </p:nvSpPr>
-        <p:spPr>
-          <a:xfrm>
-            <a:off x="4521098" y="3776472"/>
-            <a:ext cx="292608" cy="292608"/>
+          <p:cNvPr id="32" name="Text 30"/>
+          <p:cNvSpPr txBox="1"/>
+          <p:nvPr/>
+        </p:nvSpPr>
+        <p:spPr>
+          <a:xfrm>
+            <a:off x="8435645" y="4105656"/>
+            <a:ext cx="384048" cy="384048"/>
           </a:xfrm>
           <a:prstGeom prst="rect">
             <a:avLst/>
@@ -9413,7 +9310,7 @@
               <a:buNone/>
             </a:pPr>
             <a:r>
-              <a:rPr lang="en-US" sz="1200" dirty="0">
+              <a:rPr lang="en-US" sz="1600" dirty="0">
                 <a:solidFill>
                   <a:srgbClr val="FFFFFF"/>
                 </a:solidFill>
@@ -9421,22 +9318,22 @@
                 <a:ea typeface="Segoe UI Semibold" pitchFamily="34" charset="-122"/>
                 <a:cs typeface="Segoe UI Semibold" pitchFamily="34" charset="-120"/>
               </a:rPr>
-              <a:t>5</a:t>
-            </a:r>
-            <a:endParaRPr lang="en-US" sz="1200" dirty="0"/>
-          </a:p>
-        </p:txBody>
-      </p:sp>
-      <p:sp>
-        <p:nvSpPr>
-          <p:cNvPr id="28" name="Text 26"/>
-          <p:cNvSpPr txBox="1"/>
-          <p:nvPr/>
-        </p:nvSpPr>
-        <p:spPr>
-          <a:xfrm>
-            <a:off x="4521098" y="4142232"/>
-            <a:ext cx="3149498" cy="548640"/>
+              <a:t>6</a:t>
+            </a:r>
+            <a:endParaRPr lang="en-US" sz="1600" dirty="0"/>
+          </a:p>
+        </p:txBody>
+      </p:sp>
+      <p:sp>
+        <p:nvSpPr>
+          <p:cNvPr id="33" name="Text 31"/>
+          <p:cNvSpPr txBox="1"/>
+          <p:nvPr/>
+        </p:nvSpPr>
+        <p:spPr>
+          <a:xfrm>
+            <a:off x="8435645" y="4581144"/>
+            <a:ext cx="2960522" cy="384048"/>
           </a:xfrm>
           <a:prstGeom prst="rect">
             <a:avLst/>
@@ -9450,12 +9347,12 @@
           <a:p>
             <a:pPr indent="0" marL="0">
               <a:lnSpc>
-                <a:spcPct val="105000"/>
+                <a:spcPct val="102000"/>
               </a:lnSpc>
               <a:buNone/>
             </a:pPr>
             <a:r>
-              <a:rPr lang="en-US" sz="1350" dirty="0">
+              <a:rPr lang="en-US" sz="2000" dirty="0">
                 <a:solidFill>
                   <a:srgbClr val="1E2761"/>
                 </a:solidFill>
@@ -9463,22 +9360,22 @@
                 <a:ea typeface="Segoe UI Semibold" pitchFamily="34" charset="-122"/>
                 <a:cs typeface="Segoe UI Semibold" pitchFamily="34" charset="-120"/>
               </a:rPr>
-              <a:t>Ихтиопатология в УЗВ</a:t>
-            </a:r>
-            <a:endParaRPr lang="en-US" sz="1350" dirty="0"/>
-          </a:p>
-        </p:txBody>
-      </p:sp>
-      <p:sp>
-        <p:nvSpPr>
-          <p:cNvPr id="29" name="Text 27"/>
-          <p:cNvSpPr txBox="1"/>
-          <p:nvPr/>
-        </p:nvSpPr>
-        <p:spPr>
-          <a:xfrm>
-            <a:off x="4521098" y="4690872"/>
-            <a:ext cx="3149498" cy="704088"/>
+              <a:t>УЗВ для Арктики</a:t>
+            </a:r>
+            <a:endParaRPr lang="en-US" sz="2000" dirty="0"/>
+          </a:p>
+        </p:txBody>
+      </p:sp>
+      <p:sp>
+        <p:nvSpPr>
+          <p:cNvPr id="34" name="Text 32"/>
+          <p:cNvSpPr txBox="1"/>
+          <p:nvPr/>
+        </p:nvSpPr>
+        <p:spPr>
+          <a:xfrm>
+            <a:off x="8435645" y="5038344"/>
+            <a:ext cx="2960522" cy="832104"/>
           </a:xfrm>
           <a:prstGeom prst="rect">
             <a:avLst/>
@@ -9492,12 +9389,12 @@
           <a:p>
             <a:pPr indent="0" marL="0">
               <a:lnSpc>
-                <a:spcPct val="112000"/>
+                <a:spcPct val="108000"/>
               </a:lnSpc>
               <a:buNone/>
             </a:pPr>
             <a:r>
-              <a:rPr lang="en-US" sz="1000" dirty="0">
+              <a:rPr lang="en-US" sz="1600" dirty="0">
                 <a:solidFill>
                   <a:srgbClr val="1B2140"/>
                 </a:solidFill>
@@ -9505,69 +9402,22 @@
                 <a:ea typeface="Segoe UI" pitchFamily="34" charset="-122"/>
                 <a:cs typeface="Segoe UI" pitchFamily="34" charset="-120"/>
               </a:rPr>
-              <a:t>Диагностика, вакцины, пробиотики</a:t>
-            </a:r>
-            <a:endParaRPr lang="en-US" sz="1000" dirty="0"/>
-          </a:p>
-        </p:txBody>
-      </p:sp>
-      <p:sp>
-        <p:nvSpPr>
-          <p:cNvPr id="30" name="Shape 28"/>
-          <p:cNvSpPr/>
-          <p:nvPr/>
-        </p:nvSpPr>
-        <p:spPr>
-          <a:xfrm>
-            <a:off x="8182661" y="3575304"/>
-            <a:ext cx="3624986" cy="1965960"/>
-          </a:xfrm>
-          <a:prstGeom prst="roundRect">
-            <a:avLst>
-              <a:gd name="adj" fmla="val 3256"/>
-            </a:avLst>
-          </a:prstGeom>
-          <a:solidFill>
-            <a:srgbClr val="FFFFFF"/>
-          </a:solidFill>
-          <a:ln w="12700">
-            <a:solidFill>
-              <a:srgbClr val="C9D3EA"/>
-            </a:solidFill>
-            <a:prstDash val="solid"/>
-          </a:ln>
-        </p:spPr>
-      </p:sp>
-      <p:sp>
-        <p:nvSpPr>
-          <p:cNvPr id="31" name="Shape 29"/>
-          <p:cNvSpPr/>
-          <p:nvPr/>
-        </p:nvSpPr>
-        <p:spPr>
-          <a:xfrm>
-            <a:off x="8420405" y="3776472"/>
-            <a:ext cx="292608" cy="292608"/>
-          </a:xfrm>
-          <a:prstGeom prst="ellipse">
-            <a:avLst/>
-          </a:prstGeom>
-          <a:solidFill>
-            <a:srgbClr val="1E2761"/>
-          </a:solidFill>
-          <a:ln/>
-        </p:spPr>
-      </p:sp>
-      <p:sp>
-        <p:nvSpPr>
-          <p:cNvPr id="32" name="Text 30"/>
-          <p:cNvSpPr txBox="1"/>
-          <p:nvPr/>
-        </p:nvSpPr>
-        <p:spPr>
-          <a:xfrm>
-            <a:off x="8420405" y="3776472"/>
-            <a:ext cx="292608" cy="292608"/>
+              <a:t>Энергоэффективные решения для холодного климата</a:t>
+            </a:r>
+            <a:endParaRPr lang="en-US" sz="1600" dirty="0"/>
+          </a:p>
+        </p:txBody>
+      </p:sp>
+      <p:sp>
+        <p:nvSpPr>
+          <p:cNvPr id="35" name="Text 33"/>
+          <p:cNvSpPr txBox="1"/>
+          <p:nvPr/>
+        </p:nvSpPr>
+        <p:spPr>
+          <a:xfrm>
+            <a:off x="502920" y="6053328"/>
+            <a:ext cx="11185855" cy="329184"/>
           </a:xfrm>
           <a:prstGeom prst="rect">
             <a:avLst/>
@@ -9579,118 +9429,34 @@
           <a:bodyPr wrap="square" lIns="0" tIns="0" rIns="0" bIns="0" rtlCol="0" anchor="ctr"/>
           <a:lstStyle/>
           <a:p>
-            <a:pPr algn="ctr" indent="0" marL="0">
-              <a:buNone/>
-            </a:pPr>
-            <a:r>
-              <a:rPr lang="en-US" sz="1200" dirty="0">
-                <a:solidFill>
-                  <a:srgbClr val="FFFFFF"/>
-                </a:solidFill>
-                <a:latin typeface="Segoe UI Semibold" pitchFamily="34" charset="0"/>
-                <a:ea typeface="Segoe UI Semibold" pitchFamily="34" charset="-122"/>
-                <a:cs typeface="Segoe UI Semibold" pitchFamily="34" charset="-120"/>
-              </a:rPr>
-              <a:t>6</a:t>
-            </a:r>
-            <a:endParaRPr lang="en-US" sz="1200" dirty="0"/>
-          </a:p>
-        </p:txBody>
-      </p:sp>
-      <p:sp>
-        <p:nvSpPr>
-          <p:cNvPr id="33" name="Text 31"/>
-          <p:cNvSpPr txBox="1"/>
-          <p:nvPr/>
-        </p:nvSpPr>
-        <p:spPr>
-          <a:xfrm>
-            <a:off x="8420405" y="4142232"/>
-            <a:ext cx="3149498" cy="548640"/>
-          </a:xfrm>
-          <a:prstGeom prst="rect">
-            <a:avLst/>
-          </a:prstGeom>
-          <a:noFill/>
-          <a:ln/>
-        </p:spPr>
-        <p:txBody>
-          <a:bodyPr wrap="square" lIns="0" tIns="0" rIns="0" bIns="0" rtlCol="0" anchor="t"/>
-          <a:lstStyle/>
-          <a:p>
-            <a:pPr indent="0" marL="0">
-              <a:lnSpc>
-                <a:spcPct val="105000"/>
-              </a:lnSpc>
-              <a:buNone/>
-            </a:pPr>
-            <a:r>
-              <a:rPr lang="en-US" sz="1350" dirty="0">
-                <a:solidFill>
-                  <a:srgbClr val="1E2761"/>
-                </a:solidFill>
-                <a:latin typeface="Segoe UI Semibold" pitchFamily="34" charset="0"/>
-                <a:ea typeface="Segoe UI Semibold" pitchFamily="34" charset="-122"/>
-                <a:cs typeface="Segoe UI Semibold" pitchFamily="34" charset="-120"/>
-              </a:rPr>
-              <a:t>УЗВ для Арктики</a:t>
-            </a:r>
-            <a:endParaRPr lang="en-US" sz="1350" dirty="0"/>
-          </a:p>
-        </p:txBody>
-      </p:sp>
-      <p:sp>
-        <p:nvSpPr>
-          <p:cNvPr id="34" name="Text 32"/>
-          <p:cNvSpPr txBox="1"/>
-          <p:nvPr/>
-        </p:nvSpPr>
-        <p:spPr>
-          <a:xfrm>
-            <a:off x="8420405" y="4690872"/>
-            <a:ext cx="3149498" cy="704088"/>
-          </a:xfrm>
-          <a:prstGeom prst="rect">
-            <a:avLst/>
-          </a:prstGeom>
-          <a:noFill/>
-          <a:ln/>
-        </p:spPr>
-        <p:txBody>
-          <a:bodyPr wrap="square" lIns="0" tIns="0" rIns="0" bIns="0" rtlCol="0" anchor="t"/>
-          <a:lstStyle/>
-          <a:p>
-            <a:pPr indent="0" marL="0">
-              <a:lnSpc>
-                <a:spcPct val="112000"/>
-              </a:lnSpc>
-              <a:buNone/>
-            </a:pPr>
-            <a:r>
-              <a:rPr lang="en-US" sz="1000" dirty="0">
-                <a:solidFill>
-                  <a:srgbClr val="1B2140"/>
+            <a:pPr indent="0" marL="0">
+              <a:buNone/>
+            </a:pPr>
+            <a:r>
+              <a:rPr lang="en-US" sz="1600" i="1" dirty="0">
+                <a:solidFill>
+                  <a:srgbClr val="6B7699"/>
                 </a:solidFill>
                 <a:latin typeface="Segoe UI" pitchFamily="34" charset="0"/>
                 <a:ea typeface="Segoe UI" pitchFamily="34" charset="-122"/>
                 <a:cs typeface="Segoe UI" pitchFamily="34" charset="-120"/>
               </a:rPr>
-              <a:t>Энергоэффективные решения для холодного климата</a:t>
-            </a:r>
-            <a:endParaRPr lang="en-US" sz="1000" dirty="0"/>
-          </a:p>
-        </p:txBody>
-      </p:sp>
-      <p:sp>
-        <p:nvSpPr>
-          <p:cNvPr id="35" name="Text 33"/>
-          <p:cNvSpPr txBox="1"/>
-          <p:nvPr/>
-        </p:nvSpPr>
-        <p:spPr>
-          <a:xfrm>
-            <a:off x="384048" y="5806440"/>
-            <a:ext cx="11423599" cy="274320"/>
+              <a:t>Направления — примеры по открытым источникам. Точный список даёт диагностика задачи.</a:t>
+            </a:r>
+            <a:endParaRPr lang="en-US" sz="1600" dirty="0"/>
+          </a:p>
+        </p:txBody>
+      </p:sp>
+      <p:sp>
+        <p:nvSpPr>
+          <p:cNvPr id="36" name="Text 34"/>
+          <p:cNvSpPr txBox="1"/>
+          <p:nvPr/>
+        </p:nvSpPr>
+        <p:spPr>
+          <a:xfrm>
+            <a:off x="502920" y="6473952"/>
+            <a:ext cx="1828800" cy="274320"/>
           </a:xfrm>
           <a:prstGeom prst="rect">
             <a:avLst/>
@@ -9706,7 +9472,7 @@
               <a:buNone/>
             </a:pPr>
             <a:r>
-              <a:rPr lang="en-US" sz="1050" i="1" dirty="0">
+              <a:rPr lang="en-US" sz="1200" dirty="0">
                 <a:solidFill>
                   <a:srgbClr val="6B7699"/>
                 </a:solidFill>
@@ -9714,31 +9480,11 @@
                 <a:ea typeface="Segoe UI" pitchFamily="34" charset="-122"/>
                 <a:cs typeface="Segoe UI" pitchFamily="34" charset="-120"/>
               </a:rPr>
-              <a:t>Направления — примеры по открытым источникам. Точный список даёт диагностика задачи.</a:t>
-            </a:r>
-            <a:endParaRPr lang="en-US" sz="1050" dirty="0"/>
-          </a:p>
-        </p:txBody>
-      </p:sp>
-      <p:sp>
-        <p:nvSpPr>
-          <p:cNvPr id="36" name="Shape 34"/>
-          <p:cNvSpPr/>
-          <p:nvPr/>
-        </p:nvSpPr>
-        <p:spPr>
-          <a:xfrm>
-            <a:off x="0" y="6803136"/>
-            <a:ext cx="12191695" cy="54864"/>
-          </a:xfrm>
-          <a:prstGeom prst="rect">
-            <a:avLst/>
-          </a:prstGeom>
-          <a:solidFill>
-            <a:srgbClr val="1E2761"/>
-          </a:solidFill>
-          <a:ln/>
-        </p:spPr>
+              <a:t>Ситалл</a:t>
+            </a:r>
+            <a:endParaRPr lang="en-US" sz="1200" dirty="0"/>
+          </a:p>
+        </p:txBody>
       </p:sp>
       <p:sp>
         <p:nvSpPr>
@@ -9748,8 +9494,8 @@
         </p:nvSpPr>
         <p:spPr>
           <a:xfrm>
-            <a:off x="384048" y="6528816"/>
-            <a:ext cx="1828800" cy="219456"/>
+            <a:off x="10774375" y="6473952"/>
+            <a:ext cx="914400" cy="274320"/>
           </a:xfrm>
           <a:prstGeom prst="rect">
             <a:avLst/>
@@ -9761,11 +9507,11 @@
           <a:bodyPr wrap="square" lIns="0" tIns="0" rIns="0" bIns="0" rtlCol="0" anchor="ctr"/>
           <a:lstStyle/>
           <a:p>
-            <a:pPr indent="0" marL="0">
-              <a:buNone/>
-            </a:pPr>
-            <a:r>
-              <a:rPr lang="en-US" sz="750" dirty="0">
+            <a:pPr algn="r" indent="0" marL="0">
+              <a:buNone/>
+            </a:pPr>
+            <a:r>
+              <a:rPr lang="en-US" sz="1200" dirty="0">
                 <a:solidFill>
                   <a:srgbClr val="6B7699"/>
                 </a:solidFill>
@@ -9773,48 +9519,9 @@
                 <a:ea typeface="Segoe UI" pitchFamily="34" charset="-122"/>
                 <a:cs typeface="Segoe UI" pitchFamily="34" charset="-120"/>
               </a:rPr>
-              <a:t>Ситалл</a:t>
-            </a:r>
-            <a:endParaRPr lang="en-US" sz="750" dirty="0"/>
-          </a:p>
-        </p:txBody>
-      </p:sp>
-      <p:sp>
-        <p:nvSpPr>
-          <p:cNvPr id="38" name="Text 36"/>
-          <p:cNvSpPr txBox="1"/>
-          <p:nvPr/>
-        </p:nvSpPr>
-        <p:spPr>
-          <a:xfrm>
-            <a:off x="10911535" y="6528816"/>
-            <a:ext cx="914400" cy="219456"/>
-          </a:xfrm>
-          <a:prstGeom prst="rect">
-            <a:avLst/>
-          </a:prstGeom>
-          <a:noFill/>
-          <a:ln/>
-        </p:spPr>
-        <p:txBody>
-          <a:bodyPr wrap="square" lIns="0" tIns="0" rIns="0" bIns="0" rtlCol="0" anchor="ctr"/>
-          <a:lstStyle/>
-          <a:p>
-            <a:pPr algn="r" indent="0" marL="0">
-              <a:buNone/>
-            </a:pPr>
-            <a:r>
-              <a:rPr lang="en-US" sz="750" dirty="0">
-                <a:solidFill>
-                  <a:srgbClr val="6B7699"/>
-                </a:solidFill>
-                <a:latin typeface="Segoe UI" pitchFamily="34" charset="0"/>
-                <a:ea typeface="Segoe UI" pitchFamily="34" charset="-122"/>
-                <a:cs typeface="Segoe UI" pitchFamily="34" charset="-120"/>
-              </a:rPr>
               <a:t>07 / 10</a:t>
             </a:r>
-            <a:endParaRPr lang="en-US" sz="750" dirty="0"/>
+            <a:endParaRPr lang="en-US" sz="1200" dirty="0"/>
           </a:p>
         </p:txBody>
       </p:sp>
@@ -9851,8 +9558,8 @@
         </p:nvSpPr>
         <p:spPr>
           <a:xfrm>
-            <a:off x="384048" y="201168"/>
-            <a:ext cx="11423599" cy="237744"/>
+            <a:off x="502920" y="219456"/>
+            <a:ext cx="11185855" cy="274320"/>
           </a:xfrm>
           <a:prstGeom prst="rect">
             <a:avLst/>
@@ -9868,7 +9575,7 @@
               <a:buNone/>
             </a:pPr>
             <a:r>
-              <a:rPr lang="en-US" sz="950" spc="300" kern="0" dirty="0">
+              <a:rPr lang="en-US" sz="1300" spc="300" kern="0" dirty="0">
                 <a:solidFill>
                   <a:srgbClr val="C9A24B"/>
                 </a:solidFill>
@@ -9878,7 +9585,7 @@
               </a:rPr>
               <a:t>ЧТО ПОЛУЧАЕТ ЗАВОД</a:t>
             </a:r>
-            <a:endParaRPr lang="en-US" sz="950" dirty="0"/>
+            <a:endParaRPr lang="en-US" sz="1300" dirty="0"/>
           </a:p>
         </p:txBody>
       </p:sp>
@@ -9890,8 +9597,8 @@
         </p:nvSpPr>
         <p:spPr>
           <a:xfrm>
-            <a:off x="365760" y="457200"/>
-            <a:ext cx="11423599" cy="475488"/>
+            <a:off x="484632" y="512064"/>
+            <a:ext cx="11185855" cy="566928"/>
           </a:xfrm>
           <a:prstGeom prst="rect">
             <a:avLst/>
@@ -9907,7 +9614,7 @@
               <a:buNone/>
             </a:pPr>
             <a:r>
-              <a:rPr lang="en-US" sz="2600" dirty="0">
+              <a:rPr lang="en-US" sz="2700" dirty="0">
                 <a:solidFill>
                   <a:srgbClr val="1E2761"/>
                 </a:solidFill>
@@ -9917,7 +9624,7 @@
               </a:rPr>
               <a:t>Результат без собственного НИИ</a:t>
             </a:r>
-            <a:endParaRPr lang="en-US" sz="2600" dirty="0"/>
+            <a:endParaRPr lang="en-US" sz="2700" dirty="0"/>
           </a:p>
         </p:txBody>
       </p:sp>
@@ -9929,8 +9636,8 @@
         </p:nvSpPr>
         <p:spPr>
           <a:xfrm>
-            <a:off x="384048" y="1024128"/>
-            <a:ext cx="960120" cy="41148"/>
+            <a:off x="502920" y="1133856"/>
+            <a:ext cx="1097280" cy="64008"/>
           </a:xfrm>
           <a:prstGeom prst="rect">
             <a:avLst/>
@@ -9949,12 +9656,12 @@
         </p:nvSpPr>
         <p:spPr>
           <a:xfrm>
-            <a:off x="384048" y="1371600"/>
-            <a:ext cx="5574640" cy="2377440"/>
+            <a:off x="502920" y="1481328"/>
+            <a:ext cx="5437480" cy="2304288"/>
           </a:xfrm>
           <a:prstGeom prst="roundRect">
             <a:avLst>
-              <a:gd name="adj" fmla="val 2692"/>
+              <a:gd name="adj" fmla="val 3571"/>
             </a:avLst>
           </a:prstGeom>
           <a:solidFill>
@@ -9966,6 +9673,13 @@
             </a:solidFill>
             <a:prstDash val="solid"/>
           </a:ln>
+          <a:effectLst>
+            <a:outerShdw sx="100000" sy="100000" kx="0" ky="0" algn="bl" rotWithShape="0" blurRad="177800" dist="50800" dir="5400000">
+              <a:srgbClr val="7E88A8">
+                <a:alpha val="30000"/>
+              </a:srgbClr>
+            </a:outerShdw>
+          </a:effectLst>
         </p:spPr>
       </p:sp>
       <p:sp>
@@ -9976,8 +9690,8 @@
         </p:nvSpPr>
         <p:spPr>
           <a:xfrm>
-            <a:off x="621792" y="1572768"/>
-            <a:ext cx="292608" cy="292608"/>
+            <a:off x="795528" y="1719072"/>
+            <a:ext cx="384048" cy="384048"/>
           </a:xfrm>
           <a:prstGeom prst="ellipse">
             <a:avLst/>
@@ -9996,8 +9710,8 @@
         </p:nvSpPr>
         <p:spPr>
           <a:xfrm>
-            <a:off x="621792" y="1572768"/>
-            <a:ext cx="292608" cy="292608"/>
+            <a:off x="795528" y="1719072"/>
+            <a:ext cx="384048" cy="384048"/>
           </a:xfrm>
           <a:prstGeom prst="rect">
             <a:avLst/>
@@ -10013,7 +9727,7 @@
               <a:buNone/>
             </a:pPr>
             <a:r>
-              <a:rPr lang="en-US" sz="1200" dirty="0">
+              <a:rPr lang="en-US" sz="1600" dirty="0">
                 <a:solidFill>
                   <a:srgbClr val="FFFFFF"/>
                 </a:solidFill>
@@ -10023,7 +9737,7 @@
               </a:rPr>
               <a:t>1</a:t>
             </a:r>
-            <a:endParaRPr lang="en-US" sz="1200" dirty="0"/>
+            <a:endParaRPr lang="en-US" sz="1600" dirty="0"/>
           </a:p>
         </p:txBody>
       </p:sp>
@@ -10035,8 +9749,8 @@
         </p:nvSpPr>
         <p:spPr>
           <a:xfrm>
-            <a:off x="621792" y="1938528"/>
-            <a:ext cx="5099152" cy="548640"/>
+            <a:off x="795528" y="2194560"/>
+            <a:ext cx="4852264" cy="365760"/>
           </a:xfrm>
           <a:prstGeom prst="rect">
             <a:avLst/>
@@ -10050,12 +9764,12 @@
           <a:p>
             <a:pPr indent="0" marL="0">
               <a:lnSpc>
-                <a:spcPct val="105000"/>
+                <a:spcPct val="102000"/>
               </a:lnSpc>
               <a:buNone/>
             </a:pPr>
             <a:r>
-              <a:rPr lang="en-US" sz="1350" dirty="0">
+              <a:rPr lang="en-US" sz="2000" dirty="0">
                 <a:solidFill>
                   <a:srgbClr val="1E2761"/>
                 </a:solidFill>
@@ -10065,7 +9779,7 @@
               </a:rPr>
               <a:t>Решение без своего R&amp;D</a:t>
             </a:r>
-            <a:endParaRPr lang="en-US" sz="1350" dirty="0"/>
+            <a:endParaRPr lang="en-US" sz="2000" dirty="0"/>
           </a:p>
         </p:txBody>
       </p:sp>
@@ -10077,8 +9791,8 @@
         </p:nvSpPr>
         <p:spPr>
           <a:xfrm>
-            <a:off x="621792" y="2432304"/>
-            <a:ext cx="5099152" cy="1170432"/>
+            <a:off x="795528" y="2633472"/>
+            <a:ext cx="4852264" cy="1005840"/>
           </a:xfrm>
           <a:prstGeom prst="rect">
             <a:avLst/>
@@ -10092,12 +9806,12 @@
           <a:p>
             <a:pPr indent="0" marL="0">
               <a:lnSpc>
-                <a:spcPct val="112000"/>
+                <a:spcPct val="108000"/>
               </a:lnSpc>
               <a:buNone/>
             </a:pPr>
             <a:r>
-              <a:rPr lang="en-US" sz="1000" dirty="0">
+              <a:rPr lang="en-US" sz="1600" dirty="0">
                 <a:solidFill>
                   <a:srgbClr val="1B2140"/>
                 </a:solidFill>
@@ -10107,7 +9821,7 @@
               </a:rPr>
               <a:t>Экспертизу дают привлечённые профильные учёные</a:t>
             </a:r>
-            <a:endParaRPr lang="en-US" sz="1000" dirty="0"/>
+            <a:endParaRPr lang="en-US" sz="1600" dirty="0"/>
           </a:p>
         </p:txBody>
       </p:sp>
@@ -10119,12 +9833,12 @@
         </p:nvSpPr>
         <p:spPr>
           <a:xfrm>
-            <a:off x="6233008" y="1371600"/>
-            <a:ext cx="5574640" cy="2377440"/>
+            <a:off x="6251296" y="1481328"/>
+            <a:ext cx="5437480" cy="2304288"/>
           </a:xfrm>
           <a:prstGeom prst="roundRect">
             <a:avLst>
-              <a:gd name="adj" fmla="val 2692"/>
+              <a:gd name="adj" fmla="val 3571"/>
             </a:avLst>
           </a:prstGeom>
           <a:solidFill>
@@ -10136,6 +9850,13 @@
             </a:solidFill>
             <a:prstDash val="solid"/>
           </a:ln>
+          <a:effectLst>
+            <a:outerShdw sx="100000" sy="100000" kx="0" ky="0" algn="bl" rotWithShape="0" blurRad="177800" dist="50800" dir="5400000">
+              <a:srgbClr val="7E88A8">
+                <a:alpha val="30000"/>
+              </a:srgbClr>
+            </a:outerShdw>
+          </a:effectLst>
         </p:spPr>
       </p:sp>
       <p:sp>
@@ -10146,8 +9867,8 @@
         </p:nvSpPr>
         <p:spPr>
           <a:xfrm>
-            <a:off x="6470752" y="1572768"/>
-            <a:ext cx="292608" cy="292608"/>
+            <a:off x="6543904" y="1719072"/>
+            <a:ext cx="384048" cy="384048"/>
           </a:xfrm>
           <a:prstGeom prst="ellipse">
             <a:avLst/>
@@ -10166,8 +9887,8 @@
         </p:nvSpPr>
         <p:spPr>
           <a:xfrm>
-            <a:off x="6470752" y="1572768"/>
-            <a:ext cx="292608" cy="292608"/>
+            <a:off x="6543904" y="1719072"/>
+            <a:ext cx="384048" cy="384048"/>
           </a:xfrm>
           <a:prstGeom prst="rect">
             <a:avLst/>
@@ -10183,7 +9904,7 @@
               <a:buNone/>
             </a:pPr>
             <a:r>
-              <a:rPr lang="en-US" sz="1200" dirty="0">
+              <a:rPr lang="en-US" sz="1600" dirty="0">
                 <a:solidFill>
                   <a:srgbClr val="FFFFFF"/>
                 </a:solidFill>
@@ -10193,7 +9914,7 @@
               </a:rPr>
               <a:t>2</a:t>
             </a:r>
-            <a:endParaRPr lang="en-US" sz="1200" dirty="0"/>
+            <a:endParaRPr lang="en-US" sz="1600" dirty="0"/>
           </a:p>
         </p:txBody>
       </p:sp>
@@ -10205,8 +9926,8 @@
         </p:nvSpPr>
         <p:spPr>
           <a:xfrm>
-            <a:off x="6470752" y="1938528"/>
-            <a:ext cx="5099152" cy="548640"/>
+            <a:off x="6543904" y="2194560"/>
+            <a:ext cx="4852264" cy="365760"/>
           </a:xfrm>
           <a:prstGeom prst="rect">
             <a:avLst/>
@@ -10220,12 +9941,12 @@
           <a:p>
             <a:pPr indent="0" marL="0">
               <a:lnSpc>
-                <a:spcPct val="105000"/>
+                <a:spcPct val="102000"/>
               </a:lnSpc>
               <a:buNone/>
             </a:pPr>
             <a:r>
-              <a:rPr lang="en-US" sz="1350" dirty="0">
+              <a:rPr lang="en-US" sz="2000" dirty="0">
                 <a:solidFill>
                   <a:srgbClr val="1E2761"/>
                 </a:solidFill>
@@ -10233,9 +9954,9 @@
                 <a:ea typeface="Segoe UI Semibold" pitchFamily="34" charset="-122"/>
                 <a:cs typeface="Segoe UI Semibold" pitchFamily="34" charset="-120"/>
               </a:rPr>
-              <a:t>Господдержка</a:t>
-            </a:r>
-            <a:endParaRPr lang="en-US" sz="1350" dirty="0"/>
+              <a:t>Экономика с господдержкой</a:t>
+            </a:r>
+            <a:endParaRPr lang="en-US" sz="2000" dirty="0"/>
           </a:p>
         </p:txBody>
       </p:sp>
@@ -10247,8 +9968,8 @@
         </p:nvSpPr>
         <p:spPr>
           <a:xfrm>
-            <a:off x="6470752" y="2432304"/>
-            <a:ext cx="5099152" cy="1170432"/>
+            <a:off x="6543904" y="2633472"/>
+            <a:ext cx="4852264" cy="1005840"/>
           </a:xfrm>
           <a:prstGeom prst="rect">
             <a:avLst/>
@@ -10262,12 +9983,12 @@
           <a:p>
             <a:pPr indent="0" marL="0">
               <a:lnSpc>
-                <a:spcPct val="112000"/>
+                <a:spcPct val="108000"/>
               </a:lnSpc>
               <a:buNone/>
             </a:pPr>
             <a:r>
-              <a:rPr lang="en-US" sz="1000" dirty="0">
+              <a:rPr lang="en-US" sz="1600" dirty="0">
                 <a:solidFill>
                   <a:srgbClr val="1B2140"/>
                 </a:solidFill>
@@ -10275,9 +9996,9 @@
                 <a:ea typeface="Segoe UI" pitchFamily="34" charset="-122"/>
                 <a:cs typeface="Segoe UI" pitchFamily="34" charset="-120"/>
               </a:rPr>
-              <a:t>До 70% стоимости НИОКР по ПП-218; двойной вычет — без конкурса</a:t>
-            </a:r>
-            <a:endParaRPr lang="en-US" sz="1000" dirty="0"/>
+              <a:t>На 100 млн ₽ проекта — 15–30 млн ₽ своих: ПП-218 и двойной вычет</a:t>
+            </a:r>
+            <a:endParaRPr lang="en-US" sz="1600" dirty="0"/>
           </a:p>
         </p:txBody>
       </p:sp>
@@ -10289,12 +10010,12 @@
         </p:nvSpPr>
         <p:spPr>
           <a:xfrm>
-            <a:off x="384048" y="4005072"/>
-            <a:ext cx="5574640" cy="2377440"/>
+            <a:off x="502920" y="4096512"/>
+            <a:ext cx="5437480" cy="2304288"/>
           </a:xfrm>
           <a:prstGeom prst="roundRect">
             <a:avLst>
-              <a:gd name="adj" fmla="val 2692"/>
+              <a:gd name="adj" fmla="val 3571"/>
             </a:avLst>
           </a:prstGeom>
           <a:solidFill>
@@ -10306,6 +10027,13 @@
             </a:solidFill>
             <a:prstDash val="solid"/>
           </a:ln>
+          <a:effectLst>
+            <a:outerShdw sx="100000" sy="100000" kx="0" ky="0" algn="bl" rotWithShape="0" blurRad="177800" dist="50800" dir="5400000">
+              <a:srgbClr val="7E88A8">
+                <a:alpha val="30000"/>
+              </a:srgbClr>
+            </a:outerShdw>
+          </a:effectLst>
         </p:spPr>
       </p:sp>
       <p:sp>
@@ -10316,8 +10044,8 @@
         </p:nvSpPr>
         <p:spPr>
           <a:xfrm>
-            <a:off x="621792" y="4206240"/>
-            <a:ext cx="292608" cy="292608"/>
+            <a:off x="795528" y="4334256"/>
+            <a:ext cx="384048" cy="384048"/>
           </a:xfrm>
           <a:prstGeom prst="ellipse">
             <a:avLst/>
@@ -10336,8 +10064,8 @@
         </p:nvSpPr>
         <p:spPr>
           <a:xfrm>
-            <a:off x="621792" y="4206240"/>
-            <a:ext cx="292608" cy="292608"/>
+            <a:off x="795528" y="4334256"/>
+            <a:ext cx="384048" cy="384048"/>
           </a:xfrm>
           <a:prstGeom prst="rect">
             <a:avLst/>
@@ -10353,7 +10081,7 @@
               <a:buNone/>
             </a:pPr>
             <a:r>
-              <a:rPr lang="en-US" sz="1200" dirty="0">
+              <a:rPr lang="en-US" sz="1600" dirty="0">
                 <a:solidFill>
                   <a:srgbClr val="FFFFFF"/>
                 </a:solidFill>
@@ -10363,7 +10091,7 @@
               </a:rPr>
               <a:t>3</a:t>
             </a:r>
-            <a:endParaRPr lang="en-US" sz="1200" dirty="0"/>
+            <a:endParaRPr lang="en-US" sz="1600" dirty="0"/>
           </a:p>
         </p:txBody>
       </p:sp>
@@ -10375,8 +10103,8 @@
         </p:nvSpPr>
         <p:spPr>
           <a:xfrm>
-            <a:off x="621792" y="4572000"/>
-            <a:ext cx="5099152" cy="548640"/>
+            <a:off x="795528" y="4809744"/>
+            <a:ext cx="4852264" cy="365760"/>
           </a:xfrm>
           <a:prstGeom prst="rect">
             <a:avLst/>
@@ -10390,12 +10118,12 @@
           <a:p>
             <a:pPr indent="0" marL="0">
               <a:lnSpc>
-                <a:spcPct val="105000"/>
+                <a:spcPct val="102000"/>
               </a:lnSpc>
               <a:buNone/>
             </a:pPr>
             <a:r>
-              <a:rPr lang="en-US" sz="1350" dirty="0">
+              <a:rPr lang="en-US" sz="2000" dirty="0">
                 <a:solidFill>
                   <a:srgbClr val="1E2761"/>
                 </a:solidFill>
@@ -10403,9 +10131,9 @@
                 <a:ea typeface="Segoe UI Semibold" pitchFamily="34" charset="-122"/>
                 <a:cs typeface="Segoe UI Semibold" pitchFamily="34" charset="-120"/>
               </a:rPr>
-              <a:t>Один подрядчик</a:t>
-            </a:r>
-            <a:endParaRPr lang="en-US" sz="1350" dirty="0"/>
+              <a:t>Один управляющий подрядчик</a:t>
+            </a:r>
+            <a:endParaRPr lang="en-US" sz="2000" dirty="0"/>
           </a:p>
         </p:txBody>
       </p:sp>
@@ -10417,8 +10145,8 @@
         </p:nvSpPr>
         <p:spPr>
           <a:xfrm>
-            <a:off x="621792" y="5065776"/>
-            <a:ext cx="5099152" cy="1170432"/>
+            <a:off x="795528" y="5248656"/>
+            <a:ext cx="4852264" cy="1005840"/>
           </a:xfrm>
           <a:prstGeom prst="rect">
             <a:avLst/>
@@ -10432,12 +10160,12 @@
           <a:p>
             <a:pPr indent="0" marL="0">
               <a:lnSpc>
-                <a:spcPct val="112000"/>
+                <a:spcPct val="108000"/>
               </a:lnSpc>
               <a:buNone/>
             </a:pPr>
             <a:r>
-              <a:rPr lang="en-US" sz="1000" dirty="0">
+              <a:rPr lang="en-US" sz="1600" dirty="0">
                 <a:solidFill>
                   <a:srgbClr val="1B2140"/>
                 </a:solidFill>
@@ -10447,7 +10175,7 @@
               </a:rPr>
               <a:t>Вместо десяти переговоров с институтами</a:t>
             </a:r>
-            <a:endParaRPr lang="en-US" sz="1000" dirty="0"/>
+            <a:endParaRPr lang="en-US" sz="1600" dirty="0"/>
           </a:p>
         </p:txBody>
       </p:sp>
@@ -10459,12 +10187,12 @@
         </p:nvSpPr>
         <p:spPr>
           <a:xfrm>
-            <a:off x="6233008" y="4005072"/>
-            <a:ext cx="5574640" cy="2377440"/>
+            <a:off x="6251296" y="4096512"/>
+            <a:ext cx="5437480" cy="2304288"/>
           </a:xfrm>
           <a:prstGeom prst="roundRect">
             <a:avLst>
-              <a:gd name="adj" fmla="val 2692"/>
+              <a:gd name="adj" fmla="val 3571"/>
             </a:avLst>
           </a:prstGeom>
           <a:solidFill>
@@ -10476,6 +10204,13 @@
             </a:solidFill>
             <a:prstDash val="solid"/>
           </a:ln>
+          <a:effectLst>
+            <a:outerShdw sx="100000" sy="100000" kx="0" ky="0" algn="bl" rotWithShape="0" blurRad="177800" dist="50800" dir="5400000">
+              <a:srgbClr val="7E88A8">
+                <a:alpha val="30000"/>
+              </a:srgbClr>
+            </a:outerShdw>
+          </a:effectLst>
         </p:spPr>
       </p:sp>
       <p:sp>
@@ -10486,8 +10221,8 @@
         </p:nvSpPr>
         <p:spPr>
           <a:xfrm>
-            <a:off x="6470752" y="4206240"/>
-            <a:ext cx="292608" cy="292608"/>
+            <a:off x="6543904" y="4334256"/>
+            <a:ext cx="384048" cy="384048"/>
           </a:xfrm>
           <a:prstGeom prst="ellipse">
             <a:avLst/>
@@ -10506,8 +10241,8 @@
         </p:nvSpPr>
         <p:spPr>
           <a:xfrm>
-            <a:off x="6470752" y="4206240"/>
-            <a:ext cx="292608" cy="292608"/>
+            <a:off x="6543904" y="4334256"/>
+            <a:ext cx="384048" cy="384048"/>
           </a:xfrm>
           <a:prstGeom prst="rect">
             <a:avLst/>
@@ -10523,7 +10258,7 @@
               <a:buNone/>
             </a:pPr>
             <a:r>
-              <a:rPr lang="en-US" sz="1200" dirty="0">
+              <a:rPr lang="en-US" sz="1600" dirty="0">
                 <a:solidFill>
                   <a:srgbClr val="FFFFFF"/>
                 </a:solidFill>
@@ -10533,7 +10268,7 @@
               </a:rPr>
               <a:t>4</a:t>
             </a:r>
-            <a:endParaRPr lang="en-US" sz="1200" dirty="0"/>
+            <a:endParaRPr lang="en-US" sz="1600" dirty="0"/>
           </a:p>
         </p:txBody>
       </p:sp>
@@ -10545,8 +10280,8 @@
         </p:nvSpPr>
         <p:spPr>
           <a:xfrm>
-            <a:off x="6470752" y="4572000"/>
-            <a:ext cx="5099152" cy="548640"/>
+            <a:off x="6543904" y="4809744"/>
+            <a:ext cx="4852264" cy="365760"/>
           </a:xfrm>
           <a:prstGeom prst="rect">
             <a:avLst/>
@@ -10560,12 +10295,12 @@
           <a:p>
             <a:pPr indent="0" marL="0">
               <a:lnSpc>
-                <a:spcPct val="105000"/>
+                <a:spcPct val="102000"/>
               </a:lnSpc>
               <a:buNone/>
             </a:pPr>
             <a:r>
-              <a:rPr lang="en-US" sz="1350" dirty="0">
+              <a:rPr lang="en-US" sz="2000" dirty="0">
                 <a:solidFill>
                   <a:srgbClr val="1E2761"/>
                 </a:solidFill>
@@ -10573,9 +10308,9 @@
                 <a:ea typeface="Segoe UI Semibold" pitchFamily="34" charset="-122"/>
                 <a:cs typeface="Segoe UI Semibold" pitchFamily="34" charset="-120"/>
               </a:rPr>
-              <a:t>Честный ответ за 3–4 недели</a:t>
-            </a:r>
-            <a:endParaRPr lang="en-US" sz="1350" dirty="0"/>
+              <a:t>Ответ за 3–4 недели</a:t>
+            </a:r>
+            <a:endParaRPr lang="en-US" sz="2000" dirty="0"/>
           </a:p>
         </p:txBody>
       </p:sp>
@@ -10587,8 +10322,8 @@
         </p:nvSpPr>
         <p:spPr>
           <a:xfrm>
-            <a:off x="6470752" y="5065776"/>
-            <a:ext cx="5099152" cy="1170432"/>
+            <a:off x="6543904" y="5248656"/>
+            <a:ext cx="4852264" cy="1005840"/>
           </a:xfrm>
           <a:prstGeom prst="rect">
             <a:avLst/>
@@ -10602,12 +10337,12 @@
           <a:p>
             <a:pPr indent="0" marL="0">
               <a:lnSpc>
-                <a:spcPct val="112000"/>
+                <a:spcPct val="108000"/>
               </a:lnSpc>
               <a:buNone/>
             </a:pPr>
             <a:r>
-              <a:rPr lang="en-US" sz="1000" dirty="0">
+              <a:rPr lang="en-US" sz="1600" dirty="0">
                 <a:solidFill>
                   <a:srgbClr val="1B2140"/>
                 </a:solidFill>
@@ -10617,40 +10352,20 @@
               </a:rPr>
               <a:t>«Подходящей технологии нет» — тоже результат</a:t>
             </a:r>
-            <a:endParaRPr lang="en-US" sz="1000" dirty="0"/>
-          </a:p>
-        </p:txBody>
-      </p:sp>
-      <p:sp>
-        <p:nvSpPr>
-          <p:cNvPr id="25" name="Shape 23"/>
-          <p:cNvSpPr/>
-          <p:nvPr/>
-        </p:nvSpPr>
-        <p:spPr>
-          <a:xfrm>
-            <a:off x="0" y="6803136"/>
-            <a:ext cx="12191695" cy="54864"/>
-          </a:xfrm>
-          <a:prstGeom prst="rect">
-            <a:avLst/>
-          </a:prstGeom>
-          <a:solidFill>
-            <a:srgbClr val="1E2761"/>
-          </a:solidFill>
-          <a:ln/>
-        </p:spPr>
-      </p:sp>
-      <p:sp>
-        <p:nvSpPr>
-          <p:cNvPr id="26" name="Text 24"/>
-          <p:cNvSpPr txBox="1"/>
-          <p:nvPr/>
-        </p:nvSpPr>
-        <p:spPr>
-          <a:xfrm>
-            <a:off x="384048" y="6528816"/>
-            <a:ext cx="1828800" cy="219456"/>
+            <a:endParaRPr lang="en-US" sz="1600" dirty="0"/>
+          </a:p>
+        </p:txBody>
+      </p:sp>
+      <p:sp>
+        <p:nvSpPr>
+          <p:cNvPr id="25" name="Text 23"/>
+          <p:cNvSpPr txBox="1"/>
+          <p:nvPr/>
+        </p:nvSpPr>
+        <p:spPr>
+          <a:xfrm>
+            <a:off x="502920" y="6473952"/>
+            <a:ext cx="1828800" cy="274320"/>
           </a:xfrm>
           <a:prstGeom prst="rect">
             <a:avLst/>
@@ -10666,7 +10381,7 @@
               <a:buNone/>
             </a:pPr>
             <a:r>
-              <a:rPr lang="en-US" sz="750" dirty="0">
+              <a:rPr lang="en-US" sz="1200" dirty="0">
                 <a:solidFill>
                   <a:srgbClr val="6B7699"/>
                 </a:solidFill>
@@ -10676,20 +10391,20 @@
               </a:rPr>
               <a:t>Ситалл</a:t>
             </a:r>
-            <a:endParaRPr lang="en-US" sz="750" dirty="0"/>
-          </a:p>
-        </p:txBody>
-      </p:sp>
-      <p:sp>
-        <p:nvSpPr>
-          <p:cNvPr id="27" name="Text 25"/>
-          <p:cNvSpPr txBox="1"/>
-          <p:nvPr/>
-        </p:nvSpPr>
-        <p:spPr>
-          <a:xfrm>
-            <a:off x="10911535" y="6528816"/>
-            <a:ext cx="914400" cy="219456"/>
+            <a:endParaRPr lang="en-US" sz="1200" dirty="0"/>
+          </a:p>
+        </p:txBody>
+      </p:sp>
+      <p:sp>
+        <p:nvSpPr>
+          <p:cNvPr id="26" name="Text 24"/>
+          <p:cNvSpPr txBox="1"/>
+          <p:nvPr/>
+        </p:nvSpPr>
+        <p:spPr>
+          <a:xfrm>
+            <a:off x="10774375" y="6473952"/>
+            <a:ext cx="914400" cy="274320"/>
           </a:xfrm>
           <a:prstGeom prst="rect">
             <a:avLst/>
@@ -10705,7 +10420,7 @@
               <a:buNone/>
             </a:pPr>
             <a:r>
-              <a:rPr lang="en-US" sz="750" dirty="0">
+              <a:rPr lang="en-US" sz="1200" dirty="0">
                 <a:solidFill>
                   <a:srgbClr val="6B7699"/>
                 </a:solidFill>
@@ -10715,7 +10430,7 @@
               </a:rPr>
               <a:t>08 / 10</a:t>
             </a:r>
-            <a:endParaRPr lang="en-US" sz="750" dirty="0"/>
+            <a:endParaRPr lang="en-US" sz="1200" dirty="0"/>
           </a:p>
         </p:txBody>
       </p:sp>
@@ -10752,8 +10467,8 @@
         </p:nvSpPr>
         <p:spPr>
           <a:xfrm>
-            <a:off x="384048" y="201168"/>
-            <a:ext cx="11423599" cy="237744"/>
+            <a:off x="502920" y="219456"/>
+            <a:ext cx="11185855" cy="274320"/>
           </a:xfrm>
           <a:prstGeom prst="rect">
             <a:avLst/>
@@ -10769,7 +10484,7 @@
               <a:buNone/>
             </a:pPr>
             <a:r>
-              <a:rPr lang="en-US" sz="950" spc="300" kern="0" dirty="0">
+              <a:rPr lang="en-US" sz="1300" spc="300" kern="0" dirty="0">
                 <a:solidFill>
                   <a:srgbClr val="C9A24B"/>
                 </a:solidFill>
@@ -10777,9 +10492,9 @@
                 <a:ea typeface="Segoe UI Semibold" pitchFamily="34" charset="-122"/>
                 <a:cs typeface="Segoe UI Semibold" pitchFamily="34" charset="-120"/>
               </a:rPr>
-              <a:t>ВОПРОСЫ</a:t>
-            </a:r>
-            <a:endParaRPr lang="en-US" sz="950" dirty="0"/>
+              <a:t>КОМАНДА</a:t>
+            </a:r>
+            <a:endParaRPr lang="en-US" sz="1300" dirty="0"/>
           </a:p>
         </p:txBody>
       </p:sp>
@@ -10791,8 +10506,8 @@
         </p:nvSpPr>
         <p:spPr>
           <a:xfrm>
-            <a:off x="365760" y="457200"/>
-            <a:ext cx="11423599" cy="475488"/>
+            <a:off x="484632" y="512064"/>
+            <a:ext cx="11185855" cy="566928"/>
           </a:xfrm>
           <a:prstGeom prst="rect">
             <a:avLst/>
@@ -10808,7 +10523,7 @@
               <a:buNone/>
             </a:pPr>
             <a:r>
-              <a:rPr lang="en-US" sz="2600" dirty="0">
+              <a:rPr lang="en-US" sz="2700" dirty="0">
                 <a:solidFill>
                   <a:srgbClr val="1E2761"/>
                 </a:solidFill>
@@ -10816,9 +10531,9 @@
                 <a:ea typeface="Segoe UI Semibold" pitchFamily="34" charset="-122"/>
                 <a:cs typeface="Segoe UI Semibold" pitchFamily="34" charset="-120"/>
               </a:rPr>
-              <a:t>Четыре прямых ответа</a:t>
-            </a:r>
-            <a:endParaRPr lang="en-US" sz="2600" dirty="0"/>
+              <a:t>Доводим проекты до внедрения</a:t>
+            </a:r>
+            <a:endParaRPr lang="en-US" sz="2700" dirty="0"/>
           </a:p>
         </p:txBody>
       </p:sp>
@@ -10830,8 +10545,8 @@
         </p:nvSpPr>
         <p:spPr>
           <a:xfrm>
-            <a:off x="384048" y="1024128"/>
-            <a:ext cx="960120" cy="41148"/>
+            <a:off x="502920" y="1133856"/>
+            <a:ext cx="1097280" cy="64008"/>
           </a:xfrm>
           <a:prstGeom prst="rect">
             <a:avLst/>
@@ -10850,12 +10565,12 @@
         </p:nvSpPr>
         <p:spPr>
           <a:xfrm>
-            <a:off x="384048" y="1371600"/>
-            <a:ext cx="5574640" cy="2331720"/>
+            <a:off x="502920" y="1481328"/>
+            <a:ext cx="3521354" cy="4709160"/>
           </a:xfrm>
           <a:prstGeom prst="roundRect">
             <a:avLst>
-              <a:gd name="adj" fmla="val 2745"/>
+              <a:gd name="adj" fmla="val 2337"/>
             </a:avLst>
           </a:prstGeom>
           <a:solidFill>
@@ -10867,6 +10582,13 @@
             </a:solidFill>
             <a:prstDash val="solid"/>
           </a:ln>
+          <a:effectLst>
+            <a:outerShdw sx="100000" sy="100000" kx="0" ky="0" algn="bl" rotWithShape="0" blurRad="177800" dist="50800" dir="5400000">
+              <a:srgbClr val="7E88A8">
+                <a:alpha val="30000"/>
+              </a:srgbClr>
+            </a:outerShdw>
+          </a:effectLst>
         </p:spPr>
       </p:sp>
       <p:sp>
@@ -10877,10 +10599,10 @@
         </p:nvSpPr>
         <p:spPr>
           <a:xfrm>
-            <a:off x="621792" y="1609344"/>
-            <a:ext cx="292608" cy="292608"/>
-          </a:xfrm>
-          <a:prstGeom prst="ellipse">
+            <a:off x="795528" y="1737360"/>
+            <a:ext cx="384048" cy="45720"/>
+          </a:xfrm>
+          <a:prstGeom prst="rect">
             <a:avLst/>
           </a:prstGeom>
           <a:solidFill>
@@ -10897,66 +10619,47 @@
         </p:nvSpPr>
         <p:spPr>
           <a:xfrm>
-            <a:off x="621792" y="1609344"/>
-            <a:ext cx="292608" cy="292608"/>
-          </a:xfrm>
-          <a:prstGeom prst="rect">
-            <a:avLst/>
-          </a:prstGeom>
-          <a:noFill/>
-          <a:ln/>
-        </p:spPr>
-        <p:txBody>
-          <a:bodyPr wrap="square" lIns="0" tIns="0" rIns="0" bIns="0" rtlCol="0" anchor="ctr"/>
-          <a:lstStyle/>
-          <a:p>
-            <a:pPr algn="ctr" indent="0" marL="0">
-              <a:buNone/>
-            </a:pPr>
-            <a:r>
-              <a:rPr lang="en-US" sz="1200" dirty="0">
-                <a:solidFill>
-                  <a:srgbClr val="FFFFFF"/>
+            <a:off x="795528" y="1865376"/>
+            <a:ext cx="2936138" cy="749808"/>
+          </a:xfrm>
+          <a:prstGeom prst="rect">
+            <a:avLst/>
+          </a:prstGeom>
+          <a:noFill/>
+          <a:ln/>
+        </p:spPr>
+        <p:txBody>
+          <a:bodyPr wrap="square" lIns="0" tIns="0" rIns="0" bIns="0" rtlCol="0" anchor="t"/>
+          <a:lstStyle/>
+          <a:p>
+            <a:pPr indent="0" marL="0">
+              <a:lnSpc>
+                <a:spcPct val="100000"/>
+              </a:lnSpc>
+              <a:buNone/>
+            </a:pPr>
+            <a:r>
+              <a:rPr lang="en-US" sz="2200" dirty="0">
+                <a:solidFill>
+                  <a:srgbClr val="1E2761"/>
                 </a:solidFill>
                 <a:latin typeface="Segoe UI Semibold" pitchFamily="34" charset="0"/>
                 <a:ea typeface="Segoe UI Semibold" pitchFamily="34" charset="-122"/>
                 <a:cs typeface="Segoe UI Semibold" pitchFamily="34" charset="-120"/>
               </a:rPr>
-              <a:t>1</a:t>
-            </a:r>
-            <a:endParaRPr lang="en-US" sz="1200" dirty="0"/>
-          </a:p>
-        </p:txBody>
-      </p:sp>
-      <p:sp>
-        <p:nvSpPr>
-          <p:cNvPr id="8" name="Text 6"/>
-          <p:cNvSpPr txBox="1"/>
-          <p:nvPr/>
-        </p:nvSpPr>
-        <p:spPr>
-          <a:xfrm>
-            <a:off x="1042416" y="1554480"/>
-            <a:ext cx="4660240" cy="786384"/>
-          </a:xfrm>
-          <a:prstGeom prst="rect">
-            <a:avLst/>
-          </a:prstGeom>
-          <a:noFill/>
-          <a:ln/>
-        </p:spPr>
-        <p:txBody>
-          <a:bodyPr wrap="square" lIns="0" tIns="0" rIns="0" bIns="0" rtlCol="0" anchor="ctr"/>
-          <a:lstStyle/>
+              <a:t>Кирилл</a:t>
+            </a:r>
+            <a:endParaRPr lang="en-US" sz="2200" dirty="0"/>
+          </a:p>
           <a:p>
             <a:pPr indent="0" marL="0">
               <a:lnSpc>
-                <a:spcPct val="105000"/>
+                <a:spcPct val="100000"/>
               </a:lnSpc>
               <a:buNone/>
             </a:pPr>
             <a:r>
-              <a:rPr lang="en-US" sz="1250" dirty="0">
+              <a:rPr lang="en-US" sz="2200" dirty="0">
                 <a:solidFill>
                   <a:srgbClr val="1E2761"/>
                 </a:solidFill>
@@ -10964,9 +10667,48 @@
                 <a:ea typeface="Segoe UI Semibold" pitchFamily="34" charset="-122"/>
                 <a:cs typeface="Segoe UI Semibold" pitchFamily="34" charset="-120"/>
               </a:rPr>
-              <a:t>Зачем посредник? Пойдём в институт напрямую</a:t>
-            </a:r>
-            <a:endParaRPr lang="en-US" sz="1250" dirty="0"/>
+              <a:t>Уклонский</a:t>
+            </a:r>
+            <a:endParaRPr lang="en-US" sz="2200" dirty="0"/>
+          </a:p>
+        </p:txBody>
+      </p:sp>
+      <p:sp>
+        <p:nvSpPr>
+          <p:cNvPr id="8" name="Text 6"/>
+          <p:cNvSpPr txBox="1"/>
+          <p:nvPr/>
+        </p:nvSpPr>
+        <p:spPr>
+          <a:xfrm>
+            <a:off x="795528" y="2651760"/>
+            <a:ext cx="2936138" cy="274320"/>
+          </a:xfrm>
+          <a:prstGeom prst="rect">
+            <a:avLst/>
+          </a:prstGeom>
+          <a:noFill/>
+          <a:ln/>
+        </p:spPr>
+        <p:txBody>
+          <a:bodyPr wrap="square" lIns="0" tIns="0" rIns="0" bIns="0" rtlCol="0" anchor="ctr"/>
+          <a:lstStyle/>
+          <a:p>
+            <a:pPr indent="0" marL="0">
+              <a:buNone/>
+            </a:pPr>
+            <a:r>
+              <a:rPr lang="en-US" sz="1300" spc="200" kern="0" dirty="0">
+                <a:solidFill>
+                  <a:srgbClr val="C9A24B"/>
+                </a:solidFill>
+                <a:latin typeface="Segoe UI Semibold" pitchFamily="34" charset="0"/>
+                <a:ea typeface="Segoe UI Semibold" pitchFamily="34" charset="-122"/>
+                <a:cs typeface="Segoe UI Semibold" pitchFamily="34" charset="-120"/>
+              </a:rPr>
+              <a:t>СО-ОСНОВАТЕЛЬ</a:t>
+            </a:r>
+            <a:endParaRPr lang="en-US" sz="1300" dirty="0"/>
           </a:p>
         </p:txBody>
       </p:sp>
@@ -10978,8 +10720,8 @@
         </p:nvSpPr>
         <p:spPr>
           <a:xfrm>
-            <a:off x="621792" y="2450592"/>
-            <a:ext cx="5099152" cy="1088136"/>
+            <a:off x="813816" y="3017520"/>
+            <a:ext cx="2954426" cy="3017520"/>
           </a:xfrm>
           <a:prstGeom prst="rect">
             <a:avLst/>
@@ -10991,14 +10733,18 @@
           <a:bodyPr wrap="square" lIns="0" tIns="0" rIns="0" bIns="0" rtlCol="0" anchor="t"/>
           <a:lstStyle/>
           <a:p>
-            <a:pPr indent="0" marL="0">
+            <a:pPr marL="152400" indent="-152400">
               <a:lnSpc>
-                <a:spcPct val="112000"/>
+                <a:spcPct val="108000"/>
               </a:lnSpc>
-              <a:buNone/>
-            </a:pPr>
-            <a:r>
-              <a:rPr lang="en-US" sz="1050" dirty="0">
+              <a:spcAft>
+                <a:spcPts val="800"/>
+              </a:spcAft>
+              <a:buSzPct val="100000"/>
+              <a:buChar char="•"/>
+            </a:pPr>
+            <a:r>
+              <a:rPr lang="en-US" sz="1600" dirty="0">
                 <a:solidFill>
                   <a:srgbClr val="1B2140"/>
                 </a:solidFill>
@@ -11006,9 +10752,57 @@
                 <a:ea typeface="Segoe UI" pitchFamily="34" charset="-122"/>
                 <a:cs typeface="Segoe UI" pitchFamily="34" charset="-120"/>
               </a:rPr>
-              <a:t>Напрямую — это один институт и его оценка своей же разработки. Мы сравниваем решения по стране и миру</a:t>
-            </a:r>
-            <a:endParaRPr lang="en-US" sz="1050" dirty="0"/>
+              <a:t>«ФинАналитик», Роспатент № 2024618827: учёт 10 млрд ₽ в год</a:t>
+            </a:r>
+            <a:endParaRPr lang="en-US" sz="1600" dirty="0"/>
+          </a:p>
+          <a:p>
+            <a:pPr marL="152400" indent="-152400">
+              <a:lnSpc>
+                <a:spcPct val="108000"/>
+              </a:lnSpc>
+              <a:spcAft>
+                <a:spcPts val="800"/>
+              </a:spcAft>
+              <a:buSzPct val="100000"/>
+              <a:buChar char="•"/>
+            </a:pPr>
+            <a:r>
+              <a:rPr lang="en-US" sz="1600" dirty="0">
+                <a:solidFill>
+                  <a:srgbClr val="1B2140"/>
+                </a:solidFill>
+                <a:latin typeface="Segoe UI" pitchFamily="34" charset="0"/>
+                <a:ea typeface="Segoe UI" pitchFamily="34" charset="-122"/>
+                <a:cs typeface="Segoe UI" pitchFamily="34" charset="-120"/>
+              </a:rPr>
+              <a:t>Платформа «Больше, чем путешествие»: 80 000 пользователей</a:t>
+            </a:r>
+            <a:endParaRPr lang="en-US" sz="1600" dirty="0"/>
+          </a:p>
+          <a:p>
+            <a:pPr marL="152400" indent="-152400">
+              <a:lnSpc>
+                <a:spcPct val="108000"/>
+              </a:lnSpc>
+              <a:spcAft>
+                <a:spcPts val="800"/>
+              </a:spcAft>
+              <a:buSzPct val="100000"/>
+              <a:buChar char="•"/>
+            </a:pPr>
+            <a:r>
+              <a:rPr lang="en-US" sz="1600" dirty="0">
+                <a:solidFill>
+                  <a:srgbClr val="1B2140"/>
+                </a:solidFill>
+                <a:latin typeface="Segoe UI" pitchFamily="34" charset="0"/>
+                <a:ea typeface="Segoe UI" pitchFamily="34" charset="-122"/>
+                <a:cs typeface="Segoe UI" pitchFamily="34" charset="-120"/>
+              </a:rPr>
+              <a:t>РАНХиГС, госуправление. Преподаватель РЭУ им. Плеханова</a:t>
+            </a:r>
+            <a:endParaRPr lang="en-US" sz="1600" dirty="0"/>
           </a:p>
         </p:txBody>
       </p:sp>
@@ -11020,12 +10814,12 @@
         </p:nvSpPr>
         <p:spPr>
           <a:xfrm>
-            <a:off x="6233008" y="1371600"/>
-            <a:ext cx="5574640" cy="2331720"/>
+            <a:off x="4335170" y="1481328"/>
+            <a:ext cx="3521354" cy="4709160"/>
           </a:xfrm>
           <a:prstGeom prst="roundRect">
             <a:avLst>
-              <a:gd name="adj" fmla="val 2745"/>
+              <a:gd name="adj" fmla="val 2337"/>
             </a:avLst>
           </a:prstGeom>
           <a:solidFill>
@@ -11037,6 +10831,13 @@
             </a:solidFill>
             <a:prstDash val="solid"/>
           </a:ln>
+          <a:effectLst>
+            <a:outerShdw sx="100000" sy="100000" kx="0" ky="0" algn="bl" rotWithShape="0" blurRad="177800" dist="50800" dir="5400000">
+              <a:srgbClr val="7E88A8">
+                <a:alpha val="30000"/>
+              </a:srgbClr>
+            </a:outerShdw>
+          </a:effectLst>
         </p:spPr>
       </p:sp>
       <p:sp>
@@ -11047,10 +10848,10 @@
         </p:nvSpPr>
         <p:spPr>
           <a:xfrm>
-            <a:off x="6470752" y="1609344"/>
-            <a:ext cx="292608" cy="292608"/>
-          </a:xfrm>
-          <a:prstGeom prst="ellipse">
+            <a:off x="4627778" y="1737360"/>
+            <a:ext cx="384048" cy="45720"/>
+          </a:xfrm>
+          <a:prstGeom prst="rect">
             <a:avLst/>
           </a:prstGeom>
           <a:solidFill>
@@ -11067,66 +10868,47 @@
         </p:nvSpPr>
         <p:spPr>
           <a:xfrm>
-            <a:off x="6470752" y="1609344"/>
-            <a:ext cx="292608" cy="292608"/>
-          </a:xfrm>
-          <a:prstGeom prst="rect">
-            <a:avLst/>
-          </a:prstGeom>
-          <a:noFill/>
-          <a:ln/>
-        </p:spPr>
-        <p:txBody>
-          <a:bodyPr wrap="square" lIns="0" tIns="0" rIns="0" bIns="0" rtlCol="0" anchor="ctr"/>
-          <a:lstStyle/>
-          <a:p>
-            <a:pPr algn="ctr" indent="0" marL="0">
-              <a:buNone/>
-            </a:pPr>
-            <a:r>
-              <a:rPr lang="en-US" sz="1200" dirty="0">
-                <a:solidFill>
-                  <a:srgbClr val="FFFFFF"/>
+            <a:off x="4627778" y="1865376"/>
+            <a:ext cx="2936138" cy="749808"/>
+          </a:xfrm>
+          <a:prstGeom prst="rect">
+            <a:avLst/>
+          </a:prstGeom>
+          <a:noFill/>
+          <a:ln/>
+        </p:spPr>
+        <p:txBody>
+          <a:bodyPr wrap="square" lIns="0" tIns="0" rIns="0" bIns="0" rtlCol="0" anchor="t"/>
+          <a:lstStyle/>
+          <a:p>
+            <a:pPr indent="0" marL="0">
+              <a:lnSpc>
+                <a:spcPct val="100000"/>
+              </a:lnSpc>
+              <a:buNone/>
+            </a:pPr>
+            <a:r>
+              <a:rPr lang="en-US" sz="2200" dirty="0">
+                <a:solidFill>
+                  <a:srgbClr val="1E2761"/>
                 </a:solidFill>
                 <a:latin typeface="Segoe UI Semibold" pitchFamily="34" charset="0"/>
                 <a:ea typeface="Segoe UI Semibold" pitchFamily="34" charset="-122"/>
                 <a:cs typeface="Segoe UI Semibold" pitchFamily="34" charset="-120"/>
               </a:rPr>
-              <a:t>2</a:t>
-            </a:r>
-            <a:endParaRPr lang="en-US" sz="1200" dirty="0"/>
-          </a:p>
-        </p:txBody>
-      </p:sp>
-      <p:sp>
-        <p:nvSpPr>
-          <p:cNvPr id="13" name="Text 11"/>
-          <p:cNvSpPr txBox="1"/>
-          <p:nvPr/>
-        </p:nvSpPr>
-        <p:spPr>
-          <a:xfrm>
-            <a:off x="6891376" y="1554480"/>
-            <a:ext cx="4660240" cy="786384"/>
-          </a:xfrm>
-          <a:prstGeom prst="rect">
-            <a:avLst/>
-          </a:prstGeom>
-          <a:noFill/>
-          <a:ln/>
-        </p:spPr>
-        <p:txBody>
-          <a:bodyPr wrap="square" lIns="0" tIns="0" rIns="0" bIns="0" rtlCol="0" anchor="ctr"/>
-          <a:lstStyle/>
+              <a:t>Данила</a:t>
+            </a:r>
+            <a:endParaRPr lang="en-US" sz="2200" dirty="0"/>
+          </a:p>
           <a:p>
             <a:pPr indent="0" marL="0">
               <a:lnSpc>
-                <a:spcPct val="105000"/>
+                <a:spcPct val="100000"/>
               </a:lnSpc>
               <a:buNone/>
             </a:pPr>
             <a:r>
-              <a:rPr lang="en-US" sz="1250" dirty="0">
+              <a:rPr lang="en-US" sz="2200" dirty="0">
                 <a:solidFill>
                   <a:srgbClr val="1E2761"/>
                 </a:solidFill>
@@ -11134,9 +10916,48 @@
                 <a:ea typeface="Segoe UI Semibold" pitchFamily="34" charset="-122"/>
                 <a:cs typeface="Segoe UI Semibold" pitchFamily="34" charset="-120"/>
               </a:rPr>
-              <a:t>Сколько это стоит?</a:t>
-            </a:r>
-            <a:endParaRPr lang="en-US" sz="1250" dirty="0"/>
+              <a:t>Кашев</a:t>
+            </a:r>
+            <a:endParaRPr lang="en-US" sz="2200" dirty="0"/>
+          </a:p>
+        </p:txBody>
+      </p:sp>
+      <p:sp>
+        <p:nvSpPr>
+          <p:cNvPr id="13" name="Text 11"/>
+          <p:cNvSpPr txBox="1"/>
+          <p:nvPr/>
+        </p:nvSpPr>
+        <p:spPr>
+          <a:xfrm>
+            <a:off x="4627778" y="2651760"/>
+            <a:ext cx="2936138" cy="274320"/>
+          </a:xfrm>
+          <a:prstGeom prst="rect">
+            <a:avLst/>
+          </a:prstGeom>
+          <a:noFill/>
+          <a:ln/>
+        </p:spPr>
+        <p:txBody>
+          <a:bodyPr wrap="square" lIns="0" tIns="0" rIns="0" bIns="0" rtlCol="0" anchor="ctr"/>
+          <a:lstStyle/>
+          <a:p>
+            <a:pPr indent="0" marL="0">
+              <a:buNone/>
+            </a:pPr>
+            <a:r>
+              <a:rPr lang="en-US" sz="1300" spc="200" kern="0" dirty="0">
+                <a:solidFill>
+                  <a:srgbClr val="C9A24B"/>
+                </a:solidFill>
+                <a:latin typeface="Segoe UI Semibold" pitchFamily="34" charset="0"/>
+                <a:ea typeface="Segoe UI Semibold" pitchFamily="34" charset="-122"/>
+                <a:cs typeface="Segoe UI Semibold" pitchFamily="34" charset="-120"/>
+              </a:rPr>
+              <a:t>СО-ОСНОВАТЕЛЬ</a:t>
+            </a:r>
+            <a:endParaRPr lang="en-US" sz="1300" dirty="0"/>
           </a:p>
         </p:txBody>
       </p:sp>
@@ -11148,8 +10969,8 @@
         </p:nvSpPr>
         <p:spPr>
           <a:xfrm>
-            <a:off x="6470752" y="2450592"/>
-            <a:ext cx="5099152" cy="1088136"/>
+            <a:off x="4646066" y="3017520"/>
+            <a:ext cx="2954426" cy="3017520"/>
           </a:xfrm>
           <a:prstGeom prst="rect">
             <a:avLst/>
@@ -11161,14 +10982,18 @@
           <a:bodyPr wrap="square" lIns="0" tIns="0" rIns="0" bIns="0" rtlCol="0" anchor="t"/>
           <a:lstStyle/>
           <a:p>
-            <a:pPr indent="0" marL="0">
+            <a:pPr marL="152400" indent="-152400">
               <a:lnSpc>
-                <a:spcPct val="112000"/>
+                <a:spcPct val="108000"/>
               </a:lnSpc>
-              <a:buNone/>
-            </a:pPr>
-            <a:r>
-              <a:rPr lang="en-US" sz="1050" dirty="0">
+              <a:spcAft>
+                <a:spcPts val="800"/>
+              </a:spcAft>
+              <a:buSzPct val="100000"/>
+              <a:buChar char="•"/>
+            </a:pPr>
+            <a:r>
+              <a:rPr lang="en-US" sz="1600" dirty="0">
                 <a:solidFill>
                   <a:srgbClr val="1B2140"/>
                 </a:solidFill>
@@ -11176,9 +11001,57 @@
                 <a:ea typeface="Segoe UI" pitchFamily="34" charset="-122"/>
                 <a:cs typeface="Segoe UI" pitchFamily="34" charset="-120"/>
               </a:rPr>
-              <a:t>Оплата поэтапная, у каждого этапа своя точка выхода. Условия — по итогам диагностики задачи</a:t>
-            </a:r>
-            <a:endParaRPr lang="en-US" sz="1050" dirty="0"/>
+              <a:t>X5 Retail: внедрение новых технологий в рознице</a:t>
+            </a:r>
+            <a:endParaRPr lang="en-US" sz="1600" dirty="0"/>
+          </a:p>
+          <a:p>
+            <a:pPr marL="152400" indent="-152400">
+              <a:lnSpc>
+                <a:spcPct val="108000"/>
+              </a:lnSpc>
+              <a:spcAft>
+                <a:spcPts val="800"/>
+              </a:spcAft>
+              <a:buSzPct val="100000"/>
+              <a:buChar char="•"/>
+            </a:pPr>
+            <a:r>
+              <a:rPr lang="en-US" sz="1600" dirty="0">
+                <a:solidFill>
+                  <a:srgbClr val="1B2140"/>
+                </a:solidFill>
+                <a:latin typeface="Segoe UI" pitchFamily="34" charset="0"/>
+                <a:ea typeface="Segoe UI" pitchFamily="34" charset="-122"/>
+                <a:cs typeface="Segoe UI" pitchFamily="34" charset="-120"/>
+              </a:rPr>
+              <a:t>ФГУП «ЗащитаИнфоТранс»: реестр отечественного ПО</a:t>
+            </a:r>
+            <a:endParaRPr lang="en-US" sz="1600" dirty="0"/>
+          </a:p>
+          <a:p>
+            <a:pPr marL="152400" indent="-152400">
+              <a:lnSpc>
+                <a:spcPct val="108000"/>
+              </a:lnSpc>
+              <a:spcAft>
+                <a:spcPts val="800"/>
+              </a:spcAft>
+              <a:buSzPct val="100000"/>
+              <a:buChar char="•"/>
+            </a:pPr>
+            <a:r>
+              <a:rPr lang="en-US" sz="1600" dirty="0">
+                <a:solidFill>
+                  <a:srgbClr val="1B2140"/>
+                </a:solidFill>
+                <a:latin typeface="Segoe UI" pitchFamily="34" charset="0"/>
+                <a:ea typeface="Segoe UI" pitchFamily="34" charset="-122"/>
+                <a:cs typeface="Segoe UI" pitchFamily="34" charset="-120"/>
+              </a:rPr>
+              <a:t>Студия разработки: 4 → 15 человек, 50+ проектов</a:t>
+            </a:r>
+            <a:endParaRPr lang="en-US" sz="1600" dirty="0"/>
           </a:p>
         </p:txBody>
       </p:sp>
@@ -11190,12 +11063,12 @@
         </p:nvSpPr>
         <p:spPr>
           <a:xfrm>
-            <a:off x="384048" y="3959352"/>
-            <a:ext cx="5574640" cy="2331720"/>
+            <a:off x="8167421" y="1481328"/>
+            <a:ext cx="3521354" cy="4709160"/>
           </a:xfrm>
           <a:prstGeom prst="roundRect">
             <a:avLst>
-              <a:gd name="adj" fmla="val 2745"/>
+              <a:gd name="adj" fmla="val 2337"/>
             </a:avLst>
           </a:prstGeom>
           <a:solidFill>
@@ -11207,6 +11080,13 @@
             </a:solidFill>
             <a:prstDash val="solid"/>
           </a:ln>
+          <a:effectLst>
+            <a:outerShdw sx="100000" sy="100000" kx="0" ky="0" algn="bl" rotWithShape="0" blurRad="177800" dist="50800" dir="5400000">
+              <a:srgbClr val="7E88A8">
+                <a:alpha val="30000"/>
+              </a:srgbClr>
+            </a:outerShdw>
+          </a:effectLst>
         </p:spPr>
       </p:sp>
       <p:sp>
@@ -11217,10 +11097,10 @@
         </p:nvSpPr>
         <p:spPr>
           <a:xfrm>
-            <a:off x="621792" y="4197096"/>
-            <a:ext cx="292608" cy="292608"/>
-          </a:xfrm>
-          <a:prstGeom prst="ellipse">
+            <a:off x="8460029" y="1737360"/>
+            <a:ext cx="384048" cy="45720"/>
+          </a:xfrm>
+          <a:prstGeom prst="rect">
             <a:avLst/>
           </a:prstGeom>
           <a:solidFill>
@@ -11237,66 +11117,47 @@
         </p:nvSpPr>
         <p:spPr>
           <a:xfrm>
-            <a:off x="621792" y="4197096"/>
-            <a:ext cx="292608" cy="292608"/>
-          </a:xfrm>
-          <a:prstGeom prst="rect">
-            <a:avLst/>
-          </a:prstGeom>
-          <a:noFill/>
-          <a:ln/>
-        </p:spPr>
-        <p:txBody>
-          <a:bodyPr wrap="square" lIns="0" tIns="0" rIns="0" bIns="0" rtlCol="0" anchor="ctr"/>
-          <a:lstStyle/>
-          <a:p>
-            <a:pPr algn="ctr" indent="0" marL="0">
-              <a:buNone/>
-            </a:pPr>
-            <a:r>
-              <a:rPr lang="en-US" sz="1200" dirty="0">
-                <a:solidFill>
-                  <a:srgbClr val="FFFFFF"/>
+            <a:off x="8460029" y="1865376"/>
+            <a:ext cx="2936138" cy="749808"/>
+          </a:xfrm>
+          <a:prstGeom prst="rect">
+            <a:avLst/>
+          </a:prstGeom>
+          <a:noFill/>
+          <a:ln/>
+        </p:spPr>
+        <p:txBody>
+          <a:bodyPr wrap="square" lIns="0" tIns="0" rIns="0" bIns="0" rtlCol="0" anchor="t"/>
+          <a:lstStyle/>
+          <a:p>
+            <a:pPr indent="0" marL="0">
+              <a:lnSpc>
+                <a:spcPct val="100000"/>
+              </a:lnSpc>
+              <a:buNone/>
+            </a:pPr>
+            <a:r>
+              <a:rPr lang="en-US" sz="2200" dirty="0">
+                <a:solidFill>
+                  <a:srgbClr val="1E2761"/>
                 </a:solidFill>
                 <a:latin typeface="Segoe UI Semibold" pitchFamily="34" charset="0"/>
                 <a:ea typeface="Segoe UI Semibold" pitchFamily="34" charset="-122"/>
                 <a:cs typeface="Segoe UI Semibold" pitchFamily="34" charset="-120"/>
               </a:rPr>
-              <a:t>3</a:t>
-            </a:r>
-            <a:endParaRPr lang="en-US" sz="1200" dirty="0"/>
-          </a:p>
-        </p:txBody>
-      </p:sp>
-      <p:sp>
-        <p:nvSpPr>
-          <p:cNvPr id="18" name="Text 16"/>
-          <p:cNvSpPr txBox="1"/>
-          <p:nvPr/>
-        </p:nvSpPr>
-        <p:spPr>
-          <a:xfrm>
-            <a:off x="1042416" y="4142232"/>
-            <a:ext cx="4660240" cy="786384"/>
-          </a:xfrm>
-          <a:prstGeom prst="rect">
-            <a:avLst/>
-          </a:prstGeom>
-          <a:noFill/>
-          <a:ln/>
-        </p:spPr>
-        <p:txBody>
-          <a:bodyPr wrap="square" lIns="0" tIns="0" rIns="0" bIns="0" rtlCol="0" anchor="ctr"/>
-          <a:lstStyle/>
+              <a:t>Дмитрий</a:t>
+            </a:r>
+            <a:endParaRPr lang="en-US" sz="2200" dirty="0"/>
+          </a:p>
           <a:p>
             <a:pPr indent="0" marL="0">
               <a:lnSpc>
-                <a:spcPct val="105000"/>
+                <a:spcPct val="100000"/>
               </a:lnSpc>
               <a:buNone/>
             </a:pPr>
             <a:r>
-              <a:rPr lang="en-US" sz="1250" dirty="0">
+              <a:rPr lang="en-US" sz="2200" dirty="0">
                 <a:solidFill>
                   <a:srgbClr val="1E2761"/>
                 </a:solidFill>
@@ -11304,9 +11165,48 @@
                 <a:ea typeface="Segoe UI Semibold" pitchFamily="34" charset="-122"/>
                 <a:cs typeface="Segoe UI Semibold" pitchFamily="34" charset="-120"/>
               </a:rPr>
-              <a:t>А если субсидию не дадут?</a:t>
-            </a:r>
-            <a:endParaRPr lang="en-US" sz="1250" dirty="0"/>
+              <a:t>Пересторонин</a:t>
+            </a:r>
+            <a:endParaRPr lang="en-US" sz="2200" dirty="0"/>
+          </a:p>
+        </p:txBody>
+      </p:sp>
+      <p:sp>
+        <p:nvSpPr>
+          <p:cNvPr id="18" name="Text 16"/>
+          <p:cNvSpPr txBox="1"/>
+          <p:nvPr/>
+        </p:nvSpPr>
+        <p:spPr>
+          <a:xfrm>
+            <a:off x="8460029" y="2651760"/>
+            <a:ext cx="2936138" cy="274320"/>
+          </a:xfrm>
+          <a:prstGeom prst="rect">
+            <a:avLst/>
+          </a:prstGeom>
+          <a:noFill/>
+          <a:ln/>
+        </p:spPr>
+        <p:txBody>
+          <a:bodyPr wrap="square" lIns="0" tIns="0" rIns="0" bIns="0" rtlCol="0" anchor="ctr"/>
+          <a:lstStyle/>
+          <a:p>
+            <a:pPr indent="0" marL="0">
+              <a:buNone/>
+            </a:pPr>
+            <a:r>
+              <a:rPr lang="en-US" sz="1300" spc="200" kern="0" dirty="0">
+                <a:solidFill>
+                  <a:srgbClr val="C9A24B"/>
+                </a:solidFill>
+                <a:latin typeface="Segoe UI Semibold" pitchFamily="34" charset="0"/>
+                <a:ea typeface="Segoe UI Semibold" pitchFamily="34" charset="-122"/>
+                <a:cs typeface="Segoe UI Semibold" pitchFamily="34" charset="-120"/>
+              </a:rPr>
+              <a:t>РЕГИОНАЛЬНЫЙ ПАРТНЁР</a:t>
+            </a:r>
+            <a:endParaRPr lang="en-US" sz="1300" dirty="0"/>
           </a:p>
         </p:txBody>
       </p:sp>
@@ -11318,8 +11218,8 @@
         </p:nvSpPr>
         <p:spPr>
           <a:xfrm>
-            <a:off x="621792" y="5038344"/>
-            <a:ext cx="5099152" cy="1088136"/>
+            <a:off x="8478317" y="3017520"/>
+            <a:ext cx="2954426" cy="3017520"/>
           </a:xfrm>
           <a:prstGeom prst="rect">
             <a:avLst/>
@@ -11331,14 +11231,18 @@
           <a:bodyPr wrap="square" lIns="0" tIns="0" rIns="0" bIns="0" rtlCol="0" anchor="t"/>
           <a:lstStyle/>
           <a:p>
-            <a:pPr indent="0" marL="0">
+            <a:pPr marL="152400" indent="-152400">
               <a:lnSpc>
-                <a:spcPct val="112000"/>
+                <a:spcPct val="108000"/>
               </a:lnSpc>
-              <a:buNone/>
-            </a:pPr>
-            <a:r>
-              <a:rPr lang="en-US" sz="1050" dirty="0">
+              <a:spcAft>
+                <a:spcPts val="800"/>
+              </a:spcAft>
+              <a:buSzPct val="100000"/>
+              <a:buChar char="•"/>
+            </a:pPr>
+            <a:r>
+              <a:rPr lang="en-US" sz="1600" dirty="0">
                 <a:solidFill>
                   <a:srgbClr val="1B2140"/>
                 </a:solidFill>
@@ -11346,169 +11250,23 @@
                 <a:ea typeface="Segoe UI" pitchFamily="34" charset="-122"/>
                 <a:cs typeface="Segoe UI" pitchFamily="34" charset="-120"/>
               </a:rPr>
-              <a:t>Экономику считаем без неё. Двойной вычет идёт без конкурса</a:t>
-            </a:r>
-            <a:endParaRPr lang="en-US" sz="1050" dirty="0"/>
-          </a:p>
-        </p:txBody>
-      </p:sp>
-      <p:sp>
-        <p:nvSpPr>
-          <p:cNvPr id="20" name="Shape 18"/>
-          <p:cNvSpPr/>
-          <p:nvPr/>
-        </p:nvSpPr>
-        <p:spPr>
-          <a:xfrm>
-            <a:off x="6233008" y="3959352"/>
-            <a:ext cx="5574640" cy="2331720"/>
-          </a:xfrm>
-          <a:prstGeom prst="roundRect">
-            <a:avLst>
-              <a:gd name="adj" fmla="val 2745"/>
-            </a:avLst>
-          </a:prstGeom>
-          <a:solidFill>
-            <a:srgbClr val="FFFFFF"/>
-          </a:solidFill>
-          <a:ln w="12700">
-            <a:solidFill>
-              <a:srgbClr val="C9D3EA"/>
-            </a:solidFill>
-            <a:prstDash val="solid"/>
-          </a:ln>
-        </p:spPr>
-      </p:sp>
-      <p:sp>
-        <p:nvSpPr>
-          <p:cNvPr id="21" name="Shape 19"/>
-          <p:cNvSpPr/>
-          <p:nvPr/>
-        </p:nvSpPr>
-        <p:spPr>
-          <a:xfrm>
-            <a:off x="6470752" y="4197096"/>
-            <a:ext cx="292608" cy="292608"/>
-          </a:xfrm>
-          <a:prstGeom prst="ellipse">
-            <a:avLst/>
-          </a:prstGeom>
-          <a:solidFill>
-            <a:srgbClr val="1E2761"/>
-          </a:solidFill>
-          <a:ln/>
-        </p:spPr>
-      </p:sp>
-      <p:sp>
-        <p:nvSpPr>
-          <p:cNvPr id="22" name="Text 20"/>
-          <p:cNvSpPr txBox="1"/>
-          <p:nvPr/>
-        </p:nvSpPr>
-        <p:spPr>
-          <a:xfrm>
-            <a:off x="6470752" y="4197096"/>
-            <a:ext cx="292608" cy="292608"/>
-          </a:xfrm>
-          <a:prstGeom prst="rect">
-            <a:avLst/>
-          </a:prstGeom>
-          <a:noFill/>
-          <a:ln/>
-        </p:spPr>
-        <p:txBody>
-          <a:bodyPr wrap="square" lIns="0" tIns="0" rIns="0" bIns="0" rtlCol="0" anchor="ctr"/>
-          <a:lstStyle/>
-          <a:p>
-            <a:pPr algn="ctr" indent="0" marL="0">
-              <a:buNone/>
-            </a:pPr>
-            <a:r>
-              <a:rPr lang="en-US" sz="1200" dirty="0">
-                <a:solidFill>
-                  <a:srgbClr val="FFFFFF"/>
-                </a:solidFill>
-                <a:latin typeface="Segoe UI Semibold" pitchFamily="34" charset="0"/>
-                <a:ea typeface="Segoe UI Semibold" pitchFamily="34" charset="-122"/>
-                <a:cs typeface="Segoe UI Semibold" pitchFamily="34" charset="-120"/>
-              </a:rPr>
-              <a:t>4</a:t>
-            </a:r>
-            <a:endParaRPr lang="en-US" sz="1200" dirty="0"/>
-          </a:p>
-        </p:txBody>
-      </p:sp>
-      <p:sp>
-        <p:nvSpPr>
-          <p:cNvPr id="23" name="Text 21"/>
-          <p:cNvSpPr txBox="1"/>
-          <p:nvPr/>
-        </p:nvSpPr>
-        <p:spPr>
-          <a:xfrm>
-            <a:off x="6891376" y="4142232"/>
-            <a:ext cx="4660240" cy="786384"/>
-          </a:xfrm>
-          <a:prstGeom prst="rect">
-            <a:avLst/>
-          </a:prstGeom>
-          <a:noFill/>
-          <a:ln/>
-        </p:spPr>
-        <p:txBody>
-          <a:bodyPr wrap="square" lIns="0" tIns="0" rIns="0" bIns="0" rtlCol="0" anchor="ctr"/>
-          <a:lstStyle/>
-          <a:p>
-            <a:pPr indent="0" marL="0">
+              <a:t>Привлечение спонсирования для спортивных мероприятий федерального и международного уровня</a:t>
+            </a:r>
+            <a:endParaRPr lang="en-US" sz="1600" dirty="0"/>
+          </a:p>
+          <a:p>
+            <a:pPr marL="152400" indent="-152400">
               <a:lnSpc>
-                <a:spcPct val="105000"/>
+                <a:spcPct val="108000"/>
               </a:lnSpc>
-              <a:buNone/>
-            </a:pPr>
-            <a:r>
-              <a:rPr lang="en-US" sz="1250" dirty="0">
-                <a:solidFill>
-                  <a:srgbClr val="1E2761"/>
-                </a:solidFill>
-                <a:latin typeface="Segoe UI Semibold" pitchFamily="34" charset="0"/>
-                <a:ea typeface="Segoe UI Semibold" pitchFamily="34" charset="-122"/>
-                <a:cs typeface="Segoe UI Semibold" pitchFamily="34" charset="-120"/>
-              </a:rPr>
-              <a:t>Кто отвечает за результат?</a:t>
-            </a:r>
-            <a:endParaRPr lang="en-US" sz="1250" dirty="0"/>
-          </a:p>
-        </p:txBody>
-      </p:sp>
-      <p:sp>
-        <p:nvSpPr>
-          <p:cNvPr id="24" name="Text 22"/>
-          <p:cNvSpPr txBox="1"/>
-          <p:nvPr/>
-        </p:nvSpPr>
-        <p:spPr>
-          <a:xfrm>
-            <a:off x="6470752" y="5038344"/>
-            <a:ext cx="5099152" cy="1088136"/>
-          </a:xfrm>
-          <a:prstGeom prst="rect">
-            <a:avLst/>
-          </a:prstGeom>
-          <a:noFill/>
-          <a:ln/>
-        </p:spPr>
-        <p:txBody>
-          <a:bodyPr wrap="square" lIns="0" tIns="0" rIns="0" bIns="0" rtlCol="0" anchor="t"/>
-          <a:lstStyle/>
-          <a:p>
-            <a:pPr indent="0" marL="0">
-              <a:lnSpc>
-                <a:spcPct val="112000"/>
-              </a:lnSpc>
-              <a:buNone/>
-            </a:pPr>
-            <a:r>
-              <a:rPr lang="en-US" sz="1050" dirty="0">
+              <a:spcAft>
+                <a:spcPts val="800"/>
+              </a:spcAft>
+              <a:buSzPct val="100000"/>
+              <a:buChar char="•"/>
+            </a:pPr>
+            <a:r>
+              <a:rPr lang="en-US" sz="1600" dirty="0">
                 <a:solidFill>
                   <a:srgbClr val="1B2140"/>
                 </a:solidFill>
@@ -11516,42 +11274,22 @@
                 <a:ea typeface="Segoe UI" pitchFamily="34" charset="-122"/>
                 <a:cs typeface="Segoe UI" pitchFamily="34" charset="-120"/>
               </a:rPr>
-              <a:t>Мы: часть вознаграждения получаем только при внедрении</a:t>
-            </a:r>
-            <a:endParaRPr lang="en-US" sz="1050" dirty="0"/>
-          </a:p>
-        </p:txBody>
-      </p:sp>
-      <p:sp>
-        <p:nvSpPr>
-          <p:cNvPr id="25" name="Shape 23"/>
-          <p:cNvSpPr/>
-          <p:nvPr/>
-        </p:nvSpPr>
-        <p:spPr>
-          <a:xfrm>
-            <a:off x="0" y="6803136"/>
-            <a:ext cx="12191695" cy="54864"/>
-          </a:xfrm>
-          <a:prstGeom prst="rect">
-            <a:avLst/>
-          </a:prstGeom>
-          <a:solidFill>
-            <a:srgbClr val="1E2761"/>
-          </a:solidFill>
-          <a:ln/>
-        </p:spPr>
-      </p:sp>
-      <p:sp>
-        <p:nvSpPr>
-          <p:cNvPr id="26" name="Text 24"/>
-          <p:cNvSpPr txBox="1"/>
-          <p:nvPr/>
-        </p:nvSpPr>
-        <p:spPr>
-          <a:xfrm>
-            <a:off x="384048" y="6528816"/>
-            <a:ext cx="1828800" cy="219456"/>
+              <a:t>Инициатор проектов по созданию и развитию индустриальных парков в Свердловской области</a:t>
+            </a:r>
+            <a:endParaRPr lang="en-US" sz="1600" dirty="0"/>
+          </a:p>
+        </p:txBody>
+      </p:sp>
+      <p:sp>
+        <p:nvSpPr>
+          <p:cNvPr id="20" name="Text 18"/>
+          <p:cNvSpPr txBox="1"/>
+          <p:nvPr/>
+        </p:nvSpPr>
+        <p:spPr>
+          <a:xfrm>
+            <a:off x="502920" y="6473952"/>
+            <a:ext cx="1828800" cy="274320"/>
           </a:xfrm>
           <a:prstGeom prst="rect">
             <a:avLst/>
@@ -11567,7 +11305,7 @@
               <a:buNone/>
             </a:pPr>
             <a:r>
-              <a:rPr lang="en-US" sz="750" dirty="0">
+              <a:rPr lang="en-US" sz="1200" dirty="0">
                 <a:solidFill>
                   <a:srgbClr val="6B7699"/>
                 </a:solidFill>
@@ -11577,20 +11315,20 @@
               </a:rPr>
               <a:t>Ситалл</a:t>
             </a:r>
-            <a:endParaRPr lang="en-US" sz="750" dirty="0"/>
-          </a:p>
-        </p:txBody>
-      </p:sp>
-      <p:sp>
-        <p:nvSpPr>
-          <p:cNvPr id="27" name="Text 25"/>
-          <p:cNvSpPr txBox="1"/>
-          <p:nvPr/>
-        </p:nvSpPr>
-        <p:spPr>
-          <a:xfrm>
-            <a:off x="10911535" y="6528816"/>
-            <a:ext cx="914400" cy="219456"/>
+            <a:endParaRPr lang="en-US" sz="1200" dirty="0"/>
+          </a:p>
+        </p:txBody>
+      </p:sp>
+      <p:sp>
+        <p:nvSpPr>
+          <p:cNvPr id="21" name="Text 19"/>
+          <p:cNvSpPr txBox="1"/>
+          <p:nvPr/>
+        </p:nvSpPr>
+        <p:spPr>
+          <a:xfrm>
+            <a:off x="10774375" y="6473952"/>
+            <a:ext cx="914400" cy="274320"/>
           </a:xfrm>
           <a:prstGeom prst="rect">
             <a:avLst/>
@@ -11606,7 +11344,7 @@
               <a:buNone/>
             </a:pPr>
             <a:r>
-              <a:rPr lang="en-US" sz="750" dirty="0">
+              <a:rPr lang="en-US" sz="1200" dirty="0">
                 <a:solidFill>
                   <a:srgbClr val="6B7699"/>
                 </a:solidFill>
@@ -11616,7 +11354,7 @@
               </a:rPr>
               <a:t>09 / 10</a:t>
             </a:r>
-            <a:endParaRPr lang="en-US" sz="750" dirty="0"/>
+            <a:endParaRPr lang="en-US" sz="1200" dirty="0"/>
           </a:p>
         </p:txBody>
       </p:sp>
